--- a/slides/output/Career_Canvas_Meeting_5_Create_For_A_Real_Audience.pptx
+++ b/slides/output/Career_Canvas_Meeting_5_Create_For_A_Real_Audience.pptx
@@ -2,23 +2,23 @@
 <file path=ppt/presentation.xml><?xml version="1.0" encoding="utf-8"?>
 <p:presentation xmlns:p="http://schemas.openxmlformats.org/presentationml/2006/main">
   <p:sldMasterIdLst>
-    <p:sldMasterId xmlns:r="http://schemas.openxmlformats.org/officeDocument/2006/relationships" id="2147483648" r:id="R1e85588d6a8149d7"/>
+    <p:sldMasterId xmlns:r="http://schemas.openxmlformats.org/officeDocument/2006/relationships" id="2147483648" r:id="R9fd52fde5a124f3d"/>
   </p:sldMasterIdLst>
   <p:notesMasterIdLst>
-    <p:notesMasterId xmlns:r="http://schemas.openxmlformats.org/officeDocument/2006/relationships" r:id="Rcb0d3d8efaa9491e"/>
+    <p:notesMasterId xmlns:r="http://schemas.openxmlformats.org/officeDocument/2006/relationships" r:id="R74fcbc8087c249fe"/>
   </p:notesMasterIdLst>
   <p:sldIdLst>
-    <p:sldId xmlns:r="http://schemas.openxmlformats.org/officeDocument/2006/relationships" id="256" r:id="Rfc228a932d074db1"/>
-    <p:sldId xmlns:r="http://schemas.openxmlformats.org/officeDocument/2006/relationships" id="257" r:id="R168655d06e0e46fa"/>
-    <p:sldId xmlns:r="http://schemas.openxmlformats.org/officeDocument/2006/relationships" id="258" r:id="Re3844a10b66946b3"/>
-    <p:sldId xmlns:r="http://schemas.openxmlformats.org/officeDocument/2006/relationships" id="259" r:id="R61300ac5e6d145b6"/>
-    <p:sldId xmlns:r="http://schemas.openxmlformats.org/officeDocument/2006/relationships" id="260" r:id="R6f7c82d45c6a44e5"/>
-    <p:sldId xmlns:r="http://schemas.openxmlformats.org/officeDocument/2006/relationships" id="261" r:id="R615ca17e9b6c433c"/>
-    <p:sldId xmlns:r="http://schemas.openxmlformats.org/officeDocument/2006/relationships" id="262" r:id="R7f41075a3f62493f"/>
-    <p:sldId xmlns:r="http://schemas.openxmlformats.org/officeDocument/2006/relationships" id="263" r:id="R3c2baa0217ef4250"/>
-    <p:sldId xmlns:r="http://schemas.openxmlformats.org/officeDocument/2006/relationships" id="264" r:id="R7748f1f1bbc642e5"/>
-    <p:sldId xmlns:r="http://schemas.openxmlformats.org/officeDocument/2006/relationships" id="265" r:id="R8a341c6618d14ec6"/>
-    <p:sldId xmlns:r="http://schemas.openxmlformats.org/officeDocument/2006/relationships" id="266" r:id="R81d3ff16434f4a95"/>
+    <p:sldId xmlns:r="http://schemas.openxmlformats.org/officeDocument/2006/relationships" id="256" r:id="R6985d2fb0b0e4ea2"/>
+    <p:sldId xmlns:r="http://schemas.openxmlformats.org/officeDocument/2006/relationships" id="257" r:id="R5edc61f6c81b4036"/>
+    <p:sldId xmlns:r="http://schemas.openxmlformats.org/officeDocument/2006/relationships" id="258" r:id="Re3c47b3bfc0c4150"/>
+    <p:sldId xmlns:r="http://schemas.openxmlformats.org/officeDocument/2006/relationships" id="259" r:id="R1c44090c82af4431"/>
+    <p:sldId xmlns:r="http://schemas.openxmlformats.org/officeDocument/2006/relationships" id="260" r:id="R7b038387670f4fc3"/>
+    <p:sldId xmlns:r="http://schemas.openxmlformats.org/officeDocument/2006/relationships" id="261" r:id="Re9d1dc016869492f"/>
+    <p:sldId xmlns:r="http://schemas.openxmlformats.org/officeDocument/2006/relationships" id="262" r:id="R971c20dfb0ca48e6"/>
+    <p:sldId xmlns:r="http://schemas.openxmlformats.org/officeDocument/2006/relationships" id="263" r:id="R6b0e64c9bdd64757"/>
+    <p:sldId xmlns:r="http://schemas.openxmlformats.org/officeDocument/2006/relationships" id="264" r:id="R37c76976213b45c1"/>
+    <p:sldId xmlns:r="http://schemas.openxmlformats.org/officeDocument/2006/relationships" id="265" r:id="R99d17a121533491b"/>
+    <p:sldId xmlns:r="http://schemas.openxmlformats.org/officeDocument/2006/relationships" id="266" r:id="R6ec837b844144a38"/>
   </p:sldIdLst>
   <p:sldSz cx="12192000" cy="6858000"/>
   <p:notesSz cx="6858000" cy="9144000"/>
@@ -1390,7 +1390,7 @@
   </p:cSld>
   <p:clrMap bg1="lt1" tx1="dk1" bg2="lt2" tx2="dk2" accent1="accent1" accent2="accent2" accent3="accent3" accent4="accent4" accent5="accent5" accent6="accent6" hlink="hlink" folHlink="folHlink"/>
   <p:sldLayoutIdLst>
-    <p:sldLayoutId xmlns:r="http://schemas.openxmlformats.org/officeDocument/2006/relationships" id="2147483649" r:id="R3be189ebf7504db3"/>
+    <p:sldLayoutId xmlns:r="http://schemas.openxmlformats.org/officeDocument/2006/relationships" id="2147483649" r:id="R032c1732a2f541e0"/>
   </p:sldLayoutIdLst>
   <p:txStyles>
     <p:titleStyle>
@@ -1938,10 +1938,10 @@
       </p:grpSpPr>
       <p:sp>
         <p:nvSpPr>
-          <p:cNvPr id="11" name="">
-            <a:extLst xmlns:a="http://schemas.openxmlformats.org/drawingml/2006/main">
-              <a:ext uri="{FF2B5EF4-FFF2-40B4-BE49-F238E27FC236}">
-                <a16:creationId xmlns:a16="http://schemas.microsoft.com/office/drawing/2014/main" id="{5AF9ABAC-10FF-4807-83C0-99A1D5CE1B08}"/>
+          <p:cNvPr id="12" name="">
+            <a:extLst xmlns:a="http://schemas.openxmlformats.org/drawingml/2006/main">
+              <a:ext uri="{FF2B5EF4-FFF2-40B4-BE49-F238E27FC236}">
+                <a16:creationId xmlns:a16="http://schemas.microsoft.com/office/drawing/2014/main" id="{93E62C56-E650-42CC-9FD3-74FE98DBC4BE}"/>
               </a:ext>
             </a:extLst>
           </p:cNvPr>
@@ -1959,7 +1959,7 @@
             <a:avLst/>
           </a:prstGeom>
           <a:solidFill xmlns:a="http://schemas.openxmlformats.org/drawingml/2006/main">
-            <a:srgbClr val="EEF7FF"/>
+            <a:srgbClr val="0F1A2B"/>
           </a:solidFill>
           <a:ln xmlns:a="http://schemas.openxmlformats.org/drawingml/2006/main" w="0">
             <a:noFill/>
@@ -1971,27 +1971,27 @@
           <p:cNvPr id="2" name="">
             <a:extLst xmlns:a="http://schemas.openxmlformats.org/drawingml/2006/main">
               <a:ext uri="{FF2B5EF4-FFF2-40B4-BE49-F238E27FC236}">
-                <a16:creationId xmlns:a16="http://schemas.microsoft.com/office/drawing/2014/main" id="{4F81D4CC-A47A-4273-830E-B0D68E9E828D}"/>
-              </a:ext>
-            </a:extLst>
-          </p:cNvPr>
-          <p:cNvSpPr>
-            <a:spLocks xmlns:a="http://schemas.openxmlformats.org/drawingml/2006/main" noGrp="1"/>
-          </p:cNvSpPr>
-          <p:nvPr/>
-        </p:nvSpPr>
-        <p:spPr>
-          <a:xfrm xmlns:a="http://schemas.openxmlformats.org/drawingml/2006/main">
-            <a:off x="7239000" y="1143000"/>
-            <a:ext cx="4381500" cy="4572000"/>
+                <a16:creationId xmlns:a16="http://schemas.microsoft.com/office/drawing/2014/main" id="{24D5D742-3D08-46D6-90A3-ECD8045FA0C4}"/>
+              </a:ext>
+            </a:extLst>
+          </p:cNvPr>
+          <p:cNvSpPr>
+            <a:spLocks xmlns:a="http://schemas.openxmlformats.org/drawingml/2006/main" noGrp="1"/>
+          </p:cNvSpPr>
+          <p:nvPr/>
+        </p:nvSpPr>
+        <p:spPr>
+          <a:xfrm xmlns:a="http://schemas.openxmlformats.org/drawingml/2006/main">
+            <a:off x="7239000" y="1333500"/>
+            <a:ext cx="4381500" cy="4191000"/>
           </a:xfrm>
           <a:prstGeom xmlns:a="http://schemas.openxmlformats.org/drawingml/2006/main" prst="roundRect">
             <a:avLst>
-              <a:gd name="adj" fmla="val 1739"/>
+              <a:gd name="adj" fmla="val 1818"/>
             </a:avLst>
           </a:prstGeom>
           <a:solidFill xmlns:a="http://schemas.openxmlformats.org/drawingml/2006/main">
-            <a:srgbClr val="092454"/>
+            <a:srgbClr val="1C2E4A"/>
           </a:solidFill>
           <a:ln xmlns:a="http://schemas.openxmlformats.org/drawingml/2006/main" w="0">
             <a:noFill/>
@@ -2003,18 +2003,18 @@
           <p:cNvPr id="3" name="">
             <a:extLst xmlns:a="http://schemas.openxmlformats.org/drawingml/2006/main">
               <a:ext uri="{FF2B5EF4-FFF2-40B4-BE49-F238E27FC236}">
-                <a16:creationId xmlns:a16="http://schemas.microsoft.com/office/drawing/2014/main" id="{05F88387-8582-451E-AF60-5953A7DDD17C}"/>
-              </a:ext>
-            </a:extLst>
-          </p:cNvPr>
-          <p:cNvSpPr>
-            <a:spLocks xmlns:a="http://schemas.openxmlformats.org/drawingml/2006/main" noGrp="1"/>
-          </p:cNvSpPr>
-          <p:nvPr/>
-        </p:nvSpPr>
-        <p:spPr>
-          <a:xfrm xmlns:a="http://schemas.openxmlformats.org/drawingml/2006/main">
-            <a:off x="7620000" y="1600200"/>
+                <a16:creationId xmlns:a16="http://schemas.microsoft.com/office/drawing/2014/main" id="{76C0A3CA-55FE-40BD-BF60-088305D7A9A4}"/>
+              </a:ext>
+            </a:extLst>
+          </p:cNvPr>
+          <p:cNvSpPr>
+            <a:spLocks xmlns:a="http://schemas.openxmlformats.org/drawingml/2006/main" noGrp="1"/>
+          </p:cNvSpPr>
+          <p:nvPr/>
+        </p:nvSpPr>
+        <p:spPr>
+          <a:xfrm xmlns:a="http://schemas.openxmlformats.org/drawingml/2006/main">
+            <a:off x="7620000" y="1771650"/>
             <a:ext cx="3619500" cy="266700"/>
           </a:xfrm>
           <a:prstGeom xmlns:a="http://schemas.openxmlformats.org/drawingml/2006/main" prst="rect">
@@ -2032,19 +2032,19 @@
           <a:lstStyle xmlns:a="http://schemas.openxmlformats.org/drawingml/2006/main"/>
           <a:p xmlns:a="http://schemas.openxmlformats.org/drawingml/2006/main">
             <a:pPr algn="l">
-              <a:defRPr sz="1125" b="1">
-                <a:solidFill>
-                  <a:srgbClr val="FFD43B"/>
-                </a:solidFill>
-                <a:latin typeface="Helvetica Neue"/>
-                <a:ea typeface="Helvetica Neue"/>
-                <a:cs typeface="Helvetica Neue"/>
-              </a:defRPr>
-            </a:pPr>
-            <a:r>
-              <a:rPr sz="1125" b="1">
-                <a:solidFill>
-                  <a:srgbClr val="FFD43B"/>
+              <a:defRPr sz="1050" b="1">
+                <a:solidFill>
+                  <a:srgbClr val="D1CFC9"/>
+                </a:solidFill>
+                <a:latin typeface="Helvetica Neue"/>
+                <a:ea typeface="Helvetica Neue"/>
+                <a:cs typeface="Helvetica Neue"/>
+              </a:defRPr>
+            </a:pPr>
+            <a:r>
+              <a:rPr sz="1050" b="1">
+                <a:solidFill>
+                  <a:srgbClr val="D1CFC9"/>
                 </a:solidFill>
                 <a:latin typeface="Helvetica Neue"/>
                 <a:ea typeface="Helvetica Neue"/>
@@ -2060,156 +2060,19 @@
           <p:cNvPr id="4" name="">
             <a:extLst xmlns:a="http://schemas.openxmlformats.org/drawingml/2006/main">
               <a:ext uri="{FF2B5EF4-FFF2-40B4-BE49-F238E27FC236}">
-                <a16:creationId xmlns:a16="http://schemas.microsoft.com/office/drawing/2014/main" id="{8CF7A4E9-D9DA-44AC-AD8A-B965E7C39AFD}"/>
-              </a:ext>
-            </a:extLst>
-          </p:cNvPr>
-          <p:cNvSpPr>
-            <a:spLocks xmlns:a="http://schemas.openxmlformats.org/drawingml/2006/main" noGrp="1"/>
-          </p:cNvSpPr>
-          <p:nvPr/>
-        </p:nvSpPr>
-        <p:spPr>
-          <a:xfrm xmlns:a="http://schemas.openxmlformats.org/drawingml/2006/main">
-            <a:off x="7620000" y="2114550"/>
-            <a:ext cx="3657600" cy="2857500"/>
-          </a:xfrm>
-          <a:prstGeom xmlns:a="http://schemas.openxmlformats.org/drawingml/2006/main" prst="rect">
-            <a:avLst/>
-          </a:prstGeom>
-          <a:noFill xmlns:a="http://schemas.openxmlformats.org/drawingml/2006/main"/>
-          <a:ln xmlns:a="http://schemas.openxmlformats.org/drawingml/2006/main" w="0">
-            <a:noFill/>
-          </a:ln>
-        </p:spPr>
-        <p:txBody>
-          <a:bodyPr xmlns:a="http://schemas.openxmlformats.org/drawingml/2006/main" anchor="t">
-            <a:noAutofit/>
-          </a:bodyPr>
-          <a:lstStyle xmlns:a="http://schemas.openxmlformats.org/drawingml/2006/main"/>
-          <a:p xmlns:a="http://schemas.openxmlformats.org/drawingml/2006/main">
-            <a:pPr algn="l">
-              <a:defRPr sz="3000" b="1">
-                <a:solidFill>
-                  <a:srgbClr val="FFFFFF"/>
-                </a:solidFill>
-                <a:latin typeface="Helvetica Neue"/>
-                <a:ea typeface="Helvetica Neue"/>
-                <a:cs typeface="Helvetica Neue"/>
-              </a:defRPr>
-            </a:pPr>
-            <a:r>
-              <a:rPr sz="3000" b="1">
-                <a:solidFill>
-                  <a:srgbClr val="FFFFFF"/>
-                </a:solidFill>
-                <a:latin typeface="Helvetica Neue"/>
-                <a:ea typeface="Helvetica Neue"/>
-                <a:cs typeface="Helvetica Neue"/>
-              </a:rPr>
-              <a:t>Create for a</a:t>
-            </a:r>
-          </a:p>
-          <a:p xmlns:a="http://schemas.openxmlformats.org/drawingml/2006/main">
-            <a:pPr algn="l">
-              <a:defRPr sz="3000" b="1">
-                <a:solidFill>
-                  <a:srgbClr val="FFFFFF"/>
-                </a:solidFill>
-                <a:latin typeface="Helvetica Neue"/>
-                <a:ea typeface="Helvetica Neue"/>
-                <a:cs typeface="Helvetica Neue"/>
-              </a:defRPr>
-            </a:pPr>
-            <a:r>
-              <a:rPr sz="3000" b="1">
-                <a:solidFill>
-                  <a:srgbClr val="FFFFFF"/>
-                </a:solidFill>
-                <a:latin typeface="Helvetica Neue"/>
-                <a:ea typeface="Helvetica Neue"/>
-                <a:cs typeface="Helvetica Neue"/>
-              </a:rPr>
-              <a:t>real audience</a:t>
-            </a:r>
-          </a:p>
-        </p:txBody>
-      </p:sp>
-      <p:sp>
-        <p:nvSpPr>
-          <p:cNvPr id="5" name="">
-            <a:extLst xmlns:a="http://schemas.openxmlformats.org/drawingml/2006/main">
-              <a:ext uri="{FF2B5EF4-FFF2-40B4-BE49-F238E27FC236}">
-                <a16:creationId xmlns:a16="http://schemas.microsoft.com/office/drawing/2014/main" id="{EEE5DE69-BBC0-4768-8BE3-634F7C49FD99}"/>
-              </a:ext>
-            </a:extLst>
-          </p:cNvPr>
-          <p:cNvSpPr>
-            <a:spLocks xmlns:a="http://schemas.openxmlformats.org/drawingml/2006/main" noGrp="1"/>
-          </p:cNvSpPr>
-          <p:nvPr/>
-        </p:nvSpPr>
-        <p:spPr>
-          <a:xfrm xmlns:a="http://schemas.openxmlformats.org/drawingml/2006/main">
-            <a:off x="685800" y="552450"/>
-            <a:ext cx="2857500" cy="247650"/>
-          </a:xfrm>
-          <a:prstGeom xmlns:a="http://schemas.openxmlformats.org/drawingml/2006/main" prst="rect">
-            <a:avLst/>
-          </a:prstGeom>
-          <a:noFill xmlns:a="http://schemas.openxmlformats.org/drawingml/2006/main"/>
-          <a:ln xmlns:a="http://schemas.openxmlformats.org/drawingml/2006/main" w="0">
-            <a:noFill/>
-          </a:ln>
-        </p:spPr>
-        <p:txBody>
-          <a:bodyPr xmlns:a="http://schemas.openxmlformats.org/drawingml/2006/main" anchor="t">
-            <a:noAutofit/>
-          </a:bodyPr>
-          <a:lstStyle xmlns:a="http://schemas.openxmlformats.org/drawingml/2006/main"/>
-          <a:p xmlns:a="http://schemas.openxmlformats.org/drawingml/2006/main">
-            <a:pPr algn="l">
-              <a:defRPr sz="1200" b="1">
-                <a:solidFill>
-                  <a:srgbClr val="2563EB"/>
-                </a:solidFill>
-                <a:latin typeface="Helvetica Neue"/>
-                <a:ea typeface="Helvetica Neue"/>
-                <a:cs typeface="Helvetica Neue"/>
-              </a:defRPr>
-            </a:pPr>
-            <a:r>
-              <a:rPr sz="1200" b="1">
-                <a:solidFill>
-                  <a:srgbClr val="2563EB"/>
-                </a:solidFill>
-                <a:latin typeface="Helvetica Neue"/>
-                <a:ea typeface="Helvetica Neue"/>
-                <a:cs typeface="Helvetica Neue"/>
-              </a:rPr>
-              <a:t>CAREER CANVAS</a:t>
-            </a:r>
-          </a:p>
-        </p:txBody>
-      </p:sp>
-      <p:sp>
-        <p:nvSpPr>
-          <p:cNvPr id="6" name="">
-            <a:extLst xmlns:a="http://schemas.openxmlformats.org/drawingml/2006/main">
-              <a:ext uri="{FF2B5EF4-FFF2-40B4-BE49-F238E27FC236}">
-                <a16:creationId xmlns:a16="http://schemas.microsoft.com/office/drawing/2014/main" id="{A35E2260-008C-4F64-BB60-FE568CF5AA4B}"/>
-              </a:ext>
-            </a:extLst>
-          </p:cNvPr>
-          <p:cNvSpPr>
-            <a:spLocks xmlns:a="http://schemas.openxmlformats.org/drawingml/2006/main" noGrp="1"/>
-          </p:cNvSpPr>
-          <p:nvPr/>
-        </p:nvSpPr>
-        <p:spPr>
-          <a:xfrm xmlns:a="http://schemas.openxmlformats.org/drawingml/2006/main">
-            <a:off x="685800" y="914400"/>
-            <a:ext cx="685800" cy="76200"/>
+                <a16:creationId xmlns:a16="http://schemas.microsoft.com/office/drawing/2014/main" id="{689B2F3B-FC45-4C09-92BA-4E28D3919375}"/>
+              </a:ext>
+            </a:extLst>
+          </p:cNvPr>
+          <p:cNvSpPr>
+            <a:spLocks xmlns:a="http://schemas.openxmlformats.org/drawingml/2006/main" noGrp="1"/>
+          </p:cNvSpPr>
+          <p:nvPr/>
+        </p:nvSpPr>
+        <p:spPr>
+          <a:xfrm xmlns:a="http://schemas.openxmlformats.org/drawingml/2006/main">
+            <a:off x="7620000" y="2152650"/>
+            <a:ext cx="571500" cy="57150"/>
           </a:xfrm>
           <a:prstGeom xmlns:a="http://schemas.openxmlformats.org/drawingml/2006/main" prst="roundRect">
             <a:avLst>
@@ -2217,7 +2080,7 @@
             </a:avLst>
           </a:prstGeom>
           <a:solidFill xmlns:a="http://schemas.openxmlformats.org/drawingml/2006/main">
-            <a:srgbClr val="FFD43B"/>
+            <a:srgbClr val="D1CFC9"/>
           </a:solidFill>
           <a:ln xmlns:a="http://schemas.openxmlformats.org/drawingml/2006/main" w="0">
             <a:noFill/>
@@ -2226,10 +2089,179 @@
       </p:sp>
       <p:sp>
         <p:nvSpPr>
+          <p:cNvPr id="5" name="">
+            <a:extLst xmlns:a="http://schemas.openxmlformats.org/drawingml/2006/main">
+              <a:ext uri="{FF2B5EF4-FFF2-40B4-BE49-F238E27FC236}">
+                <a16:creationId xmlns:a16="http://schemas.microsoft.com/office/drawing/2014/main" id="{A8716C2C-AF0E-484A-AA11-BA44B985DBF8}"/>
+              </a:ext>
+            </a:extLst>
+          </p:cNvPr>
+          <p:cNvSpPr>
+            <a:spLocks xmlns:a="http://schemas.openxmlformats.org/drawingml/2006/main" noGrp="1"/>
+          </p:cNvSpPr>
+          <p:nvPr/>
+        </p:nvSpPr>
+        <p:spPr>
+          <a:xfrm xmlns:a="http://schemas.openxmlformats.org/drawingml/2006/main">
+            <a:off x="7620000" y="2495550"/>
+            <a:ext cx="3657600" cy="2667000"/>
+          </a:xfrm>
+          <a:prstGeom xmlns:a="http://schemas.openxmlformats.org/drawingml/2006/main" prst="rect">
+            <a:avLst/>
+          </a:prstGeom>
+          <a:noFill xmlns:a="http://schemas.openxmlformats.org/drawingml/2006/main"/>
+          <a:ln xmlns:a="http://schemas.openxmlformats.org/drawingml/2006/main" w="0">
+            <a:noFill/>
+          </a:ln>
+        </p:spPr>
+        <p:txBody>
+          <a:bodyPr xmlns:a="http://schemas.openxmlformats.org/drawingml/2006/main" anchor="t">
+            <a:noAutofit/>
+          </a:bodyPr>
+          <a:lstStyle xmlns:a="http://schemas.openxmlformats.org/drawingml/2006/main"/>
+          <a:p xmlns:a="http://schemas.openxmlformats.org/drawingml/2006/main">
+            <a:pPr algn="l">
+              <a:defRPr sz="2850" b="1">
+                <a:solidFill>
+                  <a:srgbClr val="FFFFFF"/>
+                </a:solidFill>
+                <a:latin typeface="Helvetica Neue"/>
+                <a:ea typeface="Helvetica Neue"/>
+                <a:cs typeface="Helvetica Neue"/>
+              </a:defRPr>
+            </a:pPr>
+            <a:r>
+              <a:rPr sz="2850" b="1">
+                <a:solidFill>
+                  <a:srgbClr val="FFFFFF"/>
+                </a:solidFill>
+                <a:latin typeface="Helvetica Neue"/>
+                <a:ea typeface="Helvetica Neue"/>
+                <a:cs typeface="Helvetica Neue"/>
+              </a:rPr>
+              <a:t>Create for a</a:t>
+            </a:r>
+          </a:p>
+          <a:p xmlns:a="http://schemas.openxmlformats.org/drawingml/2006/main">
+            <a:pPr algn="l">
+              <a:defRPr sz="2850" b="1">
+                <a:solidFill>
+                  <a:srgbClr val="FFFFFF"/>
+                </a:solidFill>
+                <a:latin typeface="Helvetica Neue"/>
+                <a:ea typeface="Helvetica Neue"/>
+                <a:cs typeface="Helvetica Neue"/>
+              </a:defRPr>
+            </a:pPr>
+            <a:r>
+              <a:rPr sz="2850" b="1">
+                <a:solidFill>
+                  <a:srgbClr val="FFFFFF"/>
+                </a:solidFill>
+                <a:latin typeface="Helvetica Neue"/>
+                <a:ea typeface="Helvetica Neue"/>
+                <a:cs typeface="Helvetica Neue"/>
+              </a:rPr>
+              <a:t>real audience</a:t>
+            </a:r>
+          </a:p>
+        </p:txBody>
+      </p:sp>
+      <p:sp>
+        <p:nvSpPr>
+          <p:cNvPr id="6" name="">
+            <a:extLst xmlns:a="http://schemas.openxmlformats.org/drawingml/2006/main">
+              <a:ext uri="{FF2B5EF4-FFF2-40B4-BE49-F238E27FC236}">
+                <a16:creationId xmlns:a16="http://schemas.microsoft.com/office/drawing/2014/main" id="{2793E7E4-F165-4EC1-AC50-DEAFB4C8B5C3}"/>
+              </a:ext>
+            </a:extLst>
+          </p:cNvPr>
+          <p:cNvSpPr>
+            <a:spLocks xmlns:a="http://schemas.openxmlformats.org/drawingml/2006/main" noGrp="1"/>
+          </p:cNvSpPr>
+          <p:nvPr/>
+        </p:nvSpPr>
+        <p:spPr>
+          <a:xfrm xmlns:a="http://schemas.openxmlformats.org/drawingml/2006/main">
+            <a:off x="685800" y="552450"/>
+            <a:ext cx="2857500" cy="247650"/>
+          </a:xfrm>
+          <a:prstGeom xmlns:a="http://schemas.openxmlformats.org/drawingml/2006/main" prst="rect">
+            <a:avLst/>
+          </a:prstGeom>
+          <a:noFill xmlns:a="http://schemas.openxmlformats.org/drawingml/2006/main"/>
+          <a:ln xmlns:a="http://schemas.openxmlformats.org/drawingml/2006/main" w="0">
+            <a:noFill/>
+          </a:ln>
+        </p:spPr>
+        <p:txBody>
+          <a:bodyPr xmlns:a="http://schemas.openxmlformats.org/drawingml/2006/main" anchor="t">
+            <a:noAutofit/>
+          </a:bodyPr>
+          <a:lstStyle xmlns:a="http://schemas.openxmlformats.org/drawingml/2006/main"/>
+          <a:p xmlns:a="http://schemas.openxmlformats.org/drawingml/2006/main">
+            <a:pPr algn="l">
+              <a:defRPr sz="1125" b="1">
+                <a:solidFill>
+                  <a:srgbClr val="52677D"/>
+                </a:solidFill>
+                <a:latin typeface="Helvetica Neue"/>
+                <a:ea typeface="Helvetica Neue"/>
+                <a:cs typeface="Helvetica Neue"/>
+              </a:defRPr>
+            </a:pPr>
+            <a:r>
+              <a:rPr sz="1125" b="1">
+                <a:solidFill>
+                  <a:srgbClr val="52677D"/>
+                </a:solidFill>
+                <a:latin typeface="Helvetica Neue"/>
+                <a:ea typeface="Helvetica Neue"/>
+                <a:cs typeface="Helvetica Neue"/>
+              </a:rPr>
+              <a:t>CAREER CANVAS</a:t>
+            </a:r>
+          </a:p>
+        </p:txBody>
+      </p:sp>
+      <p:sp>
+        <p:nvSpPr>
           <p:cNvPr id="7" name="">
             <a:extLst xmlns:a="http://schemas.openxmlformats.org/drawingml/2006/main">
               <a:ext uri="{FF2B5EF4-FFF2-40B4-BE49-F238E27FC236}">
-                <a16:creationId xmlns:a16="http://schemas.microsoft.com/office/drawing/2014/main" id="{6F0C00ED-4616-4673-9B1F-A80D06B075D6}"/>
+                <a16:creationId xmlns:a16="http://schemas.microsoft.com/office/drawing/2014/main" id="{569D8A22-1BAA-41D1-B90E-49312A70D371}"/>
+              </a:ext>
+            </a:extLst>
+          </p:cNvPr>
+          <p:cNvSpPr>
+            <a:spLocks xmlns:a="http://schemas.openxmlformats.org/drawingml/2006/main" noGrp="1"/>
+          </p:cNvSpPr>
+          <p:nvPr/>
+        </p:nvSpPr>
+        <p:spPr>
+          <a:xfrm xmlns:a="http://schemas.openxmlformats.org/drawingml/2006/main">
+            <a:off x="685800" y="914400"/>
+            <a:ext cx="685800" cy="76200"/>
+          </a:xfrm>
+          <a:prstGeom xmlns:a="http://schemas.openxmlformats.org/drawingml/2006/main" prst="roundRect">
+            <a:avLst>
+              <a:gd name="adj" fmla="val 50000"/>
+            </a:avLst>
+          </a:prstGeom>
+          <a:solidFill xmlns:a="http://schemas.openxmlformats.org/drawingml/2006/main">
+            <a:srgbClr val="1C2E4A"/>
+          </a:solidFill>
+          <a:ln xmlns:a="http://schemas.openxmlformats.org/drawingml/2006/main" w="0">
+            <a:noFill/>
+          </a:ln>
+        </p:spPr>
+      </p:sp>
+      <p:sp>
+        <p:nvSpPr>
+          <p:cNvPr id="8" name="">
+            <a:extLst xmlns:a="http://schemas.openxmlformats.org/drawingml/2006/main">
+              <a:ext uri="{FF2B5EF4-FFF2-40B4-BE49-F238E27FC236}">
+                <a16:creationId xmlns:a16="http://schemas.microsoft.com/office/drawing/2014/main" id="{1F800D92-3F71-4664-999E-CC21CA6A01A0}"/>
               </a:ext>
             </a:extLst>
           </p:cNvPr>
@@ -2241,7 +2273,7 @@
         <p:spPr>
           <a:xfrm xmlns:a="http://schemas.openxmlformats.org/drawingml/2006/main">
             <a:off x="685800" y="1447800"/>
-            <a:ext cx="4762500" cy="1771650"/>
+            <a:ext cx="4953000" cy="1809750"/>
           </a:xfrm>
           <a:prstGeom xmlns:a="http://schemas.openxmlformats.org/drawingml/2006/main" prst="rect">
             <a:avLst/>
@@ -2258,19 +2290,19 @@
           <a:lstStyle xmlns:a="http://schemas.openxmlformats.org/drawingml/2006/main"/>
           <a:p xmlns:a="http://schemas.openxmlformats.org/drawingml/2006/main">
             <a:pPr algn="l">
-              <a:defRPr sz="4050" b="1">
-                <a:solidFill>
-                  <a:srgbClr val="092454"/>
-                </a:solidFill>
-                <a:latin typeface="Helvetica Neue"/>
-                <a:ea typeface="Helvetica Neue"/>
-                <a:cs typeface="Helvetica Neue"/>
-              </a:defRPr>
-            </a:pPr>
-            <a:r>
-              <a:rPr sz="4050" b="1">
-                <a:solidFill>
-                  <a:srgbClr val="092454"/>
+              <a:defRPr sz="3900" b="1">
+                <a:solidFill>
+                  <a:srgbClr val="1C2E4A"/>
+                </a:solidFill>
+                <a:latin typeface="Helvetica Neue"/>
+                <a:ea typeface="Helvetica Neue"/>
+                <a:cs typeface="Helvetica Neue"/>
+              </a:defRPr>
+            </a:pPr>
+            <a:r>
+              <a:rPr sz="3900" b="1">
+                <a:solidFill>
+                  <a:srgbClr val="1C2E4A"/>
                 </a:solidFill>
                 <a:latin typeface="Helvetica Neue"/>
                 <a:ea typeface="Helvetica Neue"/>
@@ -2281,19 +2313,19 @@
           </a:p>
           <a:p xmlns:a="http://schemas.openxmlformats.org/drawingml/2006/main">
             <a:pPr algn="l">
-              <a:defRPr sz="4050" b="1">
-                <a:solidFill>
-                  <a:srgbClr val="092454"/>
-                </a:solidFill>
-                <a:latin typeface="Helvetica Neue"/>
-                <a:ea typeface="Helvetica Neue"/>
-                <a:cs typeface="Helvetica Neue"/>
-              </a:defRPr>
-            </a:pPr>
-            <a:r>
-              <a:rPr sz="4050" b="1">
-                <a:solidFill>
-                  <a:srgbClr val="092454"/>
+              <a:defRPr sz="3900" b="1">
+                <a:solidFill>
+                  <a:srgbClr val="1C2E4A"/>
+                </a:solidFill>
+                <a:latin typeface="Helvetica Neue"/>
+                <a:ea typeface="Helvetica Neue"/>
+                <a:cs typeface="Helvetica Neue"/>
+              </a:defRPr>
+            </a:pPr>
+            <a:r>
+              <a:rPr sz="3900" b="1">
+                <a:solidFill>
+                  <a:srgbClr val="1C2E4A"/>
                 </a:solidFill>
                 <a:latin typeface="Helvetica Neue"/>
                 <a:ea typeface="Helvetica Neue"/>
@@ -2306,22 +2338,22 @@
       </p:sp>
       <p:sp>
         <p:nvSpPr>
-          <p:cNvPr id="8" name="">
-            <a:extLst xmlns:a="http://schemas.openxmlformats.org/drawingml/2006/main">
-              <a:ext uri="{FF2B5EF4-FFF2-40B4-BE49-F238E27FC236}">
-                <a16:creationId xmlns:a16="http://schemas.microsoft.com/office/drawing/2014/main" id="{A0541395-F92A-4649-AE0F-E159D8EADA93}"/>
-              </a:ext>
-            </a:extLst>
-          </p:cNvPr>
-          <p:cNvSpPr>
-            <a:spLocks xmlns:a="http://schemas.openxmlformats.org/drawingml/2006/main" noGrp="1"/>
-          </p:cNvSpPr>
-          <p:nvPr/>
-        </p:nvSpPr>
-        <p:spPr>
-          <a:xfrm xmlns:a="http://schemas.openxmlformats.org/drawingml/2006/main">
-            <a:off x="685800" y="3429000"/>
-            <a:ext cx="4476750" cy="1047750"/>
+          <p:cNvPr id="9" name="">
+            <a:extLst xmlns:a="http://schemas.openxmlformats.org/drawingml/2006/main">
+              <a:ext uri="{FF2B5EF4-FFF2-40B4-BE49-F238E27FC236}">
+                <a16:creationId xmlns:a16="http://schemas.microsoft.com/office/drawing/2014/main" id="{5F2DA7CB-7026-40F7-9F10-E0AFE4E04999}"/>
+              </a:ext>
+            </a:extLst>
+          </p:cNvPr>
+          <p:cNvSpPr>
+            <a:spLocks xmlns:a="http://schemas.openxmlformats.org/drawingml/2006/main" noGrp="1"/>
+          </p:cNvSpPr>
+          <p:nvPr/>
+        </p:nvSpPr>
+        <p:spPr>
+          <a:xfrm xmlns:a="http://schemas.openxmlformats.org/drawingml/2006/main">
+            <a:off x="685800" y="3467100"/>
+            <a:ext cx="4762500" cy="1143000"/>
           </a:xfrm>
           <a:prstGeom xmlns:a="http://schemas.openxmlformats.org/drawingml/2006/main" prst="rect">
             <a:avLst/>
@@ -2338,19 +2370,19 @@
           <a:lstStyle xmlns:a="http://schemas.openxmlformats.org/drawingml/2006/main"/>
           <a:p xmlns:a="http://schemas.openxmlformats.org/drawingml/2006/main">
             <a:pPr algn="l">
-              <a:defRPr sz="1650" b="0">
-                <a:solidFill>
-                  <a:srgbClr val="61718A"/>
-                </a:solidFill>
-                <a:latin typeface="Helvetica Neue"/>
-                <a:ea typeface="Helvetica Neue"/>
-                <a:cs typeface="Helvetica Neue"/>
-              </a:defRPr>
-            </a:pPr>
-            <a:r>
-              <a:rPr sz="1650" b="0">
-                <a:solidFill>
-                  <a:srgbClr val="61718A"/>
+              <a:defRPr sz="1575" b="0">
+                <a:solidFill>
+                  <a:srgbClr val="52677D"/>
+                </a:solidFill>
+                <a:latin typeface="Helvetica Neue"/>
+                <a:ea typeface="Helvetica Neue"/>
+                <a:cs typeface="Helvetica Neue"/>
+              </a:defRPr>
+            </a:pPr>
+            <a:r>
+              <a:rPr sz="1575" b="0">
+                <a:solidFill>
+                  <a:srgbClr val="52677D"/>
                 </a:solidFill>
                 <a:latin typeface="Helvetica Neue"/>
                 <a:ea typeface="Helvetica Neue"/>
@@ -2363,21 +2395,21 @@
       </p:sp>
       <p:sp>
         <p:nvSpPr>
-          <p:cNvPr id="9" name="">
-            <a:extLst xmlns:a="http://schemas.openxmlformats.org/drawingml/2006/main">
-              <a:ext uri="{FF2B5EF4-FFF2-40B4-BE49-F238E27FC236}">
-                <a16:creationId xmlns:a16="http://schemas.microsoft.com/office/drawing/2014/main" id="{0B2D47A6-3716-4672-8E05-35FF7B24A174}"/>
-              </a:ext>
-            </a:extLst>
-          </p:cNvPr>
-          <p:cNvSpPr>
-            <a:spLocks xmlns:a="http://schemas.openxmlformats.org/drawingml/2006/main" noGrp="1"/>
-          </p:cNvSpPr>
-          <p:nvPr/>
-        </p:nvSpPr>
-        <p:spPr>
-          <a:xfrm xmlns:a="http://schemas.openxmlformats.org/drawingml/2006/main">
-            <a:off x="685800" y="5429250"/>
+          <p:cNvPr id="10" name="">
+            <a:extLst xmlns:a="http://schemas.openxmlformats.org/drawingml/2006/main">
+              <a:ext uri="{FF2B5EF4-FFF2-40B4-BE49-F238E27FC236}">
+                <a16:creationId xmlns:a16="http://schemas.microsoft.com/office/drawing/2014/main" id="{1F79C454-1B07-4A50-8F4F-9C0974FD8425}"/>
+              </a:ext>
+            </a:extLst>
+          </p:cNvPr>
+          <p:cNvSpPr>
+            <a:spLocks xmlns:a="http://schemas.openxmlformats.org/drawingml/2006/main" noGrp="1"/>
+          </p:cNvSpPr>
+          <p:nvPr/>
+        </p:nvSpPr>
+        <p:spPr>
+          <a:xfrm xmlns:a="http://schemas.openxmlformats.org/drawingml/2006/main">
+            <a:off x="685800" y="5391150"/>
             <a:ext cx="2095500" cy="285750"/>
           </a:xfrm>
           <a:prstGeom xmlns:a="http://schemas.openxmlformats.org/drawingml/2006/main" prst="rect">
@@ -2395,19 +2427,19 @@
           <a:lstStyle xmlns:a="http://schemas.openxmlformats.org/drawingml/2006/main"/>
           <a:p xmlns:a="http://schemas.openxmlformats.org/drawingml/2006/main">
             <a:pPr algn="l">
-              <a:defRPr sz="1350" b="1">
-                <a:solidFill>
-                  <a:srgbClr val="092454"/>
-                </a:solidFill>
-                <a:latin typeface="Helvetica Neue"/>
-                <a:ea typeface="Helvetica Neue"/>
-                <a:cs typeface="Helvetica Neue"/>
-              </a:defRPr>
-            </a:pPr>
-            <a:r>
-              <a:rPr sz="1350" b="1">
-                <a:solidFill>
-                  <a:srgbClr val="092454"/>
+              <a:defRPr sz="1275" b="1">
+                <a:solidFill>
+                  <a:srgbClr val="1C2E4A"/>
+                </a:solidFill>
+                <a:latin typeface="Helvetica Neue"/>
+                <a:ea typeface="Helvetica Neue"/>
+                <a:cs typeface="Helvetica Neue"/>
+              </a:defRPr>
+            </a:pPr>
+            <a:r>
+              <a:rPr sz="1275" b="1">
+                <a:solidFill>
+                  <a:srgbClr val="1C2E4A"/>
                 </a:solidFill>
                 <a:latin typeface="Helvetica Neue"/>
                 <a:ea typeface="Helvetica Neue"/>
@@ -2420,22 +2452,22 @@
       </p:sp>
       <p:sp>
         <p:nvSpPr>
-          <p:cNvPr id="10" name="">
-            <a:extLst xmlns:a="http://schemas.openxmlformats.org/drawingml/2006/main">
-              <a:ext uri="{FF2B5EF4-FFF2-40B4-BE49-F238E27FC236}">
-                <a16:creationId xmlns:a16="http://schemas.microsoft.com/office/drawing/2014/main" id="{431F5149-FBC7-4004-87B0-D9E8A3DF6D51}"/>
-              </a:ext>
-            </a:extLst>
-          </p:cNvPr>
-          <p:cNvSpPr>
-            <a:spLocks xmlns:a="http://schemas.openxmlformats.org/drawingml/2006/main" noGrp="1"/>
-          </p:cNvSpPr>
-          <p:nvPr/>
-        </p:nvSpPr>
-        <p:spPr>
-          <a:xfrm xmlns:a="http://schemas.openxmlformats.org/drawingml/2006/main">
-            <a:off x="685800" y="5810250"/>
-            <a:ext cx="3333750" cy="476250"/>
+          <p:cNvPr id="11" name="">
+            <a:extLst xmlns:a="http://schemas.openxmlformats.org/drawingml/2006/main">
+              <a:ext uri="{FF2B5EF4-FFF2-40B4-BE49-F238E27FC236}">
+                <a16:creationId xmlns:a16="http://schemas.microsoft.com/office/drawing/2014/main" id="{50A86C50-E1B0-4AD6-8237-398DA180A826}"/>
+              </a:ext>
+            </a:extLst>
+          </p:cNvPr>
+          <p:cNvSpPr>
+            <a:spLocks xmlns:a="http://schemas.openxmlformats.org/drawingml/2006/main" noGrp="1"/>
+          </p:cNvSpPr>
+          <p:nvPr/>
+        </p:nvSpPr>
+        <p:spPr>
+          <a:xfrm xmlns:a="http://schemas.openxmlformats.org/drawingml/2006/main">
+            <a:off x="685800" y="5772150"/>
+            <a:ext cx="3619500" cy="476250"/>
           </a:xfrm>
           <a:prstGeom xmlns:a="http://schemas.openxmlformats.org/drawingml/2006/main" prst="rect">
             <a:avLst/>
@@ -2452,19 +2484,19 @@
           <a:lstStyle xmlns:a="http://schemas.openxmlformats.org/drawingml/2006/main"/>
           <a:p xmlns:a="http://schemas.openxmlformats.org/drawingml/2006/main">
             <a:pPr algn="l">
-              <a:defRPr sz="1050" b="0">
-                <a:solidFill>
-                  <a:srgbClr val="61718A"/>
-                </a:solidFill>
-                <a:latin typeface="Helvetica Neue"/>
-                <a:ea typeface="Helvetica Neue"/>
-                <a:cs typeface="Helvetica Neue"/>
-              </a:defRPr>
-            </a:pPr>
-            <a:r>
-              <a:rPr sz="1050" b="0">
-                <a:solidFill>
-                  <a:srgbClr val="61718A"/>
+              <a:defRPr sz="975" b="0">
+                <a:solidFill>
+                  <a:srgbClr val="52677D"/>
+                </a:solidFill>
+                <a:latin typeface="Helvetica Neue"/>
+                <a:ea typeface="Helvetica Neue"/>
+                <a:cs typeface="Helvetica Neue"/>
+              </a:defRPr>
+            </a:pPr>
+            <a:r>
+              <a:rPr sz="975" b="0">
+                <a:solidFill>
+                  <a:srgbClr val="52677D"/>
                 </a:solidFill>
                 <a:latin typeface="Helvetica Neue"/>
                 <a:ea typeface="Helvetica Neue"/>
@@ -2475,19 +2507,19 @@
           </a:p>
           <a:p xmlns:a="http://schemas.openxmlformats.org/drawingml/2006/main">
             <a:pPr algn="l">
-              <a:defRPr sz="1050" b="0">
-                <a:solidFill>
-                  <a:srgbClr val="61718A"/>
-                </a:solidFill>
-                <a:latin typeface="Helvetica Neue"/>
-                <a:ea typeface="Helvetica Neue"/>
-                <a:cs typeface="Helvetica Neue"/>
-              </a:defRPr>
-            </a:pPr>
-            <a:r>
-              <a:rPr sz="1050" b="0">
-                <a:solidFill>
-                  <a:srgbClr val="61718A"/>
+              <a:defRPr sz="975" b="0">
+                <a:solidFill>
+                  <a:srgbClr val="52677D"/>
+                </a:solidFill>
+                <a:latin typeface="Helvetica Neue"/>
+                <a:ea typeface="Helvetica Neue"/>
+                <a:cs typeface="Helvetica Neue"/>
+              </a:defRPr>
+            </a:pPr>
+            <a:r>
+              <a:rPr sz="975" b="0">
+                <a:solidFill>
+                  <a:srgbClr val="52677D"/>
                 </a:solidFill>
                 <a:latin typeface="Helvetica Neue"/>
                 <a:ea typeface="Helvetica Neue"/>
@@ -2501,7 +2533,7 @@
     </p:spTree>
     <p:extLst>
       <p:ext uri="{BB962C8B-B14F-4D97-AF65-F5344CB8AC3E}">
-        <p14:creationId xmlns:p14="http://schemas.microsoft.com/office/powerpoint/2010/main" val="816710805"/>
+        <p14:creationId xmlns:p14="http://schemas.microsoft.com/office/powerpoint/2010/main" val="1635529621"/>
       </p:ext>
     </p:extLst>
   </p:cSld>
@@ -2532,7 +2564,7 @@
           <p:cNvPr id="15" name="">
             <a:extLst xmlns:a="http://schemas.openxmlformats.org/drawingml/2006/main">
               <a:ext uri="{FF2B5EF4-FFF2-40B4-BE49-F238E27FC236}">
-                <a16:creationId xmlns:a16="http://schemas.microsoft.com/office/drawing/2014/main" id="{56B52590-71C1-4233-8B9E-68699544FFB0}"/>
+                <a16:creationId xmlns:a16="http://schemas.microsoft.com/office/drawing/2014/main" id="{9D62E7A5-AD37-40EA-92BF-8F7FE2166391}"/>
               </a:ext>
             </a:extLst>
           </p:cNvPr>
@@ -2563,7 +2595,7 @@
             <a:pPr algn="l">
               <a:defRPr sz="1125" b="1">
                 <a:solidFill>
-                  <a:srgbClr val="2563EB"/>
+                  <a:srgbClr val="52677D"/>
                 </a:solidFill>
                 <a:latin typeface="Helvetica Neue"/>
                 <a:ea typeface="Helvetica Neue"/>
@@ -2573,7 +2605,7 @@
             <a:r>
               <a:rPr sz="1125" b="1">
                 <a:solidFill>
-                  <a:srgbClr val="2563EB"/>
+                  <a:srgbClr val="52677D"/>
                 </a:solidFill>
                 <a:latin typeface="Helvetica Neue"/>
                 <a:ea typeface="Helvetica Neue"/>
@@ -2589,7 +2621,7 @@
           <p:cNvPr id="2" name="">
             <a:extLst xmlns:a="http://schemas.openxmlformats.org/drawingml/2006/main">
               <a:ext uri="{FF2B5EF4-FFF2-40B4-BE49-F238E27FC236}">
-                <a16:creationId xmlns:a16="http://schemas.microsoft.com/office/drawing/2014/main" id="{AC40F327-A22F-468A-8929-11C4275293D2}"/>
+                <a16:creationId xmlns:a16="http://schemas.microsoft.com/office/drawing/2014/main" id="{C18031C6-3F01-40CF-B957-D6142F8490E4}"/>
               </a:ext>
             </a:extLst>
           </p:cNvPr>
@@ -2620,7 +2652,7 @@
             <a:pPr algn="l">
               <a:defRPr sz="2550" b="1">
                 <a:solidFill>
-                  <a:srgbClr val="092454"/>
+                  <a:srgbClr val="1C2E4A"/>
                 </a:solidFill>
                 <a:latin typeface="Helvetica Neue"/>
                 <a:ea typeface="Helvetica Neue"/>
@@ -2630,7 +2662,7 @@
             <a:r>
               <a:rPr sz="2550" b="1">
                 <a:solidFill>
-                  <a:srgbClr val="092454"/>
+                  <a:srgbClr val="1C2E4A"/>
                 </a:solidFill>
                 <a:latin typeface="Helvetica Neue"/>
                 <a:ea typeface="Helvetica Neue"/>
@@ -2646,7 +2678,7 @@
           <p:cNvPr id="3" name="">
             <a:extLst xmlns:a="http://schemas.openxmlformats.org/drawingml/2006/main">
               <a:ext uri="{FF2B5EF4-FFF2-40B4-BE49-F238E27FC236}">
-                <a16:creationId xmlns:a16="http://schemas.microsoft.com/office/drawing/2014/main" id="{B60ECFA8-5B6D-418B-9603-1EA997AE5869}"/>
+                <a16:creationId xmlns:a16="http://schemas.microsoft.com/office/drawing/2014/main" id="{8F31150C-5C5F-4033-934F-BDB60D9ED91F}"/>
               </a:ext>
             </a:extLst>
           </p:cNvPr>
@@ -2666,7 +2698,7 @@
             </a:avLst>
           </a:prstGeom>
           <a:solidFill xmlns:a="http://schemas.openxmlformats.org/drawingml/2006/main">
-            <a:srgbClr val="EEF7FF"/>
+            <a:srgbClr val="D1CFC9"/>
           </a:solidFill>
           <a:ln xmlns:a="http://schemas.openxmlformats.org/drawingml/2006/main" w="0">
             <a:noFill/>
@@ -2678,7 +2710,7 @@
           <p:cNvPr id="4" name="">
             <a:extLst xmlns:a="http://schemas.openxmlformats.org/drawingml/2006/main">
               <a:ext uri="{FF2B5EF4-FFF2-40B4-BE49-F238E27FC236}">
-                <a16:creationId xmlns:a16="http://schemas.microsoft.com/office/drawing/2014/main" id="{68F6CBB4-FA79-4C70-A3AE-7D78388D1F31}"/>
+                <a16:creationId xmlns:a16="http://schemas.microsoft.com/office/drawing/2014/main" id="{164E518E-01BC-49AB-BB62-B5DE2A0D0955}"/>
               </a:ext>
             </a:extLst>
           </p:cNvPr>
@@ -2709,7 +2741,7 @@
             <a:pPr algn="l">
               <a:defRPr sz="1125" b="1">
                 <a:solidFill>
-                  <a:srgbClr val="2563EB"/>
+                  <a:srgbClr val="52677D"/>
                 </a:solidFill>
                 <a:latin typeface="Helvetica Neue"/>
                 <a:ea typeface="Helvetica Neue"/>
@@ -2719,7 +2751,7 @@
             <a:r>
               <a:rPr sz="1125" b="1">
                 <a:solidFill>
-                  <a:srgbClr val="2563EB"/>
+                  <a:srgbClr val="52677D"/>
                 </a:solidFill>
                 <a:latin typeface="Helvetica Neue"/>
                 <a:ea typeface="Helvetica Neue"/>
@@ -2735,7 +2767,7 @@
           <p:cNvPr id="5" name="">
             <a:extLst xmlns:a="http://schemas.openxmlformats.org/drawingml/2006/main">
               <a:ext uri="{FF2B5EF4-FFF2-40B4-BE49-F238E27FC236}">
-                <a16:creationId xmlns:a16="http://schemas.microsoft.com/office/drawing/2014/main" id="{D46E5DD3-0065-4ABA-8157-9D8D79FB6F2A}"/>
+                <a16:creationId xmlns:a16="http://schemas.microsoft.com/office/drawing/2014/main" id="{6D27D5AE-0900-4400-B8DD-944B10082CF4}"/>
               </a:ext>
             </a:extLst>
           </p:cNvPr>
@@ -2766,7 +2798,7 @@
             <a:pPr algn="l">
               <a:defRPr sz="1800" b="1">
                 <a:solidFill>
-                  <a:srgbClr val="092454"/>
+                  <a:srgbClr val="1C2E4A"/>
                 </a:solidFill>
                 <a:latin typeface="Helvetica Neue"/>
                 <a:ea typeface="Helvetica Neue"/>
@@ -2776,7 +2808,7 @@
             <a:r>
               <a:rPr sz="1800" b="1">
                 <a:solidFill>
-                  <a:srgbClr val="092454"/>
+                  <a:srgbClr val="1C2E4A"/>
                 </a:solidFill>
                 <a:latin typeface="Helvetica Neue"/>
                 <a:ea typeface="Helvetica Neue"/>
@@ -2792,7 +2824,7 @@
           <p:cNvPr id="6" name="">
             <a:extLst xmlns:a="http://schemas.openxmlformats.org/drawingml/2006/main">
               <a:ext uri="{FF2B5EF4-FFF2-40B4-BE49-F238E27FC236}">
-                <a16:creationId xmlns:a16="http://schemas.microsoft.com/office/drawing/2014/main" id="{182F5C1D-4644-4EDE-B147-10DA79C3EF30}"/>
+                <a16:creationId xmlns:a16="http://schemas.microsoft.com/office/drawing/2014/main" id="{046938AB-4C84-4E94-B930-60C54CB87AF6}"/>
               </a:ext>
             </a:extLst>
           </p:cNvPr>
@@ -2823,7 +2855,7 @@
             <a:pPr algn="l">
               <a:defRPr sz="1800" b="1">
                 <a:solidFill>
-                  <a:srgbClr val="092454"/>
+                  <a:srgbClr val="1C2E4A"/>
                 </a:solidFill>
                 <a:latin typeface="Helvetica Neue"/>
                 <a:ea typeface="Helvetica Neue"/>
@@ -2833,7 +2865,7 @@
             <a:r>
               <a:rPr sz="1800" b="1">
                 <a:solidFill>
-                  <a:srgbClr val="092454"/>
+                  <a:srgbClr val="1C2E4A"/>
                 </a:solidFill>
                 <a:latin typeface="Helvetica Neue"/>
                 <a:ea typeface="Helvetica Neue"/>
@@ -2849,7 +2881,7 @@
           <p:cNvPr id="7" name="">
             <a:extLst xmlns:a="http://schemas.openxmlformats.org/drawingml/2006/main">
               <a:ext uri="{FF2B5EF4-FFF2-40B4-BE49-F238E27FC236}">
-                <a16:creationId xmlns:a16="http://schemas.microsoft.com/office/drawing/2014/main" id="{3C801535-7974-4A8B-83D9-6CB442ECD955}"/>
+                <a16:creationId xmlns:a16="http://schemas.microsoft.com/office/drawing/2014/main" id="{4C0C1591-4995-4B5E-80AF-9C57253037F5}"/>
               </a:ext>
             </a:extLst>
           </p:cNvPr>
@@ -2880,7 +2912,7 @@
             <a:pPr algn="l">
               <a:defRPr sz="1800" b="1">
                 <a:solidFill>
-                  <a:srgbClr val="092454"/>
+                  <a:srgbClr val="1C2E4A"/>
                 </a:solidFill>
                 <a:latin typeface="Helvetica Neue"/>
                 <a:ea typeface="Helvetica Neue"/>
@@ -2890,7 +2922,7 @@
             <a:r>
               <a:rPr sz="1800" b="1">
                 <a:solidFill>
-                  <a:srgbClr val="092454"/>
+                  <a:srgbClr val="1C2E4A"/>
                 </a:solidFill>
                 <a:latin typeface="Helvetica Neue"/>
                 <a:ea typeface="Helvetica Neue"/>
@@ -2906,7 +2938,7 @@
           <p:cNvPr id="8" name="">
             <a:extLst xmlns:a="http://schemas.openxmlformats.org/drawingml/2006/main">
               <a:ext uri="{FF2B5EF4-FFF2-40B4-BE49-F238E27FC236}">
-                <a16:creationId xmlns:a16="http://schemas.microsoft.com/office/drawing/2014/main" id="{ABCBD7CB-8CC2-4705-8BFD-93DE3B36B42B}"/>
+                <a16:creationId xmlns:a16="http://schemas.microsoft.com/office/drawing/2014/main" id="{8C770B50-2FDB-4B3B-9FE1-4CA7BFA5B036}"/>
               </a:ext>
             </a:extLst>
           </p:cNvPr>
@@ -2926,7 +2958,7 @@
             </a:avLst>
           </a:prstGeom>
           <a:solidFill xmlns:a="http://schemas.openxmlformats.org/drawingml/2006/main">
-            <a:srgbClr val="FFD43B"/>
+            <a:srgbClr val="D1CFC9"/>
           </a:solidFill>
           <a:ln xmlns:a="http://schemas.openxmlformats.org/drawingml/2006/main" w="0">
             <a:noFill/>
@@ -2938,7 +2970,7 @@
           <p:cNvPr id="9" name="">
             <a:extLst xmlns:a="http://schemas.openxmlformats.org/drawingml/2006/main">
               <a:ext uri="{FF2B5EF4-FFF2-40B4-BE49-F238E27FC236}">
-                <a16:creationId xmlns:a16="http://schemas.microsoft.com/office/drawing/2014/main" id="{57ED7D57-BB79-4772-8671-377A100AE3EB}"/>
+                <a16:creationId xmlns:a16="http://schemas.microsoft.com/office/drawing/2014/main" id="{754DA104-A737-4929-B871-0096787D03A8}"/>
               </a:ext>
             </a:extLst>
           </p:cNvPr>
@@ -2969,7 +3001,7 @@
             <a:pPr algn="l">
               <a:defRPr sz="1125" b="1">
                 <a:solidFill>
-                  <a:srgbClr val="092454"/>
+                  <a:srgbClr val="1C2E4A"/>
                 </a:solidFill>
                 <a:latin typeface="Helvetica Neue"/>
                 <a:ea typeface="Helvetica Neue"/>
@@ -2979,7 +3011,7 @@
             <a:r>
               <a:rPr sz="1125" b="1">
                 <a:solidFill>
-                  <a:srgbClr val="092454"/>
+                  <a:srgbClr val="1C2E4A"/>
                 </a:solidFill>
                 <a:latin typeface="Helvetica Neue"/>
                 <a:ea typeface="Helvetica Neue"/>
@@ -2995,7 +3027,7 @@
           <p:cNvPr id="10" name="">
             <a:extLst xmlns:a="http://schemas.openxmlformats.org/drawingml/2006/main">
               <a:ext uri="{FF2B5EF4-FFF2-40B4-BE49-F238E27FC236}">
-                <a16:creationId xmlns:a16="http://schemas.microsoft.com/office/drawing/2014/main" id="{66E5B3D9-C440-4335-85BE-F5DF930B2F7C}"/>
+                <a16:creationId xmlns:a16="http://schemas.microsoft.com/office/drawing/2014/main" id="{37A5187D-F350-4883-BB5E-B484FB40441A}"/>
               </a:ext>
             </a:extLst>
           </p:cNvPr>
@@ -3026,7 +3058,7 @@
             <a:pPr algn="l">
               <a:defRPr sz="2400" b="1">
                 <a:solidFill>
-                  <a:srgbClr val="092454"/>
+                  <a:srgbClr val="1C2E4A"/>
                 </a:solidFill>
                 <a:latin typeface="Helvetica Neue"/>
                 <a:ea typeface="Helvetica Neue"/>
@@ -3036,7 +3068,7 @@
             <a:r>
               <a:rPr sz="2400" b="1">
                 <a:solidFill>
-                  <a:srgbClr val="092454"/>
+                  <a:srgbClr val="1C2E4A"/>
                 </a:solidFill>
                 <a:latin typeface="Helvetica Neue"/>
                 <a:ea typeface="Helvetica Neue"/>
@@ -3052,7 +3084,7 @@
           <p:cNvPr id="11" name="">
             <a:extLst xmlns:a="http://schemas.openxmlformats.org/drawingml/2006/main">
               <a:ext uri="{FF2B5EF4-FFF2-40B4-BE49-F238E27FC236}">
-                <a16:creationId xmlns:a16="http://schemas.microsoft.com/office/drawing/2014/main" id="{D157D25F-CC35-45CA-A6F6-F0491A1BACF0}"/>
+                <a16:creationId xmlns:a16="http://schemas.microsoft.com/office/drawing/2014/main" id="{1142D09A-66ED-44B2-A04F-4815FB76A3F8}"/>
               </a:ext>
             </a:extLst>
           </p:cNvPr>
@@ -3083,7 +3115,7 @@
             <a:pPr algn="l">
               <a:defRPr sz="1650" b="0">
                 <a:solidFill>
-                  <a:srgbClr val="092454"/>
+                  <a:srgbClr val="1C2E4A"/>
                 </a:solidFill>
                 <a:latin typeface="Helvetica Neue"/>
                 <a:ea typeface="Helvetica Neue"/>
@@ -3093,7 +3125,7 @@
             <a:r>
               <a:rPr sz="1650" b="0">
                 <a:solidFill>
-                  <a:srgbClr val="092454"/>
+                  <a:srgbClr val="1C2E4A"/>
                 </a:solidFill>
                 <a:latin typeface="Helvetica Neue"/>
                 <a:ea typeface="Helvetica Neue"/>
@@ -3109,7 +3141,7 @@
           <p:cNvPr id="12" name="">
             <a:extLst xmlns:a="http://schemas.openxmlformats.org/drawingml/2006/main">
               <a:ext uri="{FF2B5EF4-FFF2-40B4-BE49-F238E27FC236}">
-                <a16:creationId xmlns:a16="http://schemas.microsoft.com/office/drawing/2014/main" id="{0A085945-18D1-4452-9677-8EB22CD8D42A}"/>
+                <a16:creationId xmlns:a16="http://schemas.microsoft.com/office/drawing/2014/main" id="{52A7EC76-5A1D-4ABF-AA92-D7B6222CFCB7}"/>
               </a:ext>
             </a:extLst>
           </p:cNvPr>
@@ -3127,7 +3159,7 @@
             <a:avLst/>
           </a:prstGeom>
           <a:solidFill xmlns:a="http://schemas.openxmlformats.org/drawingml/2006/main">
-            <a:srgbClr val="D8E5F2"/>
+            <a:srgbClr val="BDC4D4"/>
           </a:solidFill>
           <a:ln xmlns:a="http://schemas.openxmlformats.org/drawingml/2006/main" w="0">
             <a:noFill/>
@@ -3139,7 +3171,7 @@
           <p:cNvPr id="13" name="">
             <a:extLst xmlns:a="http://schemas.openxmlformats.org/drawingml/2006/main">
               <a:ext uri="{FF2B5EF4-FFF2-40B4-BE49-F238E27FC236}">
-                <a16:creationId xmlns:a16="http://schemas.microsoft.com/office/drawing/2014/main" id="{C23F3C87-1003-42DB-BA77-F36DA534E369}"/>
+                <a16:creationId xmlns:a16="http://schemas.microsoft.com/office/drawing/2014/main" id="{1D034C2C-C10D-404F-A473-B4B37FA7691F}"/>
               </a:ext>
             </a:extLst>
           </p:cNvPr>
@@ -3170,7 +3202,7 @@
             <a:pPr algn="l">
               <a:defRPr sz="750" b="0">
                 <a:solidFill>
-                  <a:srgbClr val="61718A"/>
+                  <a:srgbClr val="52677D"/>
                 </a:solidFill>
                 <a:latin typeface="Helvetica Neue"/>
                 <a:ea typeface="Helvetica Neue"/>
@@ -3180,7 +3212,7 @@
             <a:r>
               <a:rPr sz="750" b="0">
                 <a:solidFill>
-                  <a:srgbClr val="61718A"/>
+                  <a:srgbClr val="52677D"/>
                 </a:solidFill>
                 <a:latin typeface="Helvetica Neue"/>
                 <a:ea typeface="Helvetica Neue"/>
@@ -3196,7 +3228,7 @@
           <p:cNvPr id="14" name="">
             <a:extLst xmlns:a="http://schemas.openxmlformats.org/drawingml/2006/main">
               <a:ext uri="{FF2B5EF4-FFF2-40B4-BE49-F238E27FC236}">
-                <a16:creationId xmlns:a16="http://schemas.microsoft.com/office/drawing/2014/main" id="{ECA3B70D-6CED-45F6-ADA5-ADC82424BCD0}"/>
+                <a16:creationId xmlns:a16="http://schemas.microsoft.com/office/drawing/2014/main" id="{540CCB40-3FE1-4CA0-8F9D-6109C91A3DE1}"/>
               </a:ext>
             </a:extLst>
           </p:cNvPr>
@@ -3227,7 +3259,7 @@
             <a:pPr algn="r">
               <a:defRPr sz="825" b="1">
                 <a:solidFill>
-                  <a:srgbClr val="2563EB"/>
+                  <a:srgbClr val="52677D"/>
                 </a:solidFill>
                 <a:latin typeface="Helvetica Neue"/>
                 <a:ea typeface="Helvetica Neue"/>
@@ -3237,7 +3269,7 @@
             <a:r>
               <a:rPr sz="825" b="1">
                 <a:solidFill>
-                  <a:srgbClr val="2563EB"/>
+                  <a:srgbClr val="52677D"/>
                 </a:solidFill>
                 <a:latin typeface="Helvetica Neue"/>
                 <a:ea typeface="Helvetica Neue"/>
@@ -3251,7 +3283,7 @@
     </p:spTree>
     <p:extLst>
       <p:ext uri="{BB962C8B-B14F-4D97-AF65-F5344CB8AC3E}">
-        <p14:creationId xmlns:p14="http://schemas.microsoft.com/office/powerpoint/2010/main" val="2084741741"/>
+        <p14:creationId xmlns:p14="http://schemas.microsoft.com/office/powerpoint/2010/main" val="975693060"/>
       </p:ext>
     </p:extLst>
   </p:cSld>
@@ -3264,7 +3296,7 @@
     <p:bg>
       <p:bgPr>
         <a:solidFill xmlns:a="http://schemas.openxmlformats.org/drawingml/2006/main">
-          <a:srgbClr val="EEF7FF"/>
+          <a:srgbClr val="D1CFC9"/>
         </a:solidFill>
       </p:bgPr>
     </p:bg>
@@ -3282,7 +3314,7 @@
           <p:cNvPr id="25" name="">
             <a:extLst xmlns:a="http://schemas.openxmlformats.org/drawingml/2006/main">
               <a:ext uri="{FF2B5EF4-FFF2-40B4-BE49-F238E27FC236}">
-                <a16:creationId xmlns:a16="http://schemas.microsoft.com/office/drawing/2014/main" id="{626B3A03-1872-48E8-8490-2FDC7DB8021D}"/>
+                <a16:creationId xmlns:a16="http://schemas.microsoft.com/office/drawing/2014/main" id="{08A82D39-51D3-492D-B481-004E0D77EABC}"/>
               </a:ext>
             </a:extLst>
           </p:cNvPr>
@@ -3313,7 +3345,7 @@
             <a:pPr algn="l">
               <a:defRPr sz="1125" b="1">
                 <a:solidFill>
-                  <a:srgbClr val="2563EB"/>
+                  <a:srgbClr val="52677D"/>
                 </a:solidFill>
                 <a:latin typeface="Helvetica Neue"/>
                 <a:ea typeface="Helvetica Neue"/>
@@ -3323,7 +3355,7 @@
             <a:r>
               <a:rPr sz="1125" b="1">
                 <a:solidFill>
-                  <a:srgbClr val="2563EB"/>
+                  <a:srgbClr val="52677D"/>
                 </a:solidFill>
                 <a:latin typeface="Helvetica Neue"/>
                 <a:ea typeface="Helvetica Neue"/>
@@ -3339,7 +3371,7 @@
           <p:cNvPr id="2" name="">
             <a:extLst xmlns:a="http://schemas.openxmlformats.org/drawingml/2006/main">
               <a:ext uri="{FF2B5EF4-FFF2-40B4-BE49-F238E27FC236}">
-                <a16:creationId xmlns:a16="http://schemas.microsoft.com/office/drawing/2014/main" id="{91CF3981-E7DB-4E93-87E4-EAD1B3E4E1A3}"/>
+                <a16:creationId xmlns:a16="http://schemas.microsoft.com/office/drawing/2014/main" id="{A053CE08-E531-4E5A-AF19-5AFA46780F3E}"/>
               </a:ext>
             </a:extLst>
           </p:cNvPr>
@@ -3370,7 +3402,7 @@
             <a:pPr algn="l">
               <a:defRPr sz="2850" b="1">
                 <a:solidFill>
-                  <a:srgbClr val="092454"/>
+                  <a:srgbClr val="1C2E4A"/>
                 </a:solidFill>
                 <a:latin typeface="Helvetica Neue"/>
                 <a:ea typeface="Helvetica Neue"/>
@@ -3380,7 +3412,7 @@
             <a:r>
               <a:rPr sz="2850" b="1">
                 <a:solidFill>
-                  <a:srgbClr val="092454"/>
+                  <a:srgbClr val="1C2E4A"/>
                 </a:solidFill>
                 <a:latin typeface="Helvetica Neue"/>
                 <a:ea typeface="Helvetica Neue"/>
@@ -3396,7 +3428,7 @@
           <p:cNvPr id="3" name="">
             <a:extLst xmlns:a="http://schemas.openxmlformats.org/drawingml/2006/main">
               <a:ext uri="{FF2B5EF4-FFF2-40B4-BE49-F238E27FC236}">
-                <a16:creationId xmlns:a16="http://schemas.microsoft.com/office/drawing/2014/main" id="{9690C1DE-2EBC-4E35-BE16-E5E7963805D7}"/>
+                <a16:creationId xmlns:a16="http://schemas.microsoft.com/office/drawing/2014/main" id="{317C5124-9728-434F-8692-40929CF1233C}"/>
               </a:ext>
             </a:extLst>
           </p:cNvPr>
@@ -3427,7 +3459,7 @@
             <a:pPr algn="l">
               <a:defRPr sz="1425" b="0">
                 <a:solidFill>
-                  <a:srgbClr val="61718A"/>
+                  <a:srgbClr val="52677D"/>
                 </a:solidFill>
                 <a:latin typeface="Helvetica Neue"/>
                 <a:ea typeface="Helvetica Neue"/>
@@ -3437,7 +3469,7 @@
             <a:r>
               <a:rPr sz="1425" b="0">
                 <a:solidFill>
-                  <a:srgbClr val="61718A"/>
+                  <a:srgbClr val="52677D"/>
                 </a:solidFill>
                 <a:latin typeface="Helvetica Neue"/>
                 <a:ea typeface="Helvetica Neue"/>
@@ -3453,7 +3485,7 @@
           <p:cNvPr id="4" name="">
             <a:extLst xmlns:a="http://schemas.openxmlformats.org/drawingml/2006/main">
               <a:ext uri="{FF2B5EF4-FFF2-40B4-BE49-F238E27FC236}">
-                <a16:creationId xmlns:a16="http://schemas.microsoft.com/office/drawing/2014/main" id="{50F974BF-D972-496E-A2D1-6EAC387666E5}"/>
+                <a16:creationId xmlns:a16="http://schemas.microsoft.com/office/drawing/2014/main" id="{5BD30D73-F071-44A4-99FE-6A29C6A9ECB6}"/>
               </a:ext>
             </a:extLst>
           </p:cNvPr>
@@ -3484,7 +3516,7 @@
             <a:pPr algn="l">
               <a:defRPr sz="1200" b="1">
                 <a:solidFill>
-                  <a:srgbClr val="2563EB"/>
+                  <a:srgbClr val="52677D"/>
                 </a:solidFill>
                 <a:latin typeface="Helvetica Neue"/>
                 <a:ea typeface="Helvetica Neue"/>
@@ -3494,7 +3526,7 @@
             <a:r>
               <a:rPr sz="1200" b="1">
                 <a:solidFill>
-                  <a:srgbClr val="2563EB"/>
+                  <a:srgbClr val="52677D"/>
                 </a:solidFill>
                 <a:latin typeface="Helvetica Neue"/>
                 <a:ea typeface="Helvetica Neue"/>
@@ -3510,7 +3542,7 @@
           <p:cNvPr id="5" name="">
             <a:extLst xmlns:a="http://schemas.openxmlformats.org/drawingml/2006/main">
               <a:ext uri="{FF2B5EF4-FFF2-40B4-BE49-F238E27FC236}">
-                <a16:creationId xmlns:a16="http://schemas.microsoft.com/office/drawing/2014/main" id="{5CDEB42E-58B0-4B12-BFAB-E2489C2CF7C1}"/>
+                <a16:creationId xmlns:a16="http://schemas.microsoft.com/office/drawing/2014/main" id="{FF954458-627B-4D49-86D0-8CDBD3AA6D9E}"/>
               </a:ext>
             </a:extLst>
           </p:cNvPr>
@@ -3541,7 +3573,7 @@
             <a:pPr algn="l">
               <a:defRPr sz="1275" b="1">
                 <a:solidFill>
-                  <a:srgbClr val="092454"/>
+                  <a:srgbClr val="1C2E4A"/>
                 </a:solidFill>
                 <a:latin typeface="Helvetica Neue"/>
                 <a:ea typeface="Helvetica Neue"/>
@@ -3551,7 +3583,7 @@
             <a:r>
               <a:rPr sz="1275" b="1">
                 <a:solidFill>
-                  <a:srgbClr val="092454"/>
+                  <a:srgbClr val="1C2E4A"/>
                 </a:solidFill>
                 <a:latin typeface="Helvetica Neue"/>
                 <a:ea typeface="Helvetica Neue"/>
@@ -3567,7 +3599,7 @@
           <p:cNvPr id="6" name="">
             <a:extLst xmlns:a="http://schemas.openxmlformats.org/drawingml/2006/main">
               <a:ext uri="{FF2B5EF4-FFF2-40B4-BE49-F238E27FC236}">
-                <a16:creationId xmlns:a16="http://schemas.microsoft.com/office/drawing/2014/main" id="{6DB26EF7-2FF7-45A2-B44E-09875B86B535}"/>
+                <a16:creationId xmlns:a16="http://schemas.microsoft.com/office/drawing/2014/main" id="{2524D83F-38DE-41FD-A44D-45FB0242FC9E}"/>
               </a:ext>
             </a:extLst>
           </p:cNvPr>
@@ -3598,7 +3630,7 @@
             <a:pPr algn="l">
               <a:defRPr sz="900" b="0">
                 <a:solidFill>
-                  <a:srgbClr val="61718A"/>
+                  <a:srgbClr val="52677D"/>
                 </a:solidFill>
                 <a:latin typeface="Helvetica Neue"/>
                 <a:ea typeface="Helvetica Neue"/>
@@ -3608,7 +3640,7 @@
             <a:r>
               <a:rPr sz="900" b="0">
                 <a:solidFill>
-                  <a:srgbClr val="61718A"/>
+                  <a:srgbClr val="52677D"/>
                 </a:solidFill>
                 <a:latin typeface="Helvetica Neue"/>
                 <a:ea typeface="Helvetica Neue"/>
@@ -3624,7 +3656,7 @@
           <p:cNvPr id="7" name="">
             <a:extLst xmlns:a="http://schemas.openxmlformats.org/drawingml/2006/main">
               <a:ext uri="{FF2B5EF4-FFF2-40B4-BE49-F238E27FC236}">
-                <a16:creationId xmlns:a16="http://schemas.microsoft.com/office/drawing/2014/main" id="{939F6510-F3F8-4327-B48F-D6BE5D37EF3F}"/>
+                <a16:creationId xmlns:a16="http://schemas.microsoft.com/office/drawing/2014/main" id="{7D6F422B-6004-49AF-882F-74BFDF9435E4}"/>
               </a:ext>
             </a:extLst>
           </p:cNvPr>
@@ -3655,7 +3687,7 @@
             <a:pPr algn="l">
               <a:defRPr sz="1200" b="1">
                 <a:solidFill>
-                  <a:srgbClr val="2563EB"/>
+                  <a:srgbClr val="52677D"/>
                 </a:solidFill>
                 <a:latin typeface="Helvetica Neue"/>
                 <a:ea typeface="Helvetica Neue"/>
@@ -3665,7 +3697,7 @@
             <a:r>
               <a:rPr sz="1200" b="1">
                 <a:solidFill>
-                  <a:srgbClr val="2563EB"/>
+                  <a:srgbClr val="52677D"/>
                 </a:solidFill>
                 <a:latin typeface="Helvetica Neue"/>
                 <a:ea typeface="Helvetica Neue"/>
@@ -3681,7 +3713,7 @@
           <p:cNvPr id="8" name="">
             <a:extLst xmlns:a="http://schemas.openxmlformats.org/drawingml/2006/main">
               <a:ext uri="{FF2B5EF4-FFF2-40B4-BE49-F238E27FC236}">
-                <a16:creationId xmlns:a16="http://schemas.microsoft.com/office/drawing/2014/main" id="{6A09D7E4-2843-4C55-ACA5-91FAE08E8519}"/>
+                <a16:creationId xmlns:a16="http://schemas.microsoft.com/office/drawing/2014/main" id="{145B398D-CFEB-4E06-AB3D-E527427E27E1}"/>
               </a:ext>
             </a:extLst>
           </p:cNvPr>
@@ -3712,7 +3744,7 @@
             <a:pPr algn="l">
               <a:defRPr sz="1275" b="1">
                 <a:solidFill>
-                  <a:srgbClr val="092454"/>
+                  <a:srgbClr val="1C2E4A"/>
                 </a:solidFill>
                 <a:latin typeface="Helvetica Neue"/>
                 <a:ea typeface="Helvetica Neue"/>
@@ -3722,7 +3754,7 @@
             <a:r>
               <a:rPr sz="1275" b="1">
                 <a:solidFill>
-                  <a:srgbClr val="092454"/>
+                  <a:srgbClr val="1C2E4A"/>
                 </a:solidFill>
                 <a:latin typeface="Helvetica Neue"/>
                 <a:ea typeface="Helvetica Neue"/>
@@ -3738,7 +3770,7 @@
           <p:cNvPr id="9" name="">
             <a:extLst xmlns:a="http://schemas.openxmlformats.org/drawingml/2006/main">
               <a:ext uri="{FF2B5EF4-FFF2-40B4-BE49-F238E27FC236}">
-                <a16:creationId xmlns:a16="http://schemas.microsoft.com/office/drawing/2014/main" id="{876D4D01-F5A4-41C8-9C61-B0ED7514EC49}"/>
+                <a16:creationId xmlns:a16="http://schemas.microsoft.com/office/drawing/2014/main" id="{3884B3B2-AB57-4F3E-BAED-61EBA62E820D}"/>
               </a:ext>
             </a:extLst>
           </p:cNvPr>
@@ -3769,7 +3801,7 @@
             <a:pPr algn="l">
               <a:defRPr sz="900" b="0">
                 <a:solidFill>
-                  <a:srgbClr val="61718A"/>
+                  <a:srgbClr val="52677D"/>
                 </a:solidFill>
                 <a:latin typeface="Helvetica Neue"/>
                 <a:ea typeface="Helvetica Neue"/>
@@ -3779,7 +3811,7 @@
             <a:r>
               <a:rPr sz="900" b="0">
                 <a:solidFill>
-                  <a:srgbClr val="61718A"/>
+                  <a:srgbClr val="52677D"/>
                 </a:solidFill>
                 <a:latin typeface="Helvetica Neue"/>
                 <a:ea typeface="Helvetica Neue"/>
@@ -3795,7 +3827,7 @@
           <p:cNvPr id="10" name="">
             <a:extLst xmlns:a="http://schemas.openxmlformats.org/drawingml/2006/main">
               <a:ext uri="{FF2B5EF4-FFF2-40B4-BE49-F238E27FC236}">
-                <a16:creationId xmlns:a16="http://schemas.microsoft.com/office/drawing/2014/main" id="{4821AD4C-3193-4806-968B-E9D4477156D8}"/>
+                <a16:creationId xmlns:a16="http://schemas.microsoft.com/office/drawing/2014/main" id="{0181A462-B8DB-462D-91D1-5A98F706E564}"/>
               </a:ext>
             </a:extLst>
           </p:cNvPr>
@@ -3826,7 +3858,7 @@
             <a:pPr algn="l">
               <a:defRPr sz="1200" b="1">
                 <a:solidFill>
-                  <a:srgbClr val="2563EB"/>
+                  <a:srgbClr val="52677D"/>
                 </a:solidFill>
                 <a:latin typeface="Helvetica Neue"/>
                 <a:ea typeface="Helvetica Neue"/>
@@ -3836,7 +3868,7 @@
             <a:r>
               <a:rPr sz="1200" b="1">
                 <a:solidFill>
-                  <a:srgbClr val="2563EB"/>
+                  <a:srgbClr val="52677D"/>
                 </a:solidFill>
                 <a:latin typeface="Helvetica Neue"/>
                 <a:ea typeface="Helvetica Neue"/>
@@ -3852,7 +3884,7 @@
           <p:cNvPr id="11" name="">
             <a:extLst xmlns:a="http://schemas.openxmlformats.org/drawingml/2006/main">
               <a:ext uri="{FF2B5EF4-FFF2-40B4-BE49-F238E27FC236}">
-                <a16:creationId xmlns:a16="http://schemas.microsoft.com/office/drawing/2014/main" id="{97CB7FB4-26C3-4FDA-9DF7-81B8A95BE2EA}"/>
+                <a16:creationId xmlns:a16="http://schemas.microsoft.com/office/drawing/2014/main" id="{123FACF7-D74D-4429-8A8B-836E1B87DB6F}"/>
               </a:ext>
             </a:extLst>
           </p:cNvPr>
@@ -3883,7 +3915,7 @@
             <a:pPr algn="l">
               <a:defRPr sz="1275" b="1">
                 <a:solidFill>
-                  <a:srgbClr val="092454"/>
+                  <a:srgbClr val="1C2E4A"/>
                 </a:solidFill>
                 <a:latin typeface="Helvetica Neue"/>
                 <a:ea typeface="Helvetica Neue"/>
@@ -3893,7 +3925,7 @@
             <a:r>
               <a:rPr sz="1275" b="1">
                 <a:solidFill>
-                  <a:srgbClr val="092454"/>
+                  <a:srgbClr val="1C2E4A"/>
                 </a:solidFill>
                 <a:latin typeface="Helvetica Neue"/>
                 <a:ea typeface="Helvetica Neue"/>
@@ -3909,7 +3941,7 @@
           <p:cNvPr id="12" name="">
             <a:extLst xmlns:a="http://schemas.openxmlformats.org/drawingml/2006/main">
               <a:ext uri="{FF2B5EF4-FFF2-40B4-BE49-F238E27FC236}">
-                <a16:creationId xmlns:a16="http://schemas.microsoft.com/office/drawing/2014/main" id="{E6EA59A5-9AC5-4905-B999-AB25B036FB3B}"/>
+                <a16:creationId xmlns:a16="http://schemas.microsoft.com/office/drawing/2014/main" id="{0EE8E698-A415-434B-BD19-4245FA8E840A}"/>
               </a:ext>
             </a:extLst>
           </p:cNvPr>
@@ -3940,7 +3972,7 @@
             <a:pPr algn="l">
               <a:defRPr sz="900" b="0">
                 <a:solidFill>
-                  <a:srgbClr val="61718A"/>
+                  <a:srgbClr val="52677D"/>
                 </a:solidFill>
                 <a:latin typeface="Helvetica Neue"/>
                 <a:ea typeface="Helvetica Neue"/>
@@ -3950,7 +3982,7 @@
             <a:r>
               <a:rPr sz="900" b="0">
                 <a:solidFill>
-                  <a:srgbClr val="61718A"/>
+                  <a:srgbClr val="52677D"/>
                 </a:solidFill>
                 <a:latin typeface="Helvetica Neue"/>
                 <a:ea typeface="Helvetica Neue"/>
@@ -3966,7 +3998,7 @@
           <p:cNvPr id="13" name="">
             <a:extLst xmlns:a="http://schemas.openxmlformats.org/drawingml/2006/main">
               <a:ext uri="{FF2B5EF4-FFF2-40B4-BE49-F238E27FC236}">
-                <a16:creationId xmlns:a16="http://schemas.microsoft.com/office/drawing/2014/main" id="{6D2C94B4-E271-4209-BE94-49DC3ED70B4B}"/>
+                <a16:creationId xmlns:a16="http://schemas.microsoft.com/office/drawing/2014/main" id="{177403FB-ED7C-4ADE-800F-666DD7C0C92B}"/>
               </a:ext>
             </a:extLst>
           </p:cNvPr>
@@ -3997,7 +4029,7 @@
             <a:pPr algn="l">
               <a:defRPr sz="1200" b="1">
                 <a:solidFill>
-                  <a:srgbClr val="2563EB"/>
+                  <a:srgbClr val="52677D"/>
                 </a:solidFill>
                 <a:latin typeface="Helvetica Neue"/>
                 <a:ea typeface="Helvetica Neue"/>
@@ -4007,7 +4039,7 @@
             <a:r>
               <a:rPr sz="1200" b="1">
                 <a:solidFill>
-                  <a:srgbClr val="2563EB"/>
+                  <a:srgbClr val="52677D"/>
                 </a:solidFill>
                 <a:latin typeface="Helvetica Neue"/>
                 <a:ea typeface="Helvetica Neue"/>
@@ -4023,7 +4055,7 @@
           <p:cNvPr id="14" name="">
             <a:extLst xmlns:a="http://schemas.openxmlformats.org/drawingml/2006/main">
               <a:ext uri="{FF2B5EF4-FFF2-40B4-BE49-F238E27FC236}">
-                <a16:creationId xmlns:a16="http://schemas.microsoft.com/office/drawing/2014/main" id="{A86C0D46-2A8A-4EC3-84DE-38D145458964}"/>
+                <a16:creationId xmlns:a16="http://schemas.microsoft.com/office/drawing/2014/main" id="{9A57E65A-471D-45EE-8ED7-7C899A3A5A2E}"/>
               </a:ext>
             </a:extLst>
           </p:cNvPr>
@@ -4054,7 +4086,7 @@
             <a:pPr algn="l">
               <a:defRPr sz="1275" b="1">
                 <a:solidFill>
-                  <a:srgbClr val="092454"/>
+                  <a:srgbClr val="1C2E4A"/>
                 </a:solidFill>
                 <a:latin typeface="Helvetica Neue"/>
                 <a:ea typeface="Helvetica Neue"/>
@@ -4064,7 +4096,7 @@
             <a:r>
               <a:rPr sz="1275" b="1">
                 <a:solidFill>
-                  <a:srgbClr val="092454"/>
+                  <a:srgbClr val="1C2E4A"/>
                 </a:solidFill>
                 <a:latin typeface="Helvetica Neue"/>
                 <a:ea typeface="Helvetica Neue"/>
@@ -4080,7 +4112,7 @@
           <p:cNvPr id="15" name="">
             <a:extLst xmlns:a="http://schemas.openxmlformats.org/drawingml/2006/main">
               <a:ext uri="{FF2B5EF4-FFF2-40B4-BE49-F238E27FC236}">
-                <a16:creationId xmlns:a16="http://schemas.microsoft.com/office/drawing/2014/main" id="{59BB6F5F-31FB-4548-BC15-5617EF5AD2AB}"/>
+                <a16:creationId xmlns:a16="http://schemas.microsoft.com/office/drawing/2014/main" id="{0815454F-CA7E-40B5-85CD-BA7CF2403E0B}"/>
               </a:ext>
             </a:extLst>
           </p:cNvPr>
@@ -4111,7 +4143,7 @@
             <a:pPr algn="l">
               <a:defRPr sz="900" b="0">
                 <a:solidFill>
-                  <a:srgbClr val="61718A"/>
+                  <a:srgbClr val="52677D"/>
                 </a:solidFill>
                 <a:latin typeface="Helvetica Neue"/>
                 <a:ea typeface="Helvetica Neue"/>
@@ -4121,7 +4153,7 @@
             <a:r>
               <a:rPr sz="900" b="0">
                 <a:solidFill>
-                  <a:srgbClr val="61718A"/>
+                  <a:srgbClr val="52677D"/>
                 </a:solidFill>
                 <a:latin typeface="Helvetica Neue"/>
                 <a:ea typeface="Helvetica Neue"/>
@@ -4137,7 +4169,7 @@
           <p:cNvPr id="16" name="">
             <a:extLst xmlns:a="http://schemas.openxmlformats.org/drawingml/2006/main">
               <a:ext uri="{FF2B5EF4-FFF2-40B4-BE49-F238E27FC236}">
-                <a16:creationId xmlns:a16="http://schemas.microsoft.com/office/drawing/2014/main" id="{B7B1761B-099B-4785-9B42-6BE1256A27B9}"/>
+                <a16:creationId xmlns:a16="http://schemas.microsoft.com/office/drawing/2014/main" id="{F3CCC8E3-4E75-4A23-B058-C0E058E7E7DF}"/>
               </a:ext>
             </a:extLst>
           </p:cNvPr>
@@ -4168,7 +4200,7 @@
             <a:pPr algn="l">
               <a:defRPr sz="1200" b="1">
                 <a:solidFill>
-                  <a:srgbClr val="2563EB"/>
+                  <a:srgbClr val="52677D"/>
                 </a:solidFill>
                 <a:latin typeface="Helvetica Neue"/>
                 <a:ea typeface="Helvetica Neue"/>
@@ -4178,7 +4210,7 @@
             <a:r>
               <a:rPr sz="1200" b="1">
                 <a:solidFill>
-                  <a:srgbClr val="2563EB"/>
+                  <a:srgbClr val="52677D"/>
                 </a:solidFill>
                 <a:latin typeface="Helvetica Neue"/>
                 <a:ea typeface="Helvetica Neue"/>
@@ -4194,7 +4226,7 @@
           <p:cNvPr id="17" name="">
             <a:extLst xmlns:a="http://schemas.openxmlformats.org/drawingml/2006/main">
               <a:ext uri="{FF2B5EF4-FFF2-40B4-BE49-F238E27FC236}">
-                <a16:creationId xmlns:a16="http://schemas.microsoft.com/office/drawing/2014/main" id="{F3293F27-7422-4E91-87A8-CF67E2158AAA}"/>
+                <a16:creationId xmlns:a16="http://schemas.microsoft.com/office/drawing/2014/main" id="{BDAB6A36-0985-4EEA-AC9D-34EE4E2CDBF0}"/>
               </a:ext>
             </a:extLst>
           </p:cNvPr>
@@ -4225,7 +4257,7 @@
             <a:pPr algn="l">
               <a:defRPr sz="1275" b="1">
                 <a:solidFill>
-                  <a:srgbClr val="092454"/>
+                  <a:srgbClr val="1C2E4A"/>
                 </a:solidFill>
                 <a:latin typeface="Helvetica Neue"/>
                 <a:ea typeface="Helvetica Neue"/>
@@ -4235,7 +4267,7 @@
             <a:r>
               <a:rPr sz="1275" b="1">
                 <a:solidFill>
-                  <a:srgbClr val="092454"/>
+                  <a:srgbClr val="1C2E4A"/>
                 </a:solidFill>
                 <a:latin typeface="Helvetica Neue"/>
                 <a:ea typeface="Helvetica Neue"/>
@@ -4251,7 +4283,7 @@
           <p:cNvPr id="18" name="">
             <a:extLst xmlns:a="http://schemas.openxmlformats.org/drawingml/2006/main">
               <a:ext uri="{FF2B5EF4-FFF2-40B4-BE49-F238E27FC236}">
-                <a16:creationId xmlns:a16="http://schemas.microsoft.com/office/drawing/2014/main" id="{0B7BA976-3999-4936-B357-0621F64884B5}"/>
+                <a16:creationId xmlns:a16="http://schemas.microsoft.com/office/drawing/2014/main" id="{60748657-0809-48F4-A9F6-CFDC6FDB012C}"/>
               </a:ext>
             </a:extLst>
           </p:cNvPr>
@@ -4282,7 +4314,7 @@
             <a:pPr algn="l">
               <a:defRPr sz="900" b="0">
                 <a:solidFill>
-                  <a:srgbClr val="61718A"/>
+                  <a:srgbClr val="52677D"/>
                 </a:solidFill>
                 <a:latin typeface="Helvetica Neue"/>
                 <a:ea typeface="Helvetica Neue"/>
@@ -4292,7 +4324,7 @@
             <a:r>
               <a:rPr sz="900" b="0">
                 <a:solidFill>
-                  <a:srgbClr val="61718A"/>
+                  <a:srgbClr val="52677D"/>
                 </a:solidFill>
                 <a:latin typeface="Helvetica Neue"/>
                 <a:ea typeface="Helvetica Neue"/>
@@ -4308,7 +4340,7 @@
           <p:cNvPr id="19" name="">
             <a:extLst xmlns:a="http://schemas.openxmlformats.org/drawingml/2006/main">
               <a:ext uri="{FF2B5EF4-FFF2-40B4-BE49-F238E27FC236}">
-                <a16:creationId xmlns:a16="http://schemas.microsoft.com/office/drawing/2014/main" id="{7877CCE6-7626-4F76-803A-2DD3273B5773}"/>
+                <a16:creationId xmlns:a16="http://schemas.microsoft.com/office/drawing/2014/main" id="{1933DCC7-CCC2-48A5-B9C2-97AFB7739BF6}"/>
               </a:ext>
             </a:extLst>
           </p:cNvPr>
@@ -4339,7 +4371,7 @@
             <a:pPr algn="l">
               <a:defRPr sz="1200" b="1">
                 <a:solidFill>
-                  <a:srgbClr val="2563EB"/>
+                  <a:srgbClr val="52677D"/>
                 </a:solidFill>
                 <a:latin typeface="Helvetica Neue"/>
                 <a:ea typeface="Helvetica Neue"/>
@@ -4349,7 +4381,7 @@
             <a:r>
               <a:rPr sz="1200" b="1">
                 <a:solidFill>
-                  <a:srgbClr val="2563EB"/>
+                  <a:srgbClr val="52677D"/>
                 </a:solidFill>
                 <a:latin typeface="Helvetica Neue"/>
                 <a:ea typeface="Helvetica Neue"/>
@@ -4365,7 +4397,7 @@
           <p:cNvPr id="20" name="">
             <a:extLst xmlns:a="http://schemas.openxmlformats.org/drawingml/2006/main">
               <a:ext uri="{FF2B5EF4-FFF2-40B4-BE49-F238E27FC236}">
-                <a16:creationId xmlns:a16="http://schemas.microsoft.com/office/drawing/2014/main" id="{F1DE106B-001C-4971-A9FC-4EF96FDFDA63}"/>
+                <a16:creationId xmlns:a16="http://schemas.microsoft.com/office/drawing/2014/main" id="{E73FA5B9-A4B3-48B9-8C20-80AECF82FBAE}"/>
               </a:ext>
             </a:extLst>
           </p:cNvPr>
@@ -4396,7 +4428,7 @@
             <a:pPr algn="l">
               <a:defRPr sz="1275" b="1">
                 <a:solidFill>
-                  <a:srgbClr val="092454"/>
+                  <a:srgbClr val="1C2E4A"/>
                 </a:solidFill>
                 <a:latin typeface="Helvetica Neue"/>
                 <a:ea typeface="Helvetica Neue"/>
@@ -4406,7 +4438,7 @@
             <a:r>
               <a:rPr sz="1275" b="1">
                 <a:solidFill>
-                  <a:srgbClr val="092454"/>
+                  <a:srgbClr val="1C2E4A"/>
                 </a:solidFill>
                 <a:latin typeface="Helvetica Neue"/>
                 <a:ea typeface="Helvetica Neue"/>
@@ -4422,7 +4454,7 @@
           <p:cNvPr id="21" name="">
             <a:extLst xmlns:a="http://schemas.openxmlformats.org/drawingml/2006/main">
               <a:ext uri="{FF2B5EF4-FFF2-40B4-BE49-F238E27FC236}">
-                <a16:creationId xmlns:a16="http://schemas.microsoft.com/office/drawing/2014/main" id="{63138E9D-A58B-4F88-AA8F-040BA772C6C6}"/>
+                <a16:creationId xmlns:a16="http://schemas.microsoft.com/office/drawing/2014/main" id="{DE6BEA82-8B71-47C5-936C-4CBD8A9C2C5B}"/>
               </a:ext>
             </a:extLst>
           </p:cNvPr>
@@ -4453,7 +4485,7 @@
             <a:pPr algn="l">
               <a:defRPr sz="900" b="0">
                 <a:solidFill>
-                  <a:srgbClr val="61718A"/>
+                  <a:srgbClr val="52677D"/>
                 </a:solidFill>
                 <a:latin typeface="Helvetica Neue"/>
                 <a:ea typeface="Helvetica Neue"/>
@@ -4463,7 +4495,7 @@
             <a:r>
               <a:rPr sz="900" b="0">
                 <a:solidFill>
-                  <a:srgbClr val="61718A"/>
+                  <a:srgbClr val="52677D"/>
                 </a:solidFill>
                 <a:latin typeface="Helvetica Neue"/>
                 <a:ea typeface="Helvetica Neue"/>
@@ -4479,7 +4511,7 @@
           <p:cNvPr id="22" name="">
             <a:extLst xmlns:a="http://schemas.openxmlformats.org/drawingml/2006/main">
               <a:ext uri="{FF2B5EF4-FFF2-40B4-BE49-F238E27FC236}">
-                <a16:creationId xmlns:a16="http://schemas.microsoft.com/office/drawing/2014/main" id="{1BE78A48-F687-4541-8E2C-526C0900D525}"/>
+                <a16:creationId xmlns:a16="http://schemas.microsoft.com/office/drawing/2014/main" id="{B88063A2-FFDE-4258-88F2-0D4D7C582A2C}"/>
               </a:ext>
             </a:extLst>
           </p:cNvPr>
@@ -4497,7 +4529,7 @@
             <a:avLst/>
           </a:prstGeom>
           <a:solidFill xmlns:a="http://schemas.openxmlformats.org/drawingml/2006/main">
-            <a:srgbClr val="D8E5F2"/>
+            <a:srgbClr val="BDC4D4"/>
           </a:solidFill>
           <a:ln xmlns:a="http://schemas.openxmlformats.org/drawingml/2006/main" w="0">
             <a:noFill/>
@@ -4509,7 +4541,7 @@
           <p:cNvPr id="23" name="">
             <a:extLst xmlns:a="http://schemas.openxmlformats.org/drawingml/2006/main">
               <a:ext uri="{FF2B5EF4-FFF2-40B4-BE49-F238E27FC236}">
-                <a16:creationId xmlns:a16="http://schemas.microsoft.com/office/drawing/2014/main" id="{7EE8BA86-0C9A-41CA-BD0B-265C2689C12A}"/>
+                <a16:creationId xmlns:a16="http://schemas.microsoft.com/office/drawing/2014/main" id="{2C28D8CA-C352-40B2-9DE2-EE2573F332BF}"/>
               </a:ext>
             </a:extLst>
           </p:cNvPr>
@@ -4540,7 +4572,7 @@
             <a:pPr algn="l">
               <a:defRPr sz="750" b="0">
                 <a:solidFill>
-                  <a:srgbClr val="61718A"/>
+                  <a:srgbClr val="52677D"/>
                 </a:solidFill>
                 <a:latin typeface="Helvetica Neue"/>
                 <a:ea typeface="Helvetica Neue"/>
@@ -4550,7 +4582,7 @@
             <a:r>
               <a:rPr sz="750" b="0">
                 <a:solidFill>
-                  <a:srgbClr val="61718A"/>
+                  <a:srgbClr val="52677D"/>
                 </a:solidFill>
                 <a:latin typeface="Helvetica Neue"/>
                 <a:ea typeface="Helvetica Neue"/>
@@ -4566,7 +4598,7 @@
           <p:cNvPr id="24" name="">
             <a:extLst xmlns:a="http://schemas.openxmlformats.org/drawingml/2006/main">
               <a:ext uri="{FF2B5EF4-FFF2-40B4-BE49-F238E27FC236}">
-                <a16:creationId xmlns:a16="http://schemas.microsoft.com/office/drawing/2014/main" id="{9C576499-8D62-465C-92FE-C2136CF5673C}"/>
+                <a16:creationId xmlns:a16="http://schemas.microsoft.com/office/drawing/2014/main" id="{800A1895-B5D5-4E2D-9EEA-FDC7945C2688}"/>
               </a:ext>
             </a:extLst>
           </p:cNvPr>
@@ -4597,7 +4629,7 @@
             <a:pPr algn="r">
               <a:defRPr sz="825" b="1">
                 <a:solidFill>
-                  <a:srgbClr val="2563EB"/>
+                  <a:srgbClr val="52677D"/>
                 </a:solidFill>
                 <a:latin typeface="Helvetica Neue"/>
                 <a:ea typeface="Helvetica Neue"/>
@@ -4607,7 +4639,7 @@
             <a:r>
               <a:rPr sz="825" b="1">
                 <a:solidFill>
-                  <a:srgbClr val="2563EB"/>
+                  <a:srgbClr val="52677D"/>
                 </a:solidFill>
                 <a:latin typeface="Helvetica Neue"/>
                 <a:ea typeface="Helvetica Neue"/>
@@ -4621,7 +4653,7 @@
     </p:spTree>
     <p:extLst>
       <p:ext uri="{BB962C8B-B14F-4D97-AF65-F5344CB8AC3E}">
-        <p14:creationId xmlns:p14="http://schemas.microsoft.com/office/powerpoint/2010/main" val="1465190642"/>
+        <p14:creationId xmlns:p14="http://schemas.microsoft.com/office/powerpoint/2010/main" val="679050819"/>
       </p:ext>
     </p:extLst>
   </p:cSld>
@@ -4634,7 +4666,7 @@
     <p:bg>
       <p:bgPr>
         <a:solidFill xmlns:a="http://schemas.openxmlformats.org/drawingml/2006/main">
-          <a:srgbClr val="061A3A"/>
+          <a:srgbClr val="0F1A2B"/>
         </a:solidFill>
       </p:bgPr>
     </p:bg>
@@ -4652,7 +4684,7 @@
           <p:cNvPr id="10" name="">
             <a:extLst xmlns:a="http://schemas.openxmlformats.org/drawingml/2006/main">
               <a:ext uri="{FF2B5EF4-FFF2-40B4-BE49-F238E27FC236}">
-                <a16:creationId xmlns:a16="http://schemas.microsoft.com/office/drawing/2014/main" id="{EA7A490C-F8EB-4087-B0BE-AC76D083DED3}"/>
+                <a16:creationId xmlns:a16="http://schemas.microsoft.com/office/drawing/2014/main" id="{F0F8FB50-5435-40FA-890A-F94AE7A259E4}"/>
               </a:ext>
             </a:extLst>
           </p:cNvPr>
@@ -4683,7 +4715,7 @@
             <a:pPr algn="l">
               <a:defRPr sz="1125" b="1">
                 <a:solidFill>
-                  <a:srgbClr val="FFD43B"/>
+                  <a:srgbClr val="D1CFC9"/>
                 </a:solidFill>
                 <a:latin typeface="Helvetica Neue"/>
                 <a:ea typeface="Helvetica Neue"/>
@@ -4693,7 +4725,7 @@
             <a:r>
               <a:rPr sz="1125" b="1">
                 <a:solidFill>
-                  <a:srgbClr val="FFD43B"/>
+                  <a:srgbClr val="D1CFC9"/>
                 </a:solidFill>
                 <a:latin typeface="Helvetica Neue"/>
                 <a:ea typeface="Helvetica Neue"/>
@@ -4709,7 +4741,7 @@
           <p:cNvPr id="2" name="">
             <a:extLst xmlns:a="http://schemas.openxmlformats.org/drawingml/2006/main">
               <a:ext uri="{FF2B5EF4-FFF2-40B4-BE49-F238E27FC236}">
-                <a16:creationId xmlns:a16="http://schemas.microsoft.com/office/drawing/2014/main" id="{C04620B9-D30A-49BE-AD21-ED787B01A897}"/>
+                <a16:creationId xmlns:a16="http://schemas.microsoft.com/office/drawing/2014/main" id="{67BBAB6F-DAD5-44C6-85BF-B3EA2218BC69}"/>
               </a:ext>
             </a:extLst>
           </p:cNvPr>
@@ -4766,7 +4798,7 @@
           <p:cNvPr id="3" name="">
             <a:extLst xmlns:a="http://schemas.openxmlformats.org/drawingml/2006/main">
               <a:ext uri="{FF2B5EF4-FFF2-40B4-BE49-F238E27FC236}">
-                <a16:creationId xmlns:a16="http://schemas.microsoft.com/office/drawing/2014/main" id="{D2E2FA41-0878-4FB0-9856-D94513FB0B1A}"/>
+                <a16:creationId xmlns:a16="http://schemas.microsoft.com/office/drawing/2014/main" id="{498D66E0-7F0F-40E8-BFC0-89A82AB78DEA}"/>
               </a:ext>
             </a:extLst>
           </p:cNvPr>
@@ -4797,7 +4829,7 @@
             <a:pPr algn="l">
               <a:defRPr sz="8700" b="1">
                 <a:solidFill>
-                  <a:srgbClr val="FFD43B"/>
+                  <a:srgbClr val="D1CFC9"/>
                 </a:solidFill>
                 <a:latin typeface="Helvetica Neue"/>
                 <a:ea typeface="Helvetica Neue"/>
@@ -4807,7 +4839,7 @@
             <a:r>
               <a:rPr sz="8700" b="1">
                 <a:solidFill>
-                  <a:srgbClr val="FFD43B"/>
+                  <a:srgbClr val="D1CFC9"/>
                 </a:solidFill>
                 <a:latin typeface="Helvetica Neue"/>
                 <a:ea typeface="Helvetica Neue"/>
@@ -4823,7 +4855,7 @@
           <p:cNvPr id="4" name="">
             <a:extLst xmlns:a="http://schemas.openxmlformats.org/drawingml/2006/main">
               <a:ext uri="{FF2B5EF4-FFF2-40B4-BE49-F238E27FC236}">
-                <a16:creationId xmlns:a16="http://schemas.microsoft.com/office/drawing/2014/main" id="{EAB1E637-879D-46F9-9215-22571973E760}"/>
+                <a16:creationId xmlns:a16="http://schemas.microsoft.com/office/drawing/2014/main" id="{51EFDF3F-223C-4078-9DBB-86FC85836EB4}"/>
               </a:ext>
             </a:extLst>
           </p:cNvPr>
@@ -4880,7 +4912,7 @@
           <p:cNvPr id="5" name="">
             <a:extLst xmlns:a="http://schemas.openxmlformats.org/drawingml/2006/main">
               <a:ext uri="{FF2B5EF4-FFF2-40B4-BE49-F238E27FC236}">
-                <a16:creationId xmlns:a16="http://schemas.microsoft.com/office/drawing/2014/main" id="{69EDC74F-42F1-440B-999B-CF6BE8C50407}"/>
+                <a16:creationId xmlns:a16="http://schemas.microsoft.com/office/drawing/2014/main" id="{857BB9E1-976D-42B4-90AB-5FF91A5EDE27}"/>
               </a:ext>
             </a:extLst>
           </p:cNvPr>
@@ -4898,7 +4930,7 @@
             <a:avLst/>
           </a:prstGeom>
           <a:solidFill xmlns:a="http://schemas.openxmlformats.org/drawingml/2006/main">
-            <a:srgbClr val="31507E"/>
+            <a:srgbClr val="52677D"/>
           </a:solidFill>
           <a:ln xmlns:a="http://schemas.openxmlformats.org/drawingml/2006/main" w="0">
             <a:noFill/>
@@ -4910,7 +4942,7 @@
           <p:cNvPr id="6" name="">
             <a:extLst xmlns:a="http://schemas.openxmlformats.org/drawingml/2006/main">
               <a:ext uri="{FF2B5EF4-FFF2-40B4-BE49-F238E27FC236}">
-                <a16:creationId xmlns:a16="http://schemas.microsoft.com/office/drawing/2014/main" id="{F1913D0E-9EA1-437D-9222-4839D58EDA4A}"/>
+                <a16:creationId xmlns:a16="http://schemas.microsoft.com/office/drawing/2014/main" id="{2053D5A6-CF44-4232-8984-1427A4F86834}"/>
               </a:ext>
             </a:extLst>
           </p:cNvPr>
@@ -4941,7 +4973,7 @@
             <a:pPr algn="l">
               <a:defRPr sz="1800" b="0">
                 <a:solidFill>
-                  <a:srgbClr val="BFE6FF"/>
+                  <a:srgbClr val="BDC4D4"/>
                 </a:solidFill>
                 <a:latin typeface="Helvetica Neue"/>
                 <a:ea typeface="Helvetica Neue"/>
@@ -4951,7 +4983,7 @@
             <a:r>
               <a:rPr sz="1800" b="0">
                 <a:solidFill>
-                  <a:srgbClr val="BFE6FF"/>
+                  <a:srgbClr val="BDC4D4"/>
                 </a:solidFill>
                 <a:latin typeface="Helvetica Neue"/>
                 <a:ea typeface="Helvetica Neue"/>
@@ -4967,7 +4999,7 @@
           <p:cNvPr id="7" name="">
             <a:extLst xmlns:a="http://schemas.openxmlformats.org/drawingml/2006/main">
               <a:ext uri="{FF2B5EF4-FFF2-40B4-BE49-F238E27FC236}">
-                <a16:creationId xmlns:a16="http://schemas.microsoft.com/office/drawing/2014/main" id="{10DD210B-B472-4C5C-A291-C6690B2BC36B}"/>
+                <a16:creationId xmlns:a16="http://schemas.microsoft.com/office/drawing/2014/main" id="{62AC3466-D415-4C8B-B469-8291E7912F44}"/>
               </a:ext>
             </a:extLst>
           </p:cNvPr>
@@ -4985,7 +5017,7 @@
             <a:avLst/>
           </a:prstGeom>
           <a:solidFill xmlns:a="http://schemas.openxmlformats.org/drawingml/2006/main">
-            <a:srgbClr val="31507E"/>
+            <a:srgbClr val="52677D"/>
           </a:solidFill>
           <a:ln xmlns:a="http://schemas.openxmlformats.org/drawingml/2006/main" w="0">
             <a:noFill/>
@@ -4997,7 +5029,7 @@
           <p:cNvPr id="8" name="">
             <a:extLst xmlns:a="http://schemas.openxmlformats.org/drawingml/2006/main">
               <a:ext uri="{FF2B5EF4-FFF2-40B4-BE49-F238E27FC236}">
-                <a16:creationId xmlns:a16="http://schemas.microsoft.com/office/drawing/2014/main" id="{9FF25175-C91B-44B3-B3B0-B9C8701BCD2D}"/>
+                <a16:creationId xmlns:a16="http://schemas.microsoft.com/office/drawing/2014/main" id="{6D25A707-B5B4-43D8-A95B-FF37702C453F}"/>
               </a:ext>
             </a:extLst>
           </p:cNvPr>
@@ -5028,7 +5060,7 @@
             <a:pPr algn="l">
               <a:defRPr sz="750" b="0">
                 <a:solidFill>
-                  <a:srgbClr val="BFE6FF"/>
+                  <a:srgbClr val="BDC4D4"/>
                 </a:solidFill>
                 <a:latin typeface="Helvetica Neue"/>
                 <a:ea typeface="Helvetica Neue"/>
@@ -5038,7 +5070,7 @@
             <a:r>
               <a:rPr sz="750" b="0">
                 <a:solidFill>
-                  <a:srgbClr val="BFE6FF"/>
+                  <a:srgbClr val="BDC4D4"/>
                 </a:solidFill>
                 <a:latin typeface="Helvetica Neue"/>
                 <a:ea typeface="Helvetica Neue"/>
@@ -5054,7 +5086,7 @@
           <p:cNvPr id="9" name="">
             <a:extLst xmlns:a="http://schemas.openxmlformats.org/drawingml/2006/main">
               <a:ext uri="{FF2B5EF4-FFF2-40B4-BE49-F238E27FC236}">
-                <a16:creationId xmlns:a16="http://schemas.microsoft.com/office/drawing/2014/main" id="{0AD2E406-45A5-4F4D-8055-DFED2A958810}"/>
+                <a16:creationId xmlns:a16="http://schemas.microsoft.com/office/drawing/2014/main" id="{91381239-20DF-451C-B67F-6CF3F8239E0A}"/>
               </a:ext>
             </a:extLst>
           </p:cNvPr>
@@ -5085,7 +5117,7 @@
             <a:pPr algn="r">
               <a:defRPr sz="825" b="1">
                 <a:solidFill>
-                  <a:srgbClr val="FFD43B"/>
+                  <a:srgbClr val="D1CFC9"/>
                 </a:solidFill>
                 <a:latin typeface="Helvetica Neue"/>
                 <a:ea typeface="Helvetica Neue"/>
@@ -5095,7 +5127,7 @@
             <a:r>
               <a:rPr sz="825" b="1">
                 <a:solidFill>
-                  <a:srgbClr val="FFD43B"/>
+                  <a:srgbClr val="D1CFC9"/>
                 </a:solidFill>
                 <a:latin typeface="Helvetica Neue"/>
                 <a:ea typeface="Helvetica Neue"/>
@@ -5109,7 +5141,7 @@
     </p:spTree>
     <p:extLst>
       <p:ext uri="{BB962C8B-B14F-4D97-AF65-F5344CB8AC3E}">
-        <p14:creationId xmlns:p14="http://schemas.microsoft.com/office/powerpoint/2010/main" val="1200378712"/>
+        <p14:creationId xmlns:p14="http://schemas.microsoft.com/office/powerpoint/2010/main" val="1950050415"/>
       </p:ext>
     </p:extLst>
   </p:cSld>
@@ -5140,7 +5172,7 @@
           <p:cNvPr id="24" name="">
             <a:extLst xmlns:a="http://schemas.openxmlformats.org/drawingml/2006/main">
               <a:ext uri="{FF2B5EF4-FFF2-40B4-BE49-F238E27FC236}">
-                <a16:creationId xmlns:a16="http://schemas.microsoft.com/office/drawing/2014/main" id="{8D2BF0F2-1E2B-41E8-8C0D-BB1DD836E6EB}"/>
+                <a16:creationId xmlns:a16="http://schemas.microsoft.com/office/drawing/2014/main" id="{D425BB5E-2C73-4661-98EE-0FC6052FC60B}"/>
               </a:ext>
             </a:extLst>
           </p:cNvPr>
@@ -5158,7 +5190,7 @@
             <a:avLst/>
           </a:prstGeom>
           <a:solidFill xmlns:a="http://schemas.openxmlformats.org/drawingml/2006/main">
-            <a:srgbClr val="2563EB"/>
+            <a:srgbClr val="1C2E4A"/>
           </a:solidFill>
           <a:ln xmlns:a="http://schemas.openxmlformats.org/drawingml/2006/main" w="0">
             <a:noFill/>
@@ -5170,7 +5202,7 @@
           <p:cNvPr id="2" name="">
             <a:extLst xmlns:a="http://schemas.openxmlformats.org/drawingml/2006/main">
               <a:ext uri="{FF2B5EF4-FFF2-40B4-BE49-F238E27FC236}">
-                <a16:creationId xmlns:a16="http://schemas.microsoft.com/office/drawing/2014/main" id="{10FA598B-3001-444C-87BD-5E105E41E62B}"/>
+                <a16:creationId xmlns:a16="http://schemas.microsoft.com/office/drawing/2014/main" id="{2BEF1CAE-356F-40BA-AAAA-205C7DCD972A}"/>
               </a:ext>
             </a:extLst>
           </p:cNvPr>
@@ -5201,7 +5233,7 @@
             <a:pPr algn="l">
               <a:defRPr sz="1125" b="1">
                 <a:solidFill>
-                  <a:srgbClr val="2563EB"/>
+                  <a:srgbClr val="52677D"/>
                 </a:solidFill>
                 <a:latin typeface="Helvetica Neue"/>
                 <a:ea typeface="Helvetica Neue"/>
@@ -5211,7 +5243,7 @@
             <a:r>
               <a:rPr sz="1125" b="1">
                 <a:solidFill>
-                  <a:srgbClr val="2563EB"/>
+                  <a:srgbClr val="52677D"/>
                 </a:solidFill>
                 <a:latin typeface="Helvetica Neue"/>
                 <a:ea typeface="Helvetica Neue"/>
@@ -5227,7 +5259,7 @@
           <p:cNvPr id="3" name="">
             <a:extLst xmlns:a="http://schemas.openxmlformats.org/drawingml/2006/main">
               <a:ext uri="{FF2B5EF4-FFF2-40B4-BE49-F238E27FC236}">
-                <a16:creationId xmlns:a16="http://schemas.microsoft.com/office/drawing/2014/main" id="{B3C58719-73A1-409B-85D3-030B5D427AE7}"/>
+                <a16:creationId xmlns:a16="http://schemas.microsoft.com/office/drawing/2014/main" id="{4ED8B50F-01EA-4114-80D6-EFAB8CA67104}"/>
               </a:ext>
             </a:extLst>
           </p:cNvPr>
@@ -5247,7 +5279,7 @@
             </a:avLst>
           </a:prstGeom>
           <a:solidFill xmlns:a="http://schemas.openxmlformats.org/drawingml/2006/main">
-            <a:srgbClr val="FFD43B"/>
+            <a:srgbClr val="D1CFC9"/>
           </a:solidFill>
           <a:ln xmlns:a="http://schemas.openxmlformats.org/drawingml/2006/main" w="0">
             <a:noFill/>
@@ -5259,7 +5291,7 @@
           <p:cNvPr id="4" name="">
             <a:extLst xmlns:a="http://schemas.openxmlformats.org/drawingml/2006/main">
               <a:ext uri="{FF2B5EF4-FFF2-40B4-BE49-F238E27FC236}">
-                <a16:creationId xmlns:a16="http://schemas.microsoft.com/office/drawing/2014/main" id="{7BC23461-CBF4-438F-8D45-4C66713F3376}"/>
+                <a16:creationId xmlns:a16="http://schemas.microsoft.com/office/drawing/2014/main" id="{33DE3740-197E-4536-BC58-4BDA77E47FAA}"/>
               </a:ext>
             </a:extLst>
           </p:cNvPr>
@@ -5290,7 +5322,7 @@
             <a:pPr algn="ctr">
               <a:defRPr sz="1275" b="1">
                 <a:solidFill>
-                  <a:srgbClr val="092454"/>
+                  <a:srgbClr val="1C2E4A"/>
                 </a:solidFill>
                 <a:latin typeface="Helvetica Neue"/>
                 <a:ea typeface="Helvetica Neue"/>
@@ -5300,7 +5332,7 @@
             <a:r>
               <a:rPr sz="1275" b="1">
                 <a:solidFill>
-                  <a:srgbClr val="092454"/>
+                  <a:srgbClr val="1C2E4A"/>
                 </a:solidFill>
                 <a:latin typeface="Helvetica Neue"/>
                 <a:ea typeface="Helvetica Neue"/>
@@ -5316,7 +5348,7 @@
           <p:cNvPr id="5" name="">
             <a:extLst xmlns:a="http://schemas.openxmlformats.org/drawingml/2006/main">
               <a:ext uri="{FF2B5EF4-FFF2-40B4-BE49-F238E27FC236}">
-                <a16:creationId xmlns:a16="http://schemas.microsoft.com/office/drawing/2014/main" id="{2043B92E-C892-40F5-80E7-4348051710A8}"/>
+                <a16:creationId xmlns:a16="http://schemas.microsoft.com/office/drawing/2014/main" id="{990C6412-686A-4239-B6B9-F28310662C9E}"/>
               </a:ext>
             </a:extLst>
           </p:cNvPr>
@@ -5347,7 +5379,7 @@
             <a:pPr algn="l">
               <a:defRPr sz="2550" b="1">
                 <a:solidFill>
-                  <a:srgbClr val="092454"/>
+                  <a:srgbClr val="1C2E4A"/>
                 </a:solidFill>
                 <a:latin typeface="Helvetica Neue"/>
                 <a:ea typeface="Helvetica Neue"/>
@@ -5357,7 +5389,7 @@
             <a:r>
               <a:rPr sz="2550" b="1">
                 <a:solidFill>
-                  <a:srgbClr val="092454"/>
+                  <a:srgbClr val="1C2E4A"/>
                 </a:solidFill>
                 <a:latin typeface="Helvetica Neue"/>
                 <a:ea typeface="Helvetica Neue"/>
@@ -5373,7 +5405,7 @@
           <p:cNvPr id="6" name="">
             <a:extLst xmlns:a="http://schemas.openxmlformats.org/drawingml/2006/main">
               <a:ext uri="{FF2B5EF4-FFF2-40B4-BE49-F238E27FC236}">
-                <a16:creationId xmlns:a16="http://schemas.microsoft.com/office/drawing/2014/main" id="{3F0936F7-C854-4562-97DF-63420CE46248}"/>
+                <a16:creationId xmlns:a16="http://schemas.microsoft.com/office/drawing/2014/main" id="{3BC6077E-874C-463E-8836-98017C4B4B52}"/>
               </a:ext>
             </a:extLst>
           </p:cNvPr>
@@ -5393,7 +5425,7 @@
             </a:avLst>
           </a:prstGeom>
           <a:solidFill xmlns:a="http://schemas.openxmlformats.org/drawingml/2006/main">
-            <a:srgbClr val="EEF7FF"/>
+            <a:srgbClr val="D1CFC9"/>
           </a:solidFill>
           <a:ln xmlns:a="http://schemas.openxmlformats.org/drawingml/2006/main" w="0">
             <a:noFill/>
@@ -5405,7 +5437,7 @@
           <p:cNvPr id="7" name="">
             <a:extLst xmlns:a="http://schemas.openxmlformats.org/drawingml/2006/main">
               <a:ext uri="{FF2B5EF4-FFF2-40B4-BE49-F238E27FC236}">
-                <a16:creationId xmlns:a16="http://schemas.microsoft.com/office/drawing/2014/main" id="{C1C99D55-D17A-44BA-9FDE-74D3D6A648F9}"/>
+                <a16:creationId xmlns:a16="http://schemas.microsoft.com/office/drawing/2014/main" id="{DBD79CF8-2B88-4584-AEDF-549E62142AE7}"/>
               </a:ext>
             </a:extLst>
           </p:cNvPr>
@@ -5436,7 +5468,7 @@
             <a:pPr algn="ctr">
               <a:defRPr sz="1350" b="1">
                 <a:solidFill>
-                  <a:srgbClr val="2563EB"/>
+                  <a:srgbClr val="52677D"/>
                 </a:solidFill>
                 <a:latin typeface="Helvetica Neue"/>
                 <a:ea typeface="Helvetica Neue"/>
@@ -5446,7 +5478,7 @@
             <a:r>
               <a:rPr sz="1350" b="1">
                 <a:solidFill>
-                  <a:srgbClr val="2563EB"/>
+                  <a:srgbClr val="52677D"/>
                 </a:solidFill>
                 <a:latin typeface="Helvetica Neue"/>
                 <a:ea typeface="Helvetica Neue"/>
@@ -5462,7 +5494,7 @@
           <p:cNvPr id="8" name="">
             <a:extLst xmlns:a="http://schemas.openxmlformats.org/drawingml/2006/main">
               <a:ext uri="{FF2B5EF4-FFF2-40B4-BE49-F238E27FC236}">
-                <a16:creationId xmlns:a16="http://schemas.microsoft.com/office/drawing/2014/main" id="{8E7D5E2F-888C-4F8A-B1C2-CC88CA8A95E4}"/>
+                <a16:creationId xmlns:a16="http://schemas.microsoft.com/office/drawing/2014/main" id="{D68D7939-D66F-4A63-832A-DE0B27CF3C8C}"/>
               </a:ext>
             </a:extLst>
           </p:cNvPr>
@@ -5493,7 +5525,7 @@
             <a:pPr algn="l">
               <a:defRPr sz="1575" b="0">
                 <a:solidFill>
-                  <a:srgbClr val="10213D"/>
+                  <a:srgbClr val="0F1A2B"/>
                 </a:solidFill>
                 <a:latin typeface="Helvetica Neue"/>
                 <a:ea typeface="Helvetica Neue"/>
@@ -5503,7 +5535,7 @@
             <a:r>
               <a:rPr sz="1575" b="0">
                 <a:solidFill>
-                  <a:srgbClr val="10213D"/>
+                  <a:srgbClr val="0F1A2B"/>
                 </a:solidFill>
                 <a:latin typeface="Helvetica Neue"/>
                 <a:ea typeface="Helvetica Neue"/>
@@ -5519,7 +5551,7 @@
           <p:cNvPr id="9" name="">
             <a:extLst xmlns:a="http://schemas.openxmlformats.org/drawingml/2006/main">
               <a:ext uri="{FF2B5EF4-FFF2-40B4-BE49-F238E27FC236}">
-                <a16:creationId xmlns:a16="http://schemas.microsoft.com/office/drawing/2014/main" id="{53E9CFF7-36AE-47AD-9F69-4B430C71678A}"/>
+                <a16:creationId xmlns:a16="http://schemas.microsoft.com/office/drawing/2014/main" id="{2CE9394D-5743-46EC-AB4F-574A88996FF3}"/>
               </a:ext>
             </a:extLst>
           </p:cNvPr>
@@ -5539,7 +5571,7 @@
             </a:avLst>
           </a:prstGeom>
           <a:solidFill xmlns:a="http://schemas.openxmlformats.org/drawingml/2006/main">
-            <a:srgbClr val="EEF7FF"/>
+            <a:srgbClr val="D1CFC9"/>
           </a:solidFill>
           <a:ln xmlns:a="http://schemas.openxmlformats.org/drawingml/2006/main" w="0">
             <a:noFill/>
@@ -5551,7 +5583,7 @@
           <p:cNvPr id="10" name="">
             <a:extLst xmlns:a="http://schemas.openxmlformats.org/drawingml/2006/main">
               <a:ext uri="{FF2B5EF4-FFF2-40B4-BE49-F238E27FC236}">
-                <a16:creationId xmlns:a16="http://schemas.microsoft.com/office/drawing/2014/main" id="{BA29DA4F-6CB5-4DE4-9683-A55431576EBD}"/>
+                <a16:creationId xmlns:a16="http://schemas.microsoft.com/office/drawing/2014/main" id="{A0BC4313-A9D1-414D-8DE9-783D82A0C981}"/>
               </a:ext>
             </a:extLst>
           </p:cNvPr>
@@ -5582,7 +5614,7 @@
             <a:pPr algn="ctr">
               <a:defRPr sz="1350" b="1">
                 <a:solidFill>
-                  <a:srgbClr val="2563EB"/>
+                  <a:srgbClr val="52677D"/>
                 </a:solidFill>
                 <a:latin typeface="Helvetica Neue"/>
                 <a:ea typeface="Helvetica Neue"/>
@@ -5592,7 +5624,7 @@
             <a:r>
               <a:rPr sz="1350" b="1">
                 <a:solidFill>
-                  <a:srgbClr val="2563EB"/>
+                  <a:srgbClr val="52677D"/>
                 </a:solidFill>
                 <a:latin typeface="Helvetica Neue"/>
                 <a:ea typeface="Helvetica Neue"/>
@@ -5608,7 +5640,7 @@
           <p:cNvPr id="11" name="">
             <a:extLst xmlns:a="http://schemas.openxmlformats.org/drawingml/2006/main">
               <a:ext uri="{FF2B5EF4-FFF2-40B4-BE49-F238E27FC236}">
-                <a16:creationId xmlns:a16="http://schemas.microsoft.com/office/drawing/2014/main" id="{1A445BD5-0409-4818-8CD0-9A30155971C6}"/>
+                <a16:creationId xmlns:a16="http://schemas.microsoft.com/office/drawing/2014/main" id="{F2541A04-4881-4292-86A7-051274B5D417}"/>
               </a:ext>
             </a:extLst>
           </p:cNvPr>
@@ -5639,7 +5671,7 @@
             <a:pPr algn="l">
               <a:defRPr sz="1575" b="0">
                 <a:solidFill>
-                  <a:srgbClr val="10213D"/>
+                  <a:srgbClr val="0F1A2B"/>
                 </a:solidFill>
                 <a:latin typeface="Helvetica Neue"/>
                 <a:ea typeface="Helvetica Neue"/>
@@ -5649,7 +5681,7 @@
             <a:r>
               <a:rPr sz="1575" b="0">
                 <a:solidFill>
-                  <a:srgbClr val="10213D"/>
+                  <a:srgbClr val="0F1A2B"/>
                 </a:solidFill>
                 <a:latin typeface="Helvetica Neue"/>
                 <a:ea typeface="Helvetica Neue"/>
@@ -5665,7 +5697,7 @@
           <p:cNvPr id="12" name="">
             <a:extLst xmlns:a="http://schemas.openxmlformats.org/drawingml/2006/main">
               <a:ext uri="{FF2B5EF4-FFF2-40B4-BE49-F238E27FC236}">
-                <a16:creationId xmlns:a16="http://schemas.microsoft.com/office/drawing/2014/main" id="{ECFB2D16-DD26-4BB6-B124-77B223462DD5}"/>
+                <a16:creationId xmlns:a16="http://schemas.microsoft.com/office/drawing/2014/main" id="{799A7178-1F45-431B-A298-5BF04DE1ACF3}"/>
               </a:ext>
             </a:extLst>
           </p:cNvPr>
@@ -5685,7 +5717,7 @@
             </a:avLst>
           </a:prstGeom>
           <a:solidFill xmlns:a="http://schemas.openxmlformats.org/drawingml/2006/main">
-            <a:srgbClr val="EEF7FF"/>
+            <a:srgbClr val="D1CFC9"/>
           </a:solidFill>
           <a:ln xmlns:a="http://schemas.openxmlformats.org/drawingml/2006/main" w="0">
             <a:noFill/>
@@ -5697,7 +5729,7 @@
           <p:cNvPr id="13" name="">
             <a:extLst xmlns:a="http://schemas.openxmlformats.org/drawingml/2006/main">
               <a:ext uri="{FF2B5EF4-FFF2-40B4-BE49-F238E27FC236}">
-                <a16:creationId xmlns:a16="http://schemas.microsoft.com/office/drawing/2014/main" id="{F27000FC-96D8-4721-93D8-46541DAECC77}"/>
+                <a16:creationId xmlns:a16="http://schemas.microsoft.com/office/drawing/2014/main" id="{91A631D3-E9EE-4047-8ECE-53CDA71F1AD4}"/>
               </a:ext>
             </a:extLst>
           </p:cNvPr>
@@ -5728,7 +5760,7 @@
             <a:pPr algn="ctr">
               <a:defRPr sz="1350" b="1">
                 <a:solidFill>
-                  <a:srgbClr val="2563EB"/>
+                  <a:srgbClr val="52677D"/>
                 </a:solidFill>
                 <a:latin typeface="Helvetica Neue"/>
                 <a:ea typeface="Helvetica Neue"/>
@@ -5738,7 +5770,7 @@
             <a:r>
               <a:rPr sz="1350" b="1">
                 <a:solidFill>
-                  <a:srgbClr val="2563EB"/>
+                  <a:srgbClr val="52677D"/>
                 </a:solidFill>
                 <a:latin typeface="Helvetica Neue"/>
                 <a:ea typeface="Helvetica Neue"/>
@@ -5754,7 +5786,7 @@
           <p:cNvPr id="14" name="">
             <a:extLst xmlns:a="http://schemas.openxmlformats.org/drawingml/2006/main">
               <a:ext uri="{FF2B5EF4-FFF2-40B4-BE49-F238E27FC236}">
-                <a16:creationId xmlns:a16="http://schemas.microsoft.com/office/drawing/2014/main" id="{92E7D5CC-B517-4709-A189-448AE79CA7B5}"/>
+                <a16:creationId xmlns:a16="http://schemas.microsoft.com/office/drawing/2014/main" id="{2A36AFDB-971E-447C-8A29-60256392A44F}"/>
               </a:ext>
             </a:extLst>
           </p:cNvPr>
@@ -5785,7 +5817,7 @@
             <a:pPr algn="l">
               <a:defRPr sz="1575" b="0">
                 <a:solidFill>
-                  <a:srgbClr val="10213D"/>
+                  <a:srgbClr val="0F1A2B"/>
                 </a:solidFill>
                 <a:latin typeface="Helvetica Neue"/>
                 <a:ea typeface="Helvetica Neue"/>
@@ -5795,7 +5827,7 @@
             <a:r>
               <a:rPr sz="1575" b="0">
                 <a:solidFill>
-                  <a:srgbClr val="10213D"/>
+                  <a:srgbClr val="0F1A2B"/>
                 </a:solidFill>
                 <a:latin typeface="Helvetica Neue"/>
                 <a:ea typeface="Helvetica Neue"/>
@@ -5811,7 +5843,7 @@
           <p:cNvPr id="15" name="">
             <a:extLst xmlns:a="http://schemas.openxmlformats.org/drawingml/2006/main">
               <a:ext uri="{FF2B5EF4-FFF2-40B4-BE49-F238E27FC236}">
-                <a16:creationId xmlns:a16="http://schemas.microsoft.com/office/drawing/2014/main" id="{3BC8B6CE-39CD-45AC-A41F-26AA8A78DFC5}"/>
+                <a16:creationId xmlns:a16="http://schemas.microsoft.com/office/drawing/2014/main" id="{F55EFB5A-2BFF-4A00-950A-14E4008565F4}"/>
               </a:ext>
             </a:extLst>
           </p:cNvPr>
@@ -5831,7 +5863,7 @@
             </a:avLst>
           </a:prstGeom>
           <a:solidFill xmlns:a="http://schemas.openxmlformats.org/drawingml/2006/main">
-            <a:srgbClr val="EEF7FF"/>
+            <a:srgbClr val="D1CFC9"/>
           </a:solidFill>
           <a:ln xmlns:a="http://schemas.openxmlformats.org/drawingml/2006/main" w="0">
             <a:noFill/>
@@ -5843,7 +5875,7 @@
           <p:cNvPr id="16" name="">
             <a:extLst xmlns:a="http://schemas.openxmlformats.org/drawingml/2006/main">
               <a:ext uri="{FF2B5EF4-FFF2-40B4-BE49-F238E27FC236}">
-                <a16:creationId xmlns:a16="http://schemas.microsoft.com/office/drawing/2014/main" id="{6C534249-42C4-43EA-A3A4-CEFD32DEC62C}"/>
+                <a16:creationId xmlns:a16="http://schemas.microsoft.com/office/drawing/2014/main" id="{C86AD8A7-9E92-46BF-BB3C-415B8685D46A}"/>
               </a:ext>
             </a:extLst>
           </p:cNvPr>
@@ -5874,7 +5906,7 @@
             <a:pPr algn="l">
               <a:defRPr sz="1125" b="0">
                 <a:solidFill>
-                  <a:srgbClr val="092454"/>
+                  <a:srgbClr val="1C2E4A"/>
                 </a:solidFill>
                 <a:latin typeface="Helvetica Neue"/>
                 <a:ea typeface="Helvetica Neue"/>
@@ -5884,7 +5916,7 @@
             <a:r>
               <a:rPr sz="1125" b="0">
                 <a:solidFill>
-                  <a:srgbClr val="092454"/>
+                  <a:srgbClr val="1C2E4A"/>
                 </a:solidFill>
                 <a:latin typeface="Helvetica Neue"/>
                 <a:ea typeface="Helvetica Neue"/>
@@ -5900,7 +5932,7 @@
           <p:cNvPr id="17" name="">
             <a:extLst xmlns:a="http://schemas.openxmlformats.org/drawingml/2006/main">
               <a:ext uri="{FF2B5EF4-FFF2-40B4-BE49-F238E27FC236}">
-                <a16:creationId xmlns:a16="http://schemas.microsoft.com/office/drawing/2014/main" id="{DAEB5E9F-710B-40DA-8071-B8E68147798E}"/>
+                <a16:creationId xmlns:a16="http://schemas.microsoft.com/office/drawing/2014/main" id="{9700C03F-0BBE-423D-8D7B-FE7E6BBF9678}"/>
               </a:ext>
             </a:extLst>
           </p:cNvPr>
@@ -5920,7 +5952,7 @@
             </a:avLst>
           </a:prstGeom>
           <a:solidFill xmlns:a="http://schemas.openxmlformats.org/drawingml/2006/main">
-            <a:srgbClr val="092454"/>
+            <a:srgbClr val="1C2E4A"/>
           </a:solidFill>
           <a:ln xmlns:a="http://schemas.openxmlformats.org/drawingml/2006/main" w="0">
             <a:noFill/>
@@ -5932,7 +5964,7 @@
           <p:cNvPr id="18" name="">
             <a:extLst xmlns:a="http://schemas.openxmlformats.org/drawingml/2006/main">
               <a:ext uri="{FF2B5EF4-FFF2-40B4-BE49-F238E27FC236}">
-                <a16:creationId xmlns:a16="http://schemas.microsoft.com/office/drawing/2014/main" id="{EB76CDAA-8B17-4078-B859-124F2E448D17}"/>
+                <a16:creationId xmlns:a16="http://schemas.microsoft.com/office/drawing/2014/main" id="{8932BE78-AF3C-447E-BDDE-CDFBB56EAB69}"/>
               </a:ext>
             </a:extLst>
           </p:cNvPr>
@@ -5963,7 +5995,7 @@
             <a:pPr algn="l">
               <a:defRPr sz="1050" b="1">
                 <a:solidFill>
-                  <a:srgbClr val="FFD43B"/>
+                  <a:srgbClr val="D1CFC9"/>
                 </a:solidFill>
                 <a:latin typeface="Helvetica Neue"/>
                 <a:ea typeface="Helvetica Neue"/>
@@ -5973,7 +6005,7 @@
             <a:r>
               <a:rPr sz="1050" b="1">
                 <a:solidFill>
-                  <a:srgbClr val="FFD43B"/>
+                  <a:srgbClr val="D1CFC9"/>
                 </a:solidFill>
                 <a:latin typeface="Helvetica Neue"/>
                 <a:ea typeface="Helvetica Neue"/>
@@ -5989,7 +6021,7 @@
           <p:cNvPr id="19" name="">
             <a:extLst xmlns:a="http://schemas.openxmlformats.org/drawingml/2006/main">
               <a:ext uri="{FF2B5EF4-FFF2-40B4-BE49-F238E27FC236}">
-                <a16:creationId xmlns:a16="http://schemas.microsoft.com/office/drawing/2014/main" id="{6BEBAFA3-48B7-4390-A180-B85F659632FE}"/>
+                <a16:creationId xmlns:a16="http://schemas.microsoft.com/office/drawing/2014/main" id="{BA595243-0373-42F6-B917-5F6A0DC3F037}"/>
               </a:ext>
             </a:extLst>
           </p:cNvPr>
@@ -6046,7 +6078,7 @@
           <p:cNvPr id="20" name="">
             <a:extLst xmlns:a="http://schemas.openxmlformats.org/drawingml/2006/main">
               <a:ext uri="{FF2B5EF4-FFF2-40B4-BE49-F238E27FC236}">
-                <a16:creationId xmlns:a16="http://schemas.microsoft.com/office/drawing/2014/main" id="{45162F2E-8A5A-41C6-937B-6489218085E7}"/>
+                <a16:creationId xmlns:a16="http://schemas.microsoft.com/office/drawing/2014/main" id="{3C5F50BB-1B11-4CFA-A588-626AFBED172D}"/>
               </a:ext>
             </a:extLst>
           </p:cNvPr>
@@ -6077,7 +6109,7 @@
             <a:pPr algn="l">
               <a:defRPr sz="1125" b="0">
                 <a:solidFill>
-                  <a:srgbClr val="BFE6FF"/>
+                  <a:srgbClr val="BDC4D4"/>
                 </a:solidFill>
                 <a:latin typeface="Helvetica Neue"/>
                 <a:ea typeface="Helvetica Neue"/>
@@ -6087,7 +6119,7 @@
             <a:r>
               <a:rPr sz="1125" b="0">
                 <a:solidFill>
-                  <a:srgbClr val="BFE6FF"/>
+                  <a:srgbClr val="BDC4D4"/>
                 </a:solidFill>
                 <a:latin typeface="Helvetica Neue"/>
                 <a:ea typeface="Helvetica Neue"/>
@@ -6103,7 +6135,7 @@
           <p:cNvPr id="21" name="">
             <a:extLst xmlns:a="http://schemas.openxmlformats.org/drawingml/2006/main">
               <a:ext uri="{FF2B5EF4-FFF2-40B4-BE49-F238E27FC236}">
-                <a16:creationId xmlns:a16="http://schemas.microsoft.com/office/drawing/2014/main" id="{F2FF6B2B-60B0-4687-AA2B-39EC02A655BB}"/>
+                <a16:creationId xmlns:a16="http://schemas.microsoft.com/office/drawing/2014/main" id="{14B7DE14-17C3-4F8D-B31E-925F8A519FDE}"/>
               </a:ext>
             </a:extLst>
           </p:cNvPr>
@@ -6121,7 +6153,7 @@
             <a:avLst/>
           </a:prstGeom>
           <a:solidFill xmlns:a="http://schemas.openxmlformats.org/drawingml/2006/main">
-            <a:srgbClr val="D8E5F2"/>
+            <a:srgbClr val="BDC4D4"/>
           </a:solidFill>
           <a:ln xmlns:a="http://schemas.openxmlformats.org/drawingml/2006/main" w="0">
             <a:noFill/>
@@ -6133,7 +6165,7 @@
           <p:cNvPr id="22" name="">
             <a:extLst xmlns:a="http://schemas.openxmlformats.org/drawingml/2006/main">
               <a:ext uri="{FF2B5EF4-FFF2-40B4-BE49-F238E27FC236}">
-                <a16:creationId xmlns:a16="http://schemas.microsoft.com/office/drawing/2014/main" id="{EB6228EE-9D32-49C5-A575-ECA389778F71}"/>
+                <a16:creationId xmlns:a16="http://schemas.microsoft.com/office/drawing/2014/main" id="{03C73C93-3E08-484C-9E5D-FFDD4A6A490E}"/>
               </a:ext>
             </a:extLst>
           </p:cNvPr>
@@ -6164,7 +6196,7 @@
             <a:pPr algn="l">
               <a:defRPr sz="750" b="0">
                 <a:solidFill>
-                  <a:srgbClr val="61718A"/>
+                  <a:srgbClr val="52677D"/>
                 </a:solidFill>
                 <a:latin typeface="Helvetica Neue"/>
                 <a:ea typeface="Helvetica Neue"/>
@@ -6174,7 +6206,7 @@
             <a:r>
               <a:rPr sz="750" b="0">
                 <a:solidFill>
-                  <a:srgbClr val="61718A"/>
+                  <a:srgbClr val="52677D"/>
                 </a:solidFill>
                 <a:latin typeface="Helvetica Neue"/>
                 <a:ea typeface="Helvetica Neue"/>
@@ -6190,7 +6222,7 @@
           <p:cNvPr id="23" name="">
             <a:extLst xmlns:a="http://schemas.openxmlformats.org/drawingml/2006/main">
               <a:ext uri="{FF2B5EF4-FFF2-40B4-BE49-F238E27FC236}">
-                <a16:creationId xmlns:a16="http://schemas.microsoft.com/office/drawing/2014/main" id="{8DF0C735-7363-445A-8AE8-9D2FEE587FB7}"/>
+                <a16:creationId xmlns:a16="http://schemas.microsoft.com/office/drawing/2014/main" id="{D4BCA278-C87A-4807-8425-167A0C429577}"/>
               </a:ext>
             </a:extLst>
           </p:cNvPr>
@@ -6221,7 +6253,7 @@
             <a:pPr algn="r">
               <a:defRPr sz="825" b="1">
                 <a:solidFill>
-                  <a:srgbClr val="2563EB"/>
+                  <a:srgbClr val="52677D"/>
                 </a:solidFill>
                 <a:latin typeface="Helvetica Neue"/>
                 <a:ea typeface="Helvetica Neue"/>
@@ -6231,7 +6263,7 @@
             <a:r>
               <a:rPr sz="825" b="1">
                 <a:solidFill>
-                  <a:srgbClr val="2563EB"/>
+                  <a:srgbClr val="52677D"/>
                 </a:solidFill>
                 <a:latin typeface="Helvetica Neue"/>
                 <a:ea typeface="Helvetica Neue"/>
@@ -6245,7 +6277,7 @@
     </p:spTree>
     <p:extLst>
       <p:ext uri="{BB962C8B-B14F-4D97-AF65-F5344CB8AC3E}">
-        <p14:creationId xmlns:p14="http://schemas.microsoft.com/office/powerpoint/2010/main" val="1379963118"/>
+        <p14:creationId xmlns:p14="http://schemas.microsoft.com/office/powerpoint/2010/main" val="1763239857"/>
       </p:ext>
     </p:extLst>
   </p:cSld>
@@ -6276,7 +6308,7 @@
           <p:cNvPr id="29" name="">
             <a:extLst xmlns:a="http://schemas.openxmlformats.org/drawingml/2006/main">
               <a:ext uri="{FF2B5EF4-FFF2-40B4-BE49-F238E27FC236}">
-                <a16:creationId xmlns:a16="http://schemas.microsoft.com/office/drawing/2014/main" id="{ED4E17C8-DB2C-45B1-BD53-7DC283C0E2E4}"/>
+                <a16:creationId xmlns:a16="http://schemas.microsoft.com/office/drawing/2014/main" id="{0B8EA802-82CD-4E58-A1A2-FAE19C23FB43}"/>
               </a:ext>
             </a:extLst>
           </p:cNvPr>
@@ -6307,7 +6339,7 @@
             <a:pPr algn="l">
               <a:defRPr sz="1125" b="1">
                 <a:solidFill>
-                  <a:srgbClr val="2563EB"/>
+                  <a:srgbClr val="52677D"/>
                 </a:solidFill>
                 <a:latin typeface="Helvetica Neue"/>
                 <a:ea typeface="Helvetica Neue"/>
@@ -6317,7 +6349,7 @@
             <a:r>
               <a:rPr sz="1125" b="1">
                 <a:solidFill>
-                  <a:srgbClr val="2563EB"/>
+                  <a:srgbClr val="52677D"/>
                 </a:solidFill>
                 <a:latin typeface="Helvetica Neue"/>
                 <a:ea typeface="Helvetica Neue"/>
@@ -6333,7 +6365,7 @@
           <p:cNvPr id="2" name="">
             <a:extLst xmlns:a="http://schemas.openxmlformats.org/drawingml/2006/main">
               <a:ext uri="{FF2B5EF4-FFF2-40B4-BE49-F238E27FC236}">
-                <a16:creationId xmlns:a16="http://schemas.microsoft.com/office/drawing/2014/main" id="{5E06B820-415F-4EF9-91BC-77A2B407CA6C}"/>
+                <a16:creationId xmlns:a16="http://schemas.microsoft.com/office/drawing/2014/main" id="{23840CB2-BF5F-485F-BCC9-10E1EF52B411}"/>
               </a:ext>
             </a:extLst>
           </p:cNvPr>
@@ -6364,7 +6396,7 @@
             <a:pPr algn="l">
               <a:defRPr sz="2850" b="1">
                 <a:solidFill>
-                  <a:srgbClr val="092454"/>
+                  <a:srgbClr val="1C2E4A"/>
                 </a:solidFill>
                 <a:latin typeface="Helvetica Neue"/>
                 <a:ea typeface="Helvetica Neue"/>
@@ -6374,7 +6406,7 @@
             <a:r>
               <a:rPr sz="2850" b="1">
                 <a:solidFill>
-                  <a:srgbClr val="092454"/>
+                  <a:srgbClr val="1C2E4A"/>
                 </a:solidFill>
                 <a:latin typeface="Helvetica Neue"/>
                 <a:ea typeface="Helvetica Neue"/>
@@ -6390,7 +6422,7 @@
           <p:cNvPr id="3" name="">
             <a:extLst xmlns:a="http://schemas.openxmlformats.org/drawingml/2006/main">
               <a:ext uri="{FF2B5EF4-FFF2-40B4-BE49-F238E27FC236}">
-                <a16:creationId xmlns:a16="http://schemas.microsoft.com/office/drawing/2014/main" id="{8650F94C-9880-47C9-92EC-18D025C097A5}"/>
+                <a16:creationId xmlns:a16="http://schemas.microsoft.com/office/drawing/2014/main" id="{8F71E887-CADC-418E-B9D0-D8652575EBF7}"/>
               </a:ext>
             </a:extLst>
           </p:cNvPr>
@@ -6421,7 +6453,7 @@
             <a:pPr algn="l">
               <a:defRPr sz="1425" b="0">
                 <a:solidFill>
-                  <a:srgbClr val="61718A"/>
+                  <a:srgbClr val="52677D"/>
                 </a:solidFill>
                 <a:latin typeface="Helvetica Neue"/>
                 <a:ea typeface="Helvetica Neue"/>
@@ -6431,7 +6463,7 @@
             <a:r>
               <a:rPr sz="1425" b="0">
                 <a:solidFill>
-                  <a:srgbClr val="61718A"/>
+                  <a:srgbClr val="52677D"/>
                 </a:solidFill>
                 <a:latin typeface="Helvetica Neue"/>
                 <a:ea typeface="Helvetica Neue"/>
@@ -6447,7 +6479,7 @@
           <p:cNvPr id="4" name="">
             <a:extLst xmlns:a="http://schemas.openxmlformats.org/drawingml/2006/main">
               <a:ext uri="{FF2B5EF4-FFF2-40B4-BE49-F238E27FC236}">
-                <a16:creationId xmlns:a16="http://schemas.microsoft.com/office/drawing/2014/main" id="{0D5E281B-6429-4A27-AE30-45E538F51B03}"/>
+                <a16:creationId xmlns:a16="http://schemas.microsoft.com/office/drawing/2014/main" id="{38E105A6-8BBD-4768-A389-519B17BFBBFB}"/>
               </a:ext>
             </a:extLst>
           </p:cNvPr>
@@ -6471,7 +6503,7 @@
           </a:solidFill>
           <a:ln xmlns:a="http://schemas.openxmlformats.org/drawingml/2006/main" w="28575">
             <a:solidFill>
-              <a:srgbClr val="2563EB"/>
+              <a:srgbClr val="52677D"/>
             </a:solidFill>
           </a:ln>
         </p:spPr>
@@ -6481,7 +6513,7 @@
           <p:cNvPr id="5" name="">
             <a:extLst xmlns:a="http://schemas.openxmlformats.org/drawingml/2006/main">
               <a:ext uri="{FF2B5EF4-FFF2-40B4-BE49-F238E27FC236}">
-                <a16:creationId xmlns:a16="http://schemas.microsoft.com/office/drawing/2014/main" id="{A6D4835A-A3E9-439B-91CC-ED40C473D9C8}"/>
+                <a16:creationId xmlns:a16="http://schemas.microsoft.com/office/drawing/2014/main" id="{57DF5F3D-97C8-45B1-865C-C60BCE2CFC02}"/>
               </a:ext>
             </a:extLst>
           </p:cNvPr>
@@ -6501,7 +6533,7 @@
             </a:avLst>
           </a:prstGeom>
           <a:solidFill xmlns:a="http://schemas.openxmlformats.org/drawingml/2006/main">
-            <a:srgbClr val="2563EB"/>
+            <a:srgbClr val="52677D"/>
           </a:solidFill>
           <a:ln xmlns:a="http://schemas.openxmlformats.org/drawingml/2006/main" w="0">
             <a:noFill/>
@@ -6513,7 +6545,7 @@
           <p:cNvPr id="6" name="">
             <a:extLst xmlns:a="http://schemas.openxmlformats.org/drawingml/2006/main">
               <a:ext uri="{FF2B5EF4-FFF2-40B4-BE49-F238E27FC236}">
-                <a16:creationId xmlns:a16="http://schemas.microsoft.com/office/drawing/2014/main" id="{F23FB398-D8AD-4411-9E60-E4149249870C}"/>
+                <a16:creationId xmlns:a16="http://schemas.microsoft.com/office/drawing/2014/main" id="{AACA2450-310B-4783-A025-C7F158989961}"/>
               </a:ext>
             </a:extLst>
           </p:cNvPr>
@@ -6570,7 +6602,7 @@
           <p:cNvPr id="7" name="">
             <a:extLst xmlns:a="http://schemas.openxmlformats.org/drawingml/2006/main">
               <a:ext uri="{FF2B5EF4-FFF2-40B4-BE49-F238E27FC236}">
-                <a16:creationId xmlns:a16="http://schemas.microsoft.com/office/drawing/2014/main" id="{923175F8-56A5-4F71-A24E-20B4DEBE1477}"/>
+                <a16:creationId xmlns:a16="http://schemas.microsoft.com/office/drawing/2014/main" id="{2019BA80-F95A-4431-BE96-C17C864B5867}"/>
               </a:ext>
             </a:extLst>
           </p:cNvPr>
@@ -6588,7 +6620,7 @@
             <a:avLst/>
           </a:prstGeom>
           <a:solidFill xmlns:a="http://schemas.openxmlformats.org/drawingml/2006/main">
-            <a:srgbClr val="2563EB"/>
+            <a:srgbClr val="52677D"/>
           </a:solidFill>
           <a:ln xmlns:a="http://schemas.openxmlformats.org/drawingml/2006/main" w="0">
             <a:noFill/>
@@ -6600,7 +6632,7 @@
           <p:cNvPr id="8" name="">
             <a:extLst xmlns:a="http://schemas.openxmlformats.org/drawingml/2006/main">
               <a:ext uri="{FF2B5EF4-FFF2-40B4-BE49-F238E27FC236}">
-                <a16:creationId xmlns:a16="http://schemas.microsoft.com/office/drawing/2014/main" id="{0D2D3479-156E-45DD-A7D4-18C2E2DB1A0D}"/>
+                <a16:creationId xmlns:a16="http://schemas.microsoft.com/office/drawing/2014/main" id="{160322BF-E5DD-4C44-A458-6337E93B1BBE}"/>
               </a:ext>
             </a:extLst>
           </p:cNvPr>
@@ -6631,7 +6663,7 @@
             <a:pPr algn="l">
               <a:defRPr sz="1425" b="0">
                 <a:solidFill>
-                  <a:srgbClr val="10213D"/>
+                  <a:srgbClr val="0F1A2B"/>
                 </a:solidFill>
                 <a:latin typeface="Helvetica Neue"/>
                 <a:ea typeface="Helvetica Neue"/>
@@ -6641,7 +6673,7 @@
             <a:r>
               <a:rPr sz="1425" b="0">
                 <a:solidFill>
-                  <a:srgbClr val="10213D"/>
+                  <a:srgbClr val="0F1A2B"/>
                 </a:solidFill>
                 <a:latin typeface="Helvetica Neue"/>
                 <a:ea typeface="Helvetica Neue"/>
@@ -6657,7 +6689,7 @@
           <p:cNvPr id="9" name="">
             <a:extLst xmlns:a="http://schemas.openxmlformats.org/drawingml/2006/main">
               <a:ext uri="{FF2B5EF4-FFF2-40B4-BE49-F238E27FC236}">
-                <a16:creationId xmlns:a16="http://schemas.microsoft.com/office/drawing/2014/main" id="{83B3CB72-D6FC-4BCC-9DC6-4E2F8EBBFFC5}"/>
+                <a16:creationId xmlns:a16="http://schemas.microsoft.com/office/drawing/2014/main" id="{35E48CAB-603E-47A5-AD3C-258DD256BE13}"/>
               </a:ext>
             </a:extLst>
           </p:cNvPr>
@@ -6675,7 +6707,7 @@
             <a:avLst/>
           </a:prstGeom>
           <a:solidFill xmlns:a="http://schemas.openxmlformats.org/drawingml/2006/main">
-            <a:srgbClr val="2563EB"/>
+            <a:srgbClr val="52677D"/>
           </a:solidFill>
           <a:ln xmlns:a="http://schemas.openxmlformats.org/drawingml/2006/main" w="0">
             <a:noFill/>
@@ -6687,7 +6719,7 @@
           <p:cNvPr id="10" name="">
             <a:extLst xmlns:a="http://schemas.openxmlformats.org/drawingml/2006/main">
               <a:ext uri="{FF2B5EF4-FFF2-40B4-BE49-F238E27FC236}">
-                <a16:creationId xmlns:a16="http://schemas.microsoft.com/office/drawing/2014/main" id="{A633B5B6-DF1A-409C-AC3C-BBAF98A9C30F}"/>
+                <a16:creationId xmlns:a16="http://schemas.microsoft.com/office/drawing/2014/main" id="{61DBCF62-B384-4C25-A3FD-FA0B07FF7D25}"/>
               </a:ext>
             </a:extLst>
           </p:cNvPr>
@@ -6718,7 +6750,7 @@
             <a:pPr algn="l">
               <a:defRPr sz="1425" b="0">
                 <a:solidFill>
-                  <a:srgbClr val="10213D"/>
+                  <a:srgbClr val="0F1A2B"/>
                 </a:solidFill>
                 <a:latin typeface="Helvetica Neue"/>
                 <a:ea typeface="Helvetica Neue"/>
@@ -6728,7 +6760,7 @@
             <a:r>
               <a:rPr sz="1425" b="0">
                 <a:solidFill>
-                  <a:srgbClr val="10213D"/>
+                  <a:srgbClr val="0F1A2B"/>
                 </a:solidFill>
                 <a:latin typeface="Helvetica Neue"/>
                 <a:ea typeface="Helvetica Neue"/>
@@ -6744,7 +6776,7 @@
           <p:cNvPr id="11" name="">
             <a:extLst xmlns:a="http://schemas.openxmlformats.org/drawingml/2006/main">
               <a:ext uri="{FF2B5EF4-FFF2-40B4-BE49-F238E27FC236}">
-                <a16:creationId xmlns:a16="http://schemas.microsoft.com/office/drawing/2014/main" id="{03B6FDCA-66F3-427A-9C63-7F7F55786BB1}"/>
+                <a16:creationId xmlns:a16="http://schemas.microsoft.com/office/drawing/2014/main" id="{832B2C34-D5BD-428E-BCA9-F6E4A858DBA9}"/>
               </a:ext>
             </a:extLst>
           </p:cNvPr>
@@ -6762,7 +6794,7 @@
             <a:avLst/>
           </a:prstGeom>
           <a:solidFill xmlns:a="http://schemas.openxmlformats.org/drawingml/2006/main">
-            <a:srgbClr val="2563EB"/>
+            <a:srgbClr val="52677D"/>
           </a:solidFill>
           <a:ln xmlns:a="http://schemas.openxmlformats.org/drawingml/2006/main" w="0">
             <a:noFill/>
@@ -6774,7 +6806,7 @@
           <p:cNvPr id="12" name="">
             <a:extLst xmlns:a="http://schemas.openxmlformats.org/drawingml/2006/main">
               <a:ext uri="{FF2B5EF4-FFF2-40B4-BE49-F238E27FC236}">
-                <a16:creationId xmlns:a16="http://schemas.microsoft.com/office/drawing/2014/main" id="{DCDD4A96-35D1-4ED2-BAC3-D6E4F217F59C}"/>
+                <a16:creationId xmlns:a16="http://schemas.microsoft.com/office/drawing/2014/main" id="{82620C9B-C7DB-455E-AF34-7D5273F67A4C}"/>
               </a:ext>
             </a:extLst>
           </p:cNvPr>
@@ -6805,7 +6837,7 @@
             <a:pPr algn="l">
               <a:defRPr sz="1425" b="0">
                 <a:solidFill>
-                  <a:srgbClr val="10213D"/>
+                  <a:srgbClr val="0F1A2B"/>
                 </a:solidFill>
                 <a:latin typeface="Helvetica Neue"/>
                 <a:ea typeface="Helvetica Neue"/>
@@ -6815,7 +6847,7 @@
             <a:r>
               <a:rPr sz="1425" b="0">
                 <a:solidFill>
-                  <a:srgbClr val="10213D"/>
+                  <a:srgbClr val="0F1A2B"/>
                 </a:solidFill>
                 <a:latin typeface="Helvetica Neue"/>
                 <a:ea typeface="Helvetica Neue"/>
@@ -6831,7 +6863,7 @@
           <p:cNvPr id="13" name="">
             <a:extLst xmlns:a="http://schemas.openxmlformats.org/drawingml/2006/main">
               <a:ext uri="{FF2B5EF4-FFF2-40B4-BE49-F238E27FC236}">
-                <a16:creationId xmlns:a16="http://schemas.microsoft.com/office/drawing/2014/main" id="{937DEC25-ED6D-422C-A706-A910471FA8C2}"/>
+                <a16:creationId xmlns:a16="http://schemas.microsoft.com/office/drawing/2014/main" id="{B3598B34-91F6-4C86-BC2A-01855932C6F3}"/>
               </a:ext>
             </a:extLst>
           </p:cNvPr>
@@ -6849,7 +6881,7 @@
             <a:avLst/>
           </a:prstGeom>
           <a:solidFill xmlns:a="http://schemas.openxmlformats.org/drawingml/2006/main">
-            <a:srgbClr val="2563EB"/>
+            <a:srgbClr val="52677D"/>
           </a:solidFill>
           <a:ln xmlns:a="http://schemas.openxmlformats.org/drawingml/2006/main" w="0">
             <a:noFill/>
@@ -6861,7 +6893,7 @@
           <p:cNvPr id="14" name="">
             <a:extLst xmlns:a="http://schemas.openxmlformats.org/drawingml/2006/main">
               <a:ext uri="{FF2B5EF4-FFF2-40B4-BE49-F238E27FC236}">
-                <a16:creationId xmlns:a16="http://schemas.microsoft.com/office/drawing/2014/main" id="{CC796907-17A9-4507-8AA6-14BCEEC42B96}"/>
+                <a16:creationId xmlns:a16="http://schemas.microsoft.com/office/drawing/2014/main" id="{F92AE7D9-D0E0-4F89-9AE1-FE312D761451}"/>
               </a:ext>
             </a:extLst>
           </p:cNvPr>
@@ -6892,7 +6924,7 @@
             <a:pPr algn="l">
               <a:defRPr sz="1425" b="0">
                 <a:solidFill>
-                  <a:srgbClr val="10213D"/>
+                  <a:srgbClr val="0F1A2B"/>
                 </a:solidFill>
                 <a:latin typeface="Helvetica Neue"/>
                 <a:ea typeface="Helvetica Neue"/>
@@ -6902,7 +6934,7 @@
             <a:r>
               <a:rPr sz="1425" b="0">
                 <a:solidFill>
-                  <a:srgbClr val="10213D"/>
+                  <a:srgbClr val="0F1A2B"/>
                 </a:solidFill>
                 <a:latin typeface="Helvetica Neue"/>
                 <a:ea typeface="Helvetica Neue"/>
@@ -6918,7 +6950,7 @@
           <p:cNvPr id="15" name="">
             <a:extLst xmlns:a="http://schemas.openxmlformats.org/drawingml/2006/main">
               <a:ext uri="{FF2B5EF4-FFF2-40B4-BE49-F238E27FC236}">
-                <a16:creationId xmlns:a16="http://schemas.microsoft.com/office/drawing/2014/main" id="{93433982-4CAE-4BC1-A81A-7A418DA5E4F8}"/>
+                <a16:creationId xmlns:a16="http://schemas.microsoft.com/office/drawing/2014/main" id="{AA4825E9-14A6-431E-984B-60DC06AD4DB5}"/>
               </a:ext>
             </a:extLst>
           </p:cNvPr>
@@ -6942,7 +6974,7 @@
           </a:solidFill>
           <a:ln xmlns:a="http://schemas.openxmlformats.org/drawingml/2006/main" w="28575">
             <a:solidFill>
-              <a:srgbClr val="FF7C70"/>
+              <a:srgbClr val="52677D"/>
             </a:solidFill>
           </a:ln>
         </p:spPr>
@@ -6952,7 +6984,7 @@
           <p:cNvPr id="16" name="">
             <a:extLst xmlns:a="http://schemas.openxmlformats.org/drawingml/2006/main">
               <a:ext uri="{FF2B5EF4-FFF2-40B4-BE49-F238E27FC236}">
-                <a16:creationId xmlns:a16="http://schemas.microsoft.com/office/drawing/2014/main" id="{242CB9B8-2007-4093-8AB8-2EF1124745DD}"/>
+                <a16:creationId xmlns:a16="http://schemas.microsoft.com/office/drawing/2014/main" id="{5ADD9724-875F-4CBD-8AE2-D7C725F9BFCB}"/>
               </a:ext>
             </a:extLst>
           </p:cNvPr>
@@ -6972,7 +7004,7 @@
             </a:avLst>
           </a:prstGeom>
           <a:solidFill xmlns:a="http://schemas.openxmlformats.org/drawingml/2006/main">
-            <a:srgbClr val="FF7C70"/>
+            <a:srgbClr val="52677D"/>
           </a:solidFill>
           <a:ln xmlns:a="http://schemas.openxmlformats.org/drawingml/2006/main" w="0">
             <a:noFill/>
@@ -6984,7 +7016,7 @@
           <p:cNvPr id="17" name="">
             <a:extLst xmlns:a="http://schemas.openxmlformats.org/drawingml/2006/main">
               <a:ext uri="{FF2B5EF4-FFF2-40B4-BE49-F238E27FC236}">
-                <a16:creationId xmlns:a16="http://schemas.microsoft.com/office/drawing/2014/main" id="{2965F3DC-3425-4A7A-85DA-ECB0AA3FC0BD}"/>
+                <a16:creationId xmlns:a16="http://schemas.microsoft.com/office/drawing/2014/main" id="{D3FD0B53-3078-4D2E-919F-C1D5416EBED2}"/>
               </a:ext>
             </a:extLst>
           </p:cNvPr>
@@ -7041,7 +7073,7 @@
           <p:cNvPr id="18" name="">
             <a:extLst xmlns:a="http://schemas.openxmlformats.org/drawingml/2006/main">
               <a:ext uri="{FF2B5EF4-FFF2-40B4-BE49-F238E27FC236}">
-                <a16:creationId xmlns:a16="http://schemas.microsoft.com/office/drawing/2014/main" id="{BDA294E7-0F9F-4359-BAA9-0ABF47D34B7B}"/>
+                <a16:creationId xmlns:a16="http://schemas.microsoft.com/office/drawing/2014/main" id="{C4238C84-2603-4C5E-8F2F-7D43CA3F0A9C}"/>
               </a:ext>
             </a:extLst>
           </p:cNvPr>
@@ -7059,7 +7091,7 @@
             <a:avLst/>
           </a:prstGeom>
           <a:solidFill xmlns:a="http://schemas.openxmlformats.org/drawingml/2006/main">
-            <a:srgbClr val="FF7C70"/>
+            <a:srgbClr val="52677D"/>
           </a:solidFill>
           <a:ln xmlns:a="http://schemas.openxmlformats.org/drawingml/2006/main" w="0">
             <a:noFill/>
@@ -7071,7 +7103,7 @@
           <p:cNvPr id="19" name="">
             <a:extLst xmlns:a="http://schemas.openxmlformats.org/drawingml/2006/main">
               <a:ext uri="{FF2B5EF4-FFF2-40B4-BE49-F238E27FC236}">
-                <a16:creationId xmlns:a16="http://schemas.microsoft.com/office/drawing/2014/main" id="{F7611B41-8584-4EC0-BC71-3612E6B0AD14}"/>
+                <a16:creationId xmlns:a16="http://schemas.microsoft.com/office/drawing/2014/main" id="{31E012F3-5832-4E17-BCBA-3EF551B53A9D}"/>
               </a:ext>
             </a:extLst>
           </p:cNvPr>
@@ -7102,7 +7134,7 @@
             <a:pPr algn="l">
               <a:defRPr sz="1425" b="0">
                 <a:solidFill>
-                  <a:srgbClr val="10213D"/>
+                  <a:srgbClr val="0F1A2B"/>
                 </a:solidFill>
                 <a:latin typeface="Helvetica Neue"/>
                 <a:ea typeface="Helvetica Neue"/>
@@ -7112,7 +7144,7 @@
             <a:r>
               <a:rPr sz="1425" b="0">
                 <a:solidFill>
-                  <a:srgbClr val="10213D"/>
+                  <a:srgbClr val="0F1A2B"/>
                 </a:solidFill>
                 <a:latin typeface="Helvetica Neue"/>
                 <a:ea typeface="Helvetica Neue"/>
@@ -7128,7 +7160,7 @@
           <p:cNvPr id="20" name="">
             <a:extLst xmlns:a="http://schemas.openxmlformats.org/drawingml/2006/main">
               <a:ext uri="{FF2B5EF4-FFF2-40B4-BE49-F238E27FC236}">
-                <a16:creationId xmlns:a16="http://schemas.microsoft.com/office/drawing/2014/main" id="{D70D6347-5063-4398-A897-DCF4AABAA84C}"/>
+                <a16:creationId xmlns:a16="http://schemas.microsoft.com/office/drawing/2014/main" id="{8DF008CD-E3F6-44FC-BF44-90C8ED62D55D}"/>
               </a:ext>
             </a:extLst>
           </p:cNvPr>
@@ -7146,7 +7178,7 @@
             <a:avLst/>
           </a:prstGeom>
           <a:solidFill xmlns:a="http://schemas.openxmlformats.org/drawingml/2006/main">
-            <a:srgbClr val="FF7C70"/>
+            <a:srgbClr val="52677D"/>
           </a:solidFill>
           <a:ln xmlns:a="http://schemas.openxmlformats.org/drawingml/2006/main" w="0">
             <a:noFill/>
@@ -7158,7 +7190,7 @@
           <p:cNvPr id="21" name="">
             <a:extLst xmlns:a="http://schemas.openxmlformats.org/drawingml/2006/main">
               <a:ext uri="{FF2B5EF4-FFF2-40B4-BE49-F238E27FC236}">
-                <a16:creationId xmlns:a16="http://schemas.microsoft.com/office/drawing/2014/main" id="{997A5DBD-9681-41D9-B541-C88FB333D402}"/>
+                <a16:creationId xmlns:a16="http://schemas.microsoft.com/office/drawing/2014/main" id="{D9B3FCD2-45E6-473C-B6EB-4DE36D4968EF}"/>
               </a:ext>
             </a:extLst>
           </p:cNvPr>
@@ -7189,7 +7221,7 @@
             <a:pPr algn="l">
               <a:defRPr sz="1425" b="0">
                 <a:solidFill>
-                  <a:srgbClr val="10213D"/>
+                  <a:srgbClr val="0F1A2B"/>
                 </a:solidFill>
                 <a:latin typeface="Helvetica Neue"/>
                 <a:ea typeface="Helvetica Neue"/>
@@ -7199,7 +7231,7 @@
             <a:r>
               <a:rPr sz="1425" b="0">
                 <a:solidFill>
-                  <a:srgbClr val="10213D"/>
+                  <a:srgbClr val="0F1A2B"/>
                 </a:solidFill>
                 <a:latin typeface="Helvetica Neue"/>
                 <a:ea typeface="Helvetica Neue"/>
@@ -7215,7 +7247,7 @@
           <p:cNvPr id="22" name="">
             <a:extLst xmlns:a="http://schemas.openxmlformats.org/drawingml/2006/main">
               <a:ext uri="{FF2B5EF4-FFF2-40B4-BE49-F238E27FC236}">
-                <a16:creationId xmlns:a16="http://schemas.microsoft.com/office/drawing/2014/main" id="{50D4A505-5FB6-4E92-9BDD-B33202E1CD17}"/>
+                <a16:creationId xmlns:a16="http://schemas.microsoft.com/office/drawing/2014/main" id="{E6793D3F-3C03-4044-A573-E0A8F4C4CAA1}"/>
               </a:ext>
             </a:extLst>
           </p:cNvPr>
@@ -7233,7 +7265,7 @@
             <a:avLst/>
           </a:prstGeom>
           <a:solidFill xmlns:a="http://schemas.openxmlformats.org/drawingml/2006/main">
-            <a:srgbClr val="FF7C70"/>
+            <a:srgbClr val="52677D"/>
           </a:solidFill>
           <a:ln xmlns:a="http://schemas.openxmlformats.org/drawingml/2006/main" w="0">
             <a:noFill/>
@@ -7245,7 +7277,7 @@
           <p:cNvPr id="23" name="">
             <a:extLst xmlns:a="http://schemas.openxmlformats.org/drawingml/2006/main">
               <a:ext uri="{FF2B5EF4-FFF2-40B4-BE49-F238E27FC236}">
-                <a16:creationId xmlns:a16="http://schemas.microsoft.com/office/drawing/2014/main" id="{8A4AFCC2-C6AF-4973-B62C-2AC5734569C9}"/>
+                <a16:creationId xmlns:a16="http://schemas.microsoft.com/office/drawing/2014/main" id="{46585DAB-0186-4E15-B0E6-E99B02663914}"/>
               </a:ext>
             </a:extLst>
           </p:cNvPr>
@@ -7276,7 +7308,7 @@
             <a:pPr algn="l">
               <a:defRPr sz="1425" b="0">
                 <a:solidFill>
-                  <a:srgbClr val="10213D"/>
+                  <a:srgbClr val="0F1A2B"/>
                 </a:solidFill>
                 <a:latin typeface="Helvetica Neue"/>
                 <a:ea typeface="Helvetica Neue"/>
@@ -7286,7 +7318,7 @@
             <a:r>
               <a:rPr sz="1425" b="0">
                 <a:solidFill>
-                  <a:srgbClr val="10213D"/>
+                  <a:srgbClr val="0F1A2B"/>
                 </a:solidFill>
                 <a:latin typeface="Helvetica Neue"/>
                 <a:ea typeface="Helvetica Neue"/>
@@ -7302,7 +7334,7 @@
           <p:cNvPr id="24" name="">
             <a:extLst xmlns:a="http://schemas.openxmlformats.org/drawingml/2006/main">
               <a:ext uri="{FF2B5EF4-FFF2-40B4-BE49-F238E27FC236}">
-                <a16:creationId xmlns:a16="http://schemas.microsoft.com/office/drawing/2014/main" id="{52329009-00AE-47E6-9AD6-2C7FEC46FD79}"/>
+                <a16:creationId xmlns:a16="http://schemas.microsoft.com/office/drawing/2014/main" id="{9F369888-AC81-489B-8E9B-F66EB25E8957}"/>
               </a:ext>
             </a:extLst>
           </p:cNvPr>
@@ -7320,7 +7352,7 @@
             <a:avLst/>
           </a:prstGeom>
           <a:solidFill xmlns:a="http://schemas.openxmlformats.org/drawingml/2006/main">
-            <a:srgbClr val="FF7C70"/>
+            <a:srgbClr val="52677D"/>
           </a:solidFill>
           <a:ln xmlns:a="http://schemas.openxmlformats.org/drawingml/2006/main" w="0">
             <a:noFill/>
@@ -7332,7 +7364,7 @@
           <p:cNvPr id="25" name="">
             <a:extLst xmlns:a="http://schemas.openxmlformats.org/drawingml/2006/main">
               <a:ext uri="{FF2B5EF4-FFF2-40B4-BE49-F238E27FC236}">
-                <a16:creationId xmlns:a16="http://schemas.microsoft.com/office/drawing/2014/main" id="{0049098F-A159-46AB-B7E5-34BA2307E91C}"/>
+                <a16:creationId xmlns:a16="http://schemas.microsoft.com/office/drawing/2014/main" id="{517B7B2A-17DC-4A4D-A086-D5B93791B1DA}"/>
               </a:ext>
             </a:extLst>
           </p:cNvPr>
@@ -7363,7 +7395,7 @@
             <a:pPr algn="l">
               <a:defRPr sz="1425" b="0">
                 <a:solidFill>
-                  <a:srgbClr val="10213D"/>
+                  <a:srgbClr val="0F1A2B"/>
                 </a:solidFill>
                 <a:latin typeface="Helvetica Neue"/>
                 <a:ea typeface="Helvetica Neue"/>
@@ -7373,7 +7405,7 @@
             <a:r>
               <a:rPr sz="1425" b="0">
                 <a:solidFill>
-                  <a:srgbClr val="10213D"/>
+                  <a:srgbClr val="0F1A2B"/>
                 </a:solidFill>
                 <a:latin typeface="Helvetica Neue"/>
                 <a:ea typeface="Helvetica Neue"/>
@@ -7389,7 +7421,7 @@
           <p:cNvPr id="26" name="">
             <a:extLst xmlns:a="http://schemas.openxmlformats.org/drawingml/2006/main">
               <a:ext uri="{FF2B5EF4-FFF2-40B4-BE49-F238E27FC236}">
-                <a16:creationId xmlns:a16="http://schemas.microsoft.com/office/drawing/2014/main" id="{EA513587-6995-44E5-9FEC-DE0E685BBBE0}"/>
+                <a16:creationId xmlns:a16="http://schemas.microsoft.com/office/drawing/2014/main" id="{568A34A0-B166-4AB3-A2D9-0AF1CDBBE8C2}"/>
               </a:ext>
             </a:extLst>
           </p:cNvPr>
@@ -7407,7 +7439,7 @@
             <a:avLst/>
           </a:prstGeom>
           <a:solidFill xmlns:a="http://schemas.openxmlformats.org/drawingml/2006/main">
-            <a:srgbClr val="D8E5F2"/>
+            <a:srgbClr val="BDC4D4"/>
           </a:solidFill>
           <a:ln xmlns:a="http://schemas.openxmlformats.org/drawingml/2006/main" w="0">
             <a:noFill/>
@@ -7419,7 +7451,7 @@
           <p:cNvPr id="27" name="">
             <a:extLst xmlns:a="http://schemas.openxmlformats.org/drawingml/2006/main">
               <a:ext uri="{FF2B5EF4-FFF2-40B4-BE49-F238E27FC236}">
-                <a16:creationId xmlns:a16="http://schemas.microsoft.com/office/drawing/2014/main" id="{067B3219-43C9-4FF6-90A4-EF1AE0F7A629}"/>
+                <a16:creationId xmlns:a16="http://schemas.microsoft.com/office/drawing/2014/main" id="{A68BE87C-0B6C-4C3A-A8E2-DEF47CDD2961}"/>
               </a:ext>
             </a:extLst>
           </p:cNvPr>
@@ -7450,7 +7482,7 @@
             <a:pPr algn="l">
               <a:defRPr sz="750" b="0">
                 <a:solidFill>
-                  <a:srgbClr val="61718A"/>
+                  <a:srgbClr val="52677D"/>
                 </a:solidFill>
                 <a:latin typeface="Helvetica Neue"/>
                 <a:ea typeface="Helvetica Neue"/>
@@ -7460,7 +7492,7 @@
             <a:r>
               <a:rPr sz="750" b="0">
                 <a:solidFill>
-                  <a:srgbClr val="61718A"/>
+                  <a:srgbClr val="52677D"/>
                 </a:solidFill>
                 <a:latin typeface="Helvetica Neue"/>
                 <a:ea typeface="Helvetica Neue"/>
@@ -7476,7 +7508,7 @@
           <p:cNvPr id="28" name="">
             <a:extLst xmlns:a="http://schemas.openxmlformats.org/drawingml/2006/main">
               <a:ext uri="{FF2B5EF4-FFF2-40B4-BE49-F238E27FC236}">
-                <a16:creationId xmlns:a16="http://schemas.microsoft.com/office/drawing/2014/main" id="{D38E910C-3556-4334-B1DE-CCE2F5514D51}"/>
+                <a16:creationId xmlns:a16="http://schemas.microsoft.com/office/drawing/2014/main" id="{DE25CEAD-E831-479B-A459-8BC193FC3E87}"/>
               </a:ext>
             </a:extLst>
           </p:cNvPr>
@@ -7507,7 +7539,7 @@
             <a:pPr algn="r">
               <a:defRPr sz="825" b="1">
                 <a:solidFill>
-                  <a:srgbClr val="2563EB"/>
+                  <a:srgbClr val="52677D"/>
                 </a:solidFill>
                 <a:latin typeface="Helvetica Neue"/>
                 <a:ea typeface="Helvetica Neue"/>
@@ -7517,7 +7549,7 @@
             <a:r>
               <a:rPr sz="825" b="1">
                 <a:solidFill>
-                  <a:srgbClr val="2563EB"/>
+                  <a:srgbClr val="52677D"/>
                 </a:solidFill>
                 <a:latin typeface="Helvetica Neue"/>
                 <a:ea typeface="Helvetica Neue"/>
@@ -7531,7 +7563,7 @@
     </p:spTree>
     <p:extLst>
       <p:ext uri="{BB962C8B-B14F-4D97-AF65-F5344CB8AC3E}">
-        <p14:creationId xmlns:p14="http://schemas.microsoft.com/office/powerpoint/2010/main" val="1343489709"/>
+        <p14:creationId xmlns:p14="http://schemas.microsoft.com/office/powerpoint/2010/main" val="1614346536"/>
       </p:ext>
     </p:extLst>
   </p:cSld>
@@ -7562,7 +7594,7 @@
           <p:cNvPr id="24" name="">
             <a:extLst xmlns:a="http://schemas.openxmlformats.org/drawingml/2006/main">
               <a:ext uri="{FF2B5EF4-FFF2-40B4-BE49-F238E27FC236}">
-                <a16:creationId xmlns:a16="http://schemas.microsoft.com/office/drawing/2014/main" id="{BEA9175B-F0CF-42B2-A46A-95956A606EE4}"/>
+                <a16:creationId xmlns:a16="http://schemas.microsoft.com/office/drawing/2014/main" id="{FEA6EE77-5CB5-4FDB-A385-68C5C33D7740}"/>
               </a:ext>
             </a:extLst>
           </p:cNvPr>
@@ -7580,7 +7612,7 @@
             <a:avLst/>
           </a:prstGeom>
           <a:solidFill xmlns:a="http://schemas.openxmlformats.org/drawingml/2006/main">
-            <a:srgbClr val="FF7C70"/>
+            <a:srgbClr val="1C2E4A"/>
           </a:solidFill>
           <a:ln xmlns:a="http://schemas.openxmlformats.org/drawingml/2006/main" w="0">
             <a:noFill/>
@@ -7592,7 +7624,7 @@
           <p:cNvPr id="2" name="">
             <a:extLst xmlns:a="http://schemas.openxmlformats.org/drawingml/2006/main">
               <a:ext uri="{FF2B5EF4-FFF2-40B4-BE49-F238E27FC236}">
-                <a16:creationId xmlns:a16="http://schemas.microsoft.com/office/drawing/2014/main" id="{1FE47F65-FB59-4582-92E4-A292E986043F}"/>
+                <a16:creationId xmlns:a16="http://schemas.microsoft.com/office/drawing/2014/main" id="{45378BB9-32E2-463F-B853-C70735B27E8C}"/>
               </a:ext>
             </a:extLst>
           </p:cNvPr>
@@ -7623,7 +7655,7 @@
             <a:pPr algn="l">
               <a:defRPr sz="1125" b="1">
                 <a:solidFill>
-                  <a:srgbClr val="2563EB"/>
+                  <a:srgbClr val="52677D"/>
                 </a:solidFill>
                 <a:latin typeface="Helvetica Neue"/>
                 <a:ea typeface="Helvetica Neue"/>
@@ -7633,7 +7665,7 @@
             <a:r>
               <a:rPr sz="1125" b="1">
                 <a:solidFill>
-                  <a:srgbClr val="2563EB"/>
+                  <a:srgbClr val="52677D"/>
                 </a:solidFill>
                 <a:latin typeface="Helvetica Neue"/>
                 <a:ea typeface="Helvetica Neue"/>
@@ -7649,7 +7681,7 @@
           <p:cNvPr id="3" name="">
             <a:extLst xmlns:a="http://schemas.openxmlformats.org/drawingml/2006/main">
               <a:ext uri="{FF2B5EF4-FFF2-40B4-BE49-F238E27FC236}">
-                <a16:creationId xmlns:a16="http://schemas.microsoft.com/office/drawing/2014/main" id="{EA6B8272-ECF9-4831-9AE5-DEDB1C1458D6}"/>
+                <a16:creationId xmlns:a16="http://schemas.microsoft.com/office/drawing/2014/main" id="{DA754096-A4C1-41FD-9DF7-2A662769DF13}"/>
               </a:ext>
             </a:extLst>
           </p:cNvPr>
@@ -7669,7 +7701,7 @@
             </a:avLst>
           </a:prstGeom>
           <a:solidFill xmlns:a="http://schemas.openxmlformats.org/drawingml/2006/main">
-            <a:srgbClr val="FFD43B"/>
+            <a:srgbClr val="D1CFC9"/>
           </a:solidFill>
           <a:ln xmlns:a="http://schemas.openxmlformats.org/drawingml/2006/main" w="0">
             <a:noFill/>
@@ -7681,7 +7713,7 @@
           <p:cNvPr id="4" name="">
             <a:extLst xmlns:a="http://schemas.openxmlformats.org/drawingml/2006/main">
               <a:ext uri="{FF2B5EF4-FFF2-40B4-BE49-F238E27FC236}">
-                <a16:creationId xmlns:a16="http://schemas.microsoft.com/office/drawing/2014/main" id="{4F60E50D-D178-4BF9-B163-12D06560F950}"/>
+                <a16:creationId xmlns:a16="http://schemas.microsoft.com/office/drawing/2014/main" id="{2E062FBC-A114-426C-B0FD-73F29CCCAC0A}"/>
               </a:ext>
             </a:extLst>
           </p:cNvPr>
@@ -7712,7 +7744,7 @@
             <a:pPr algn="ctr">
               <a:defRPr sz="1275" b="1">
                 <a:solidFill>
-                  <a:srgbClr val="092454"/>
+                  <a:srgbClr val="1C2E4A"/>
                 </a:solidFill>
                 <a:latin typeface="Helvetica Neue"/>
                 <a:ea typeface="Helvetica Neue"/>
@@ -7722,7 +7754,7 @@
             <a:r>
               <a:rPr sz="1275" b="1">
                 <a:solidFill>
-                  <a:srgbClr val="092454"/>
+                  <a:srgbClr val="1C2E4A"/>
                 </a:solidFill>
                 <a:latin typeface="Helvetica Neue"/>
                 <a:ea typeface="Helvetica Neue"/>
@@ -7738,7 +7770,7 @@
           <p:cNvPr id="5" name="">
             <a:extLst xmlns:a="http://schemas.openxmlformats.org/drawingml/2006/main">
               <a:ext uri="{FF2B5EF4-FFF2-40B4-BE49-F238E27FC236}">
-                <a16:creationId xmlns:a16="http://schemas.microsoft.com/office/drawing/2014/main" id="{8504B8C8-EA39-40A1-8567-6AF7EFFF74B1}"/>
+                <a16:creationId xmlns:a16="http://schemas.microsoft.com/office/drawing/2014/main" id="{AE79FB81-A28A-4759-87F3-19BC2376A7FF}"/>
               </a:ext>
             </a:extLst>
           </p:cNvPr>
@@ -7769,7 +7801,7 @@
             <a:pPr algn="l">
               <a:defRPr sz="2250" b="1">
                 <a:solidFill>
-                  <a:srgbClr val="092454"/>
+                  <a:srgbClr val="1C2E4A"/>
                 </a:solidFill>
                 <a:latin typeface="Helvetica Neue"/>
                 <a:ea typeface="Helvetica Neue"/>
@@ -7779,7 +7811,7 @@
             <a:r>
               <a:rPr sz="2250" b="1">
                 <a:solidFill>
-                  <a:srgbClr val="092454"/>
+                  <a:srgbClr val="1C2E4A"/>
                 </a:solidFill>
                 <a:latin typeface="Helvetica Neue"/>
                 <a:ea typeface="Helvetica Neue"/>
@@ -7795,7 +7827,7 @@
           <p:cNvPr id="6" name="">
             <a:extLst xmlns:a="http://schemas.openxmlformats.org/drawingml/2006/main">
               <a:ext uri="{FF2B5EF4-FFF2-40B4-BE49-F238E27FC236}">
-                <a16:creationId xmlns:a16="http://schemas.microsoft.com/office/drawing/2014/main" id="{CFAD713E-E6E0-433B-91FA-A58DC9DF4D77}"/>
+                <a16:creationId xmlns:a16="http://schemas.microsoft.com/office/drawing/2014/main" id="{6E8F164D-07F4-434C-B2E5-518864699F90}"/>
               </a:ext>
             </a:extLst>
           </p:cNvPr>
@@ -7815,7 +7847,7 @@
             </a:avLst>
           </a:prstGeom>
           <a:solidFill xmlns:a="http://schemas.openxmlformats.org/drawingml/2006/main">
-            <a:srgbClr val="EEF7FF"/>
+            <a:srgbClr val="D1CFC9"/>
           </a:solidFill>
           <a:ln xmlns:a="http://schemas.openxmlformats.org/drawingml/2006/main" w="0">
             <a:noFill/>
@@ -7827,7 +7859,7 @@
           <p:cNvPr id="7" name="">
             <a:extLst xmlns:a="http://schemas.openxmlformats.org/drawingml/2006/main">
               <a:ext uri="{FF2B5EF4-FFF2-40B4-BE49-F238E27FC236}">
-                <a16:creationId xmlns:a16="http://schemas.microsoft.com/office/drawing/2014/main" id="{A5D2A3D0-69C3-4CF0-99FC-81C9057E4C65}"/>
+                <a16:creationId xmlns:a16="http://schemas.microsoft.com/office/drawing/2014/main" id="{0EBA2431-60CB-4F65-8F01-69735530DDFD}"/>
               </a:ext>
             </a:extLst>
           </p:cNvPr>
@@ -7858,7 +7890,7 @@
             <a:pPr algn="ctr">
               <a:defRPr sz="1350" b="1">
                 <a:solidFill>
-                  <a:srgbClr val="2563EB"/>
+                  <a:srgbClr val="52677D"/>
                 </a:solidFill>
                 <a:latin typeface="Helvetica Neue"/>
                 <a:ea typeface="Helvetica Neue"/>
@@ -7868,7 +7900,7 @@
             <a:r>
               <a:rPr sz="1350" b="1">
                 <a:solidFill>
-                  <a:srgbClr val="2563EB"/>
+                  <a:srgbClr val="52677D"/>
                 </a:solidFill>
                 <a:latin typeface="Helvetica Neue"/>
                 <a:ea typeface="Helvetica Neue"/>
@@ -7884,7 +7916,7 @@
           <p:cNvPr id="8" name="">
             <a:extLst xmlns:a="http://schemas.openxmlformats.org/drawingml/2006/main">
               <a:ext uri="{FF2B5EF4-FFF2-40B4-BE49-F238E27FC236}">
-                <a16:creationId xmlns:a16="http://schemas.microsoft.com/office/drawing/2014/main" id="{0D3BE2B4-45C1-4396-815B-4C4D3FC515F4}"/>
+                <a16:creationId xmlns:a16="http://schemas.microsoft.com/office/drawing/2014/main" id="{792A328A-C66C-4414-9D8B-508F39A59231}"/>
               </a:ext>
             </a:extLst>
           </p:cNvPr>
@@ -7915,7 +7947,7 @@
             <a:pPr algn="l">
               <a:defRPr sz="1575" b="0">
                 <a:solidFill>
-                  <a:srgbClr val="10213D"/>
+                  <a:srgbClr val="0F1A2B"/>
                 </a:solidFill>
                 <a:latin typeface="Helvetica Neue"/>
                 <a:ea typeface="Helvetica Neue"/>
@@ -7925,7 +7957,7 @@
             <a:r>
               <a:rPr sz="1575" b="0">
                 <a:solidFill>
-                  <a:srgbClr val="10213D"/>
+                  <a:srgbClr val="0F1A2B"/>
                 </a:solidFill>
                 <a:latin typeface="Helvetica Neue"/>
                 <a:ea typeface="Helvetica Neue"/>
@@ -7941,7 +7973,7 @@
           <p:cNvPr id="9" name="">
             <a:extLst xmlns:a="http://schemas.openxmlformats.org/drawingml/2006/main">
               <a:ext uri="{FF2B5EF4-FFF2-40B4-BE49-F238E27FC236}">
-                <a16:creationId xmlns:a16="http://schemas.microsoft.com/office/drawing/2014/main" id="{48592FC4-DBA8-4C8B-B415-983FF13E00BC}"/>
+                <a16:creationId xmlns:a16="http://schemas.microsoft.com/office/drawing/2014/main" id="{0F7F734E-AAC3-445F-B67B-9CE40B0192B6}"/>
               </a:ext>
             </a:extLst>
           </p:cNvPr>
@@ -7961,7 +7993,7 @@
             </a:avLst>
           </a:prstGeom>
           <a:solidFill xmlns:a="http://schemas.openxmlformats.org/drawingml/2006/main">
-            <a:srgbClr val="EEF7FF"/>
+            <a:srgbClr val="D1CFC9"/>
           </a:solidFill>
           <a:ln xmlns:a="http://schemas.openxmlformats.org/drawingml/2006/main" w="0">
             <a:noFill/>
@@ -7973,7 +8005,7 @@
           <p:cNvPr id="10" name="">
             <a:extLst xmlns:a="http://schemas.openxmlformats.org/drawingml/2006/main">
               <a:ext uri="{FF2B5EF4-FFF2-40B4-BE49-F238E27FC236}">
-                <a16:creationId xmlns:a16="http://schemas.microsoft.com/office/drawing/2014/main" id="{CD2AF251-EE85-4487-8B85-8557721A60FC}"/>
+                <a16:creationId xmlns:a16="http://schemas.microsoft.com/office/drawing/2014/main" id="{C79322A6-7D25-4ADF-9463-0B866EDD9A9B}"/>
               </a:ext>
             </a:extLst>
           </p:cNvPr>
@@ -8004,7 +8036,7 @@
             <a:pPr algn="ctr">
               <a:defRPr sz="1350" b="1">
                 <a:solidFill>
-                  <a:srgbClr val="2563EB"/>
+                  <a:srgbClr val="52677D"/>
                 </a:solidFill>
                 <a:latin typeface="Helvetica Neue"/>
                 <a:ea typeface="Helvetica Neue"/>
@@ -8014,7 +8046,7 @@
             <a:r>
               <a:rPr sz="1350" b="1">
                 <a:solidFill>
-                  <a:srgbClr val="2563EB"/>
+                  <a:srgbClr val="52677D"/>
                 </a:solidFill>
                 <a:latin typeface="Helvetica Neue"/>
                 <a:ea typeface="Helvetica Neue"/>
@@ -8030,7 +8062,7 @@
           <p:cNvPr id="11" name="">
             <a:extLst xmlns:a="http://schemas.openxmlformats.org/drawingml/2006/main">
               <a:ext uri="{FF2B5EF4-FFF2-40B4-BE49-F238E27FC236}">
-                <a16:creationId xmlns:a16="http://schemas.microsoft.com/office/drawing/2014/main" id="{2148C2B5-AB61-44AD-9F58-5DC2FAE38AEA}"/>
+                <a16:creationId xmlns:a16="http://schemas.microsoft.com/office/drawing/2014/main" id="{4CA9F5A1-77CF-4105-A0F5-ED9C0245B42F}"/>
               </a:ext>
             </a:extLst>
           </p:cNvPr>
@@ -8061,7 +8093,7 @@
             <a:pPr algn="l">
               <a:defRPr sz="1575" b="0">
                 <a:solidFill>
-                  <a:srgbClr val="10213D"/>
+                  <a:srgbClr val="0F1A2B"/>
                 </a:solidFill>
                 <a:latin typeface="Helvetica Neue"/>
                 <a:ea typeface="Helvetica Neue"/>
@@ -8071,7 +8103,7 @@
             <a:r>
               <a:rPr sz="1575" b="0">
                 <a:solidFill>
-                  <a:srgbClr val="10213D"/>
+                  <a:srgbClr val="0F1A2B"/>
                 </a:solidFill>
                 <a:latin typeface="Helvetica Neue"/>
                 <a:ea typeface="Helvetica Neue"/>
@@ -8087,7 +8119,7 @@
           <p:cNvPr id="12" name="">
             <a:extLst xmlns:a="http://schemas.openxmlformats.org/drawingml/2006/main">
               <a:ext uri="{FF2B5EF4-FFF2-40B4-BE49-F238E27FC236}">
-                <a16:creationId xmlns:a16="http://schemas.microsoft.com/office/drawing/2014/main" id="{FEE7F0F7-7215-49F4-8843-BD9F9D5BA918}"/>
+                <a16:creationId xmlns:a16="http://schemas.microsoft.com/office/drawing/2014/main" id="{4F5E9B0F-A380-4DAD-8665-8C2CBA0210D6}"/>
               </a:ext>
             </a:extLst>
           </p:cNvPr>
@@ -8107,7 +8139,7 @@
             </a:avLst>
           </a:prstGeom>
           <a:solidFill xmlns:a="http://schemas.openxmlformats.org/drawingml/2006/main">
-            <a:srgbClr val="EEF7FF"/>
+            <a:srgbClr val="D1CFC9"/>
           </a:solidFill>
           <a:ln xmlns:a="http://schemas.openxmlformats.org/drawingml/2006/main" w="0">
             <a:noFill/>
@@ -8119,7 +8151,7 @@
           <p:cNvPr id="13" name="">
             <a:extLst xmlns:a="http://schemas.openxmlformats.org/drawingml/2006/main">
               <a:ext uri="{FF2B5EF4-FFF2-40B4-BE49-F238E27FC236}">
-                <a16:creationId xmlns:a16="http://schemas.microsoft.com/office/drawing/2014/main" id="{E7B8CAA7-0418-449D-983D-A0D8F71B36DB}"/>
+                <a16:creationId xmlns:a16="http://schemas.microsoft.com/office/drawing/2014/main" id="{7069CA18-5923-48AD-B4B1-378DA87B9FF1}"/>
               </a:ext>
             </a:extLst>
           </p:cNvPr>
@@ -8150,7 +8182,7 @@
             <a:pPr algn="ctr">
               <a:defRPr sz="1350" b="1">
                 <a:solidFill>
-                  <a:srgbClr val="2563EB"/>
+                  <a:srgbClr val="52677D"/>
                 </a:solidFill>
                 <a:latin typeface="Helvetica Neue"/>
                 <a:ea typeface="Helvetica Neue"/>
@@ -8160,7 +8192,7 @@
             <a:r>
               <a:rPr sz="1350" b="1">
                 <a:solidFill>
-                  <a:srgbClr val="2563EB"/>
+                  <a:srgbClr val="52677D"/>
                 </a:solidFill>
                 <a:latin typeface="Helvetica Neue"/>
                 <a:ea typeface="Helvetica Neue"/>
@@ -8176,7 +8208,7 @@
           <p:cNvPr id="14" name="">
             <a:extLst xmlns:a="http://schemas.openxmlformats.org/drawingml/2006/main">
               <a:ext uri="{FF2B5EF4-FFF2-40B4-BE49-F238E27FC236}">
-                <a16:creationId xmlns:a16="http://schemas.microsoft.com/office/drawing/2014/main" id="{1507FEA6-95EE-4D9C-A46B-9D02082C227D}"/>
+                <a16:creationId xmlns:a16="http://schemas.microsoft.com/office/drawing/2014/main" id="{9C2F62B7-37EE-44D6-BFB8-82EBDEEC3592}"/>
               </a:ext>
             </a:extLst>
           </p:cNvPr>
@@ -8207,7 +8239,7 @@
             <a:pPr algn="l">
               <a:defRPr sz="1575" b="0">
                 <a:solidFill>
-                  <a:srgbClr val="10213D"/>
+                  <a:srgbClr val="0F1A2B"/>
                 </a:solidFill>
                 <a:latin typeface="Helvetica Neue"/>
                 <a:ea typeface="Helvetica Neue"/>
@@ -8217,7 +8249,7 @@
             <a:r>
               <a:rPr sz="1575" b="0">
                 <a:solidFill>
-                  <a:srgbClr val="10213D"/>
+                  <a:srgbClr val="0F1A2B"/>
                 </a:solidFill>
                 <a:latin typeface="Helvetica Neue"/>
                 <a:ea typeface="Helvetica Neue"/>
@@ -8233,7 +8265,7 @@
           <p:cNvPr id="15" name="">
             <a:extLst xmlns:a="http://schemas.openxmlformats.org/drawingml/2006/main">
               <a:ext uri="{FF2B5EF4-FFF2-40B4-BE49-F238E27FC236}">
-                <a16:creationId xmlns:a16="http://schemas.microsoft.com/office/drawing/2014/main" id="{28BFD270-DCD3-45C6-BE12-43B139F3966D}"/>
+                <a16:creationId xmlns:a16="http://schemas.microsoft.com/office/drawing/2014/main" id="{5B15AA1B-E608-488B-A717-3C62D0789300}"/>
               </a:ext>
             </a:extLst>
           </p:cNvPr>
@@ -8253,7 +8285,7 @@
             </a:avLst>
           </a:prstGeom>
           <a:solidFill xmlns:a="http://schemas.openxmlformats.org/drawingml/2006/main">
-            <a:srgbClr val="EEF7FF"/>
+            <a:srgbClr val="D1CFC9"/>
           </a:solidFill>
           <a:ln xmlns:a="http://schemas.openxmlformats.org/drawingml/2006/main" w="0">
             <a:noFill/>
@@ -8265,7 +8297,7 @@
           <p:cNvPr id="16" name="">
             <a:extLst xmlns:a="http://schemas.openxmlformats.org/drawingml/2006/main">
               <a:ext uri="{FF2B5EF4-FFF2-40B4-BE49-F238E27FC236}">
-                <a16:creationId xmlns:a16="http://schemas.microsoft.com/office/drawing/2014/main" id="{C0072A21-9102-42CB-B5DD-25E0B219E07B}"/>
+                <a16:creationId xmlns:a16="http://schemas.microsoft.com/office/drawing/2014/main" id="{71913858-A8EA-4994-BE40-200B0FA8FBA1}"/>
               </a:ext>
             </a:extLst>
           </p:cNvPr>
@@ -8296,7 +8328,7 @@
             <a:pPr algn="l">
               <a:defRPr sz="1125" b="0">
                 <a:solidFill>
-                  <a:srgbClr val="092454"/>
+                  <a:srgbClr val="1C2E4A"/>
                 </a:solidFill>
                 <a:latin typeface="Helvetica Neue"/>
                 <a:ea typeface="Helvetica Neue"/>
@@ -8306,7 +8338,7 @@
             <a:r>
               <a:rPr sz="1125" b="0">
                 <a:solidFill>
-                  <a:srgbClr val="092454"/>
+                  <a:srgbClr val="1C2E4A"/>
                 </a:solidFill>
                 <a:latin typeface="Helvetica Neue"/>
                 <a:ea typeface="Helvetica Neue"/>
@@ -8322,7 +8354,7 @@
           <p:cNvPr id="17" name="">
             <a:extLst xmlns:a="http://schemas.openxmlformats.org/drawingml/2006/main">
               <a:ext uri="{FF2B5EF4-FFF2-40B4-BE49-F238E27FC236}">
-                <a16:creationId xmlns:a16="http://schemas.microsoft.com/office/drawing/2014/main" id="{7A1A017F-5991-4BF3-B708-8D6E07A65D79}"/>
+                <a16:creationId xmlns:a16="http://schemas.microsoft.com/office/drawing/2014/main" id="{CE9D8D23-28CB-451A-8B93-D4E7B558701B}"/>
               </a:ext>
             </a:extLst>
           </p:cNvPr>
@@ -8342,7 +8374,7 @@
             </a:avLst>
           </a:prstGeom>
           <a:solidFill xmlns:a="http://schemas.openxmlformats.org/drawingml/2006/main">
-            <a:srgbClr val="092454"/>
+            <a:srgbClr val="1C2E4A"/>
           </a:solidFill>
           <a:ln xmlns:a="http://schemas.openxmlformats.org/drawingml/2006/main" w="0">
             <a:noFill/>
@@ -8354,7 +8386,7 @@
           <p:cNvPr id="18" name="">
             <a:extLst xmlns:a="http://schemas.openxmlformats.org/drawingml/2006/main">
               <a:ext uri="{FF2B5EF4-FFF2-40B4-BE49-F238E27FC236}">
-                <a16:creationId xmlns:a16="http://schemas.microsoft.com/office/drawing/2014/main" id="{0CA0800A-BF3F-4EEB-BAE0-DE4B9691CE41}"/>
+                <a16:creationId xmlns:a16="http://schemas.microsoft.com/office/drawing/2014/main" id="{C44D042C-029D-40AA-A571-C7D893DE2490}"/>
               </a:ext>
             </a:extLst>
           </p:cNvPr>
@@ -8385,7 +8417,7 @@
             <a:pPr algn="l">
               <a:defRPr sz="1050" b="1">
                 <a:solidFill>
-                  <a:srgbClr val="FFD43B"/>
+                  <a:srgbClr val="D1CFC9"/>
                 </a:solidFill>
                 <a:latin typeface="Helvetica Neue"/>
                 <a:ea typeface="Helvetica Neue"/>
@@ -8395,7 +8427,7 @@
             <a:r>
               <a:rPr sz="1050" b="1">
                 <a:solidFill>
-                  <a:srgbClr val="FFD43B"/>
+                  <a:srgbClr val="D1CFC9"/>
                 </a:solidFill>
                 <a:latin typeface="Helvetica Neue"/>
                 <a:ea typeface="Helvetica Neue"/>
@@ -8411,7 +8443,7 @@
           <p:cNvPr id="19" name="">
             <a:extLst xmlns:a="http://schemas.openxmlformats.org/drawingml/2006/main">
               <a:ext uri="{FF2B5EF4-FFF2-40B4-BE49-F238E27FC236}">
-                <a16:creationId xmlns:a16="http://schemas.microsoft.com/office/drawing/2014/main" id="{33F4BE90-AA33-419C-A541-04C6D7D1E7CE}"/>
+                <a16:creationId xmlns:a16="http://schemas.microsoft.com/office/drawing/2014/main" id="{EA23C033-ADB0-4CED-99A6-AF7BBFBD362A}"/>
               </a:ext>
             </a:extLst>
           </p:cNvPr>
@@ -8468,7 +8500,7 @@
           <p:cNvPr id="20" name="">
             <a:extLst xmlns:a="http://schemas.openxmlformats.org/drawingml/2006/main">
               <a:ext uri="{FF2B5EF4-FFF2-40B4-BE49-F238E27FC236}">
-                <a16:creationId xmlns:a16="http://schemas.microsoft.com/office/drawing/2014/main" id="{8946444E-5ACF-4D3D-8141-FAFA8C86BDA4}"/>
+                <a16:creationId xmlns:a16="http://schemas.microsoft.com/office/drawing/2014/main" id="{E396CFC9-9B8E-4335-B40E-091973F700E0}"/>
               </a:ext>
             </a:extLst>
           </p:cNvPr>
@@ -8499,7 +8531,7 @@
             <a:pPr algn="l">
               <a:defRPr sz="1125" b="0">
                 <a:solidFill>
-                  <a:srgbClr val="BFE6FF"/>
+                  <a:srgbClr val="BDC4D4"/>
                 </a:solidFill>
                 <a:latin typeface="Helvetica Neue"/>
                 <a:ea typeface="Helvetica Neue"/>
@@ -8509,7 +8541,7 @@
             <a:r>
               <a:rPr sz="1125" b="0">
                 <a:solidFill>
-                  <a:srgbClr val="BFE6FF"/>
+                  <a:srgbClr val="BDC4D4"/>
                 </a:solidFill>
                 <a:latin typeface="Helvetica Neue"/>
                 <a:ea typeface="Helvetica Neue"/>
@@ -8525,7 +8557,7 @@
           <p:cNvPr id="21" name="">
             <a:extLst xmlns:a="http://schemas.openxmlformats.org/drawingml/2006/main">
               <a:ext uri="{FF2B5EF4-FFF2-40B4-BE49-F238E27FC236}">
-                <a16:creationId xmlns:a16="http://schemas.microsoft.com/office/drawing/2014/main" id="{95D090A1-224B-4744-B076-863F878F1A26}"/>
+                <a16:creationId xmlns:a16="http://schemas.microsoft.com/office/drawing/2014/main" id="{B956021E-7F76-4CD6-81AE-1F4497F6E08B}"/>
               </a:ext>
             </a:extLst>
           </p:cNvPr>
@@ -8543,7 +8575,7 @@
             <a:avLst/>
           </a:prstGeom>
           <a:solidFill xmlns:a="http://schemas.openxmlformats.org/drawingml/2006/main">
-            <a:srgbClr val="D8E5F2"/>
+            <a:srgbClr val="BDC4D4"/>
           </a:solidFill>
           <a:ln xmlns:a="http://schemas.openxmlformats.org/drawingml/2006/main" w="0">
             <a:noFill/>
@@ -8555,7 +8587,7 @@
           <p:cNvPr id="22" name="">
             <a:extLst xmlns:a="http://schemas.openxmlformats.org/drawingml/2006/main">
               <a:ext uri="{FF2B5EF4-FFF2-40B4-BE49-F238E27FC236}">
-                <a16:creationId xmlns:a16="http://schemas.microsoft.com/office/drawing/2014/main" id="{270AB5EE-A0DA-45CB-93FA-1802BBAA2492}"/>
+                <a16:creationId xmlns:a16="http://schemas.microsoft.com/office/drawing/2014/main" id="{37139C07-B02F-47B3-810D-0A95AD5A4F7C}"/>
               </a:ext>
             </a:extLst>
           </p:cNvPr>
@@ -8586,7 +8618,7 @@
             <a:pPr algn="l">
               <a:defRPr sz="750" b="0">
                 <a:solidFill>
-                  <a:srgbClr val="61718A"/>
+                  <a:srgbClr val="52677D"/>
                 </a:solidFill>
                 <a:latin typeface="Helvetica Neue"/>
                 <a:ea typeface="Helvetica Neue"/>
@@ -8596,7 +8628,7 @@
             <a:r>
               <a:rPr sz="750" b="0">
                 <a:solidFill>
-                  <a:srgbClr val="61718A"/>
+                  <a:srgbClr val="52677D"/>
                 </a:solidFill>
                 <a:latin typeface="Helvetica Neue"/>
                 <a:ea typeface="Helvetica Neue"/>
@@ -8612,7 +8644,7 @@
           <p:cNvPr id="23" name="">
             <a:extLst xmlns:a="http://schemas.openxmlformats.org/drawingml/2006/main">
               <a:ext uri="{FF2B5EF4-FFF2-40B4-BE49-F238E27FC236}">
-                <a16:creationId xmlns:a16="http://schemas.microsoft.com/office/drawing/2014/main" id="{D17AA2B4-B1AB-4440-AB6F-C13070F36D0F}"/>
+                <a16:creationId xmlns:a16="http://schemas.microsoft.com/office/drawing/2014/main" id="{7412D8F2-8122-4161-BE65-5A6A503397E9}"/>
               </a:ext>
             </a:extLst>
           </p:cNvPr>
@@ -8643,7 +8675,7 @@
             <a:pPr algn="r">
               <a:defRPr sz="825" b="1">
                 <a:solidFill>
-                  <a:srgbClr val="2563EB"/>
+                  <a:srgbClr val="52677D"/>
                 </a:solidFill>
                 <a:latin typeface="Helvetica Neue"/>
                 <a:ea typeface="Helvetica Neue"/>
@@ -8653,7 +8685,7 @@
             <a:r>
               <a:rPr sz="825" b="1">
                 <a:solidFill>
-                  <a:srgbClr val="2563EB"/>
+                  <a:srgbClr val="52677D"/>
                 </a:solidFill>
                 <a:latin typeface="Helvetica Neue"/>
                 <a:ea typeface="Helvetica Neue"/>
@@ -8667,7 +8699,7 @@
     </p:spTree>
     <p:extLst>
       <p:ext uri="{BB962C8B-B14F-4D97-AF65-F5344CB8AC3E}">
-        <p14:creationId xmlns:p14="http://schemas.microsoft.com/office/powerpoint/2010/main" val="1802234723"/>
+        <p14:creationId xmlns:p14="http://schemas.microsoft.com/office/powerpoint/2010/main" val="729771160"/>
       </p:ext>
     </p:extLst>
   </p:cSld>
@@ -8698,7 +8730,7 @@
           <p:cNvPr id="24" name="">
             <a:extLst xmlns:a="http://schemas.openxmlformats.org/drawingml/2006/main">
               <a:ext uri="{FF2B5EF4-FFF2-40B4-BE49-F238E27FC236}">
-                <a16:creationId xmlns:a16="http://schemas.microsoft.com/office/drawing/2014/main" id="{A027BD59-7306-45B5-BF54-2051EBC46104}"/>
+                <a16:creationId xmlns:a16="http://schemas.microsoft.com/office/drawing/2014/main" id="{C062F0D9-194A-4A64-B05F-72F148AF0233}"/>
               </a:ext>
             </a:extLst>
           </p:cNvPr>
@@ -8716,7 +8748,7 @@
             <a:avLst/>
           </a:prstGeom>
           <a:solidFill xmlns:a="http://schemas.openxmlformats.org/drawingml/2006/main">
-            <a:srgbClr val="6C5CE7"/>
+            <a:srgbClr val="1C2E4A"/>
           </a:solidFill>
           <a:ln xmlns:a="http://schemas.openxmlformats.org/drawingml/2006/main" w="0">
             <a:noFill/>
@@ -8728,7 +8760,7 @@
           <p:cNvPr id="2" name="">
             <a:extLst xmlns:a="http://schemas.openxmlformats.org/drawingml/2006/main">
               <a:ext uri="{FF2B5EF4-FFF2-40B4-BE49-F238E27FC236}">
-                <a16:creationId xmlns:a16="http://schemas.microsoft.com/office/drawing/2014/main" id="{9F5BB06F-9933-42A0-9B0B-D57D7C5A3CCF}"/>
+                <a16:creationId xmlns:a16="http://schemas.microsoft.com/office/drawing/2014/main" id="{D2751C1C-C284-48DA-88E3-D216A998EB40}"/>
               </a:ext>
             </a:extLst>
           </p:cNvPr>
@@ -8759,7 +8791,7 @@
             <a:pPr algn="l">
               <a:defRPr sz="1125" b="1">
                 <a:solidFill>
-                  <a:srgbClr val="2563EB"/>
+                  <a:srgbClr val="52677D"/>
                 </a:solidFill>
                 <a:latin typeface="Helvetica Neue"/>
                 <a:ea typeface="Helvetica Neue"/>
@@ -8769,7 +8801,7 @@
             <a:r>
               <a:rPr sz="1125" b="1">
                 <a:solidFill>
-                  <a:srgbClr val="2563EB"/>
+                  <a:srgbClr val="52677D"/>
                 </a:solidFill>
                 <a:latin typeface="Helvetica Neue"/>
                 <a:ea typeface="Helvetica Neue"/>
@@ -8785,7 +8817,7 @@
           <p:cNvPr id="3" name="">
             <a:extLst xmlns:a="http://schemas.openxmlformats.org/drawingml/2006/main">
               <a:ext uri="{FF2B5EF4-FFF2-40B4-BE49-F238E27FC236}">
-                <a16:creationId xmlns:a16="http://schemas.microsoft.com/office/drawing/2014/main" id="{A9E6F626-50BA-4F8D-824A-C33509975914}"/>
+                <a16:creationId xmlns:a16="http://schemas.microsoft.com/office/drawing/2014/main" id="{397264DA-099A-4F02-A62A-415753819B14}"/>
               </a:ext>
             </a:extLst>
           </p:cNvPr>
@@ -8805,7 +8837,7 @@
             </a:avLst>
           </a:prstGeom>
           <a:solidFill xmlns:a="http://schemas.openxmlformats.org/drawingml/2006/main">
-            <a:srgbClr val="FFD43B"/>
+            <a:srgbClr val="D1CFC9"/>
           </a:solidFill>
           <a:ln xmlns:a="http://schemas.openxmlformats.org/drawingml/2006/main" w="0">
             <a:noFill/>
@@ -8817,7 +8849,7 @@
           <p:cNvPr id="4" name="">
             <a:extLst xmlns:a="http://schemas.openxmlformats.org/drawingml/2006/main">
               <a:ext uri="{FF2B5EF4-FFF2-40B4-BE49-F238E27FC236}">
-                <a16:creationId xmlns:a16="http://schemas.microsoft.com/office/drawing/2014/main" id="{4E70A132-05ED-49B7-9239-C6D63B58ECAC}"/>
+                <a16:creationId xmlns:a16="http://schemas.microsoft.com/office/drawing/2014/main" id="{DF4CE8DC-0A56-474A-BDE3-F44DF1F778CC}"/>
               </a:ext>
             </a:extLst>
           </p:cNvPr>
@@ -8848,7 +8880,7 @@
             <a:pPr algn="ctr">
               <a:defRPr sz="1275" b="1">
                 <a:solidFill>
-                  <a:srgbClr val="092454"/>
+                  <a:srgbClr val="1C2E4A"/>
                 </a:solidFill>
                 <a:latin typeface="Helvetica Neue"/>
                 <a:ea typeface="Helvetica Neue"/>
@@ -8858,7 +8890,7 @@
             <a:r>
               <a:rPr sz="1275" b="1">
                 <a:solidFill>
-                  <a:srgbClr val="092454"/>
+                  <a:srgbClr val="1C2E4A"/>
                 </a:solidFill>
                 <a:latin typeface="Helvetica Neue"/>
                 <a:ea typeface="Helvetica Neue"/>
@@ -8874,7 +8906,7 @@
           <p:cNvPr id="5" name="">
             <a:extLst xmlns:a="http://schemas.openxmlformats.org/drawingml/2006/main">
               <a:ext uri="{FF2B5EF4-FFF2-40B4-BE49-F238E27FC236}">
-                <a16:creationId xmlns:a16="http://schemas.microsoft.com/office/drawing/2014/main" id="{553B5F6C-5DEE-4391-9C93-59AB4248D848}"/>
+                <a16:creationId xmlns:a16="http://schemas.microsoft.com/office/drawing/2014/main" id="{B0E4B43C-6246-4A6C-B719-D5C225B3E52D}"/>
               </a:ext>
             </a:extLst>
           </p:cNvPr>
@@ -8905,7 +8937,7 @@
             <a:pPr algn="l">
               <a:defRPr sz="2550" b="1">
                 <a:solidFill>
-                  <a:srgbClr val="092454"/>
+                  <a:srgbClr val="1C2E4A"/>
                 </a:solidFill>
                 <a:latin typeface="Helvetica Neue"/>
                 <a:ea typeface="Helvetica Neue"/>
@@ -8915,7 +8947,7 @@
             <a:r>
               <a:rPr sz="2550" b="1">
                 <a:solidFill>
-                  <a:srgbClr val="092454"/>
+                  <a:srgbClr val="1C2E4A"/>
                 </a:solidFill>
                 <a:latin typeface="Helvetica Neue"/>
                 <a:ea typeface="Helvetica Neue"/>
@@ -8931,7 +8963,7 @@
           <p:cNvPr id="6" name="">
             <a:extLst xmlns:a="http://schemas.openxmlformats.org/drawingml/2006/main">
               <a:ext uri="{FF2B5EF4-FFF2-40B4-BE49-F238E27FC236}">
-                <a16:creationId xmlns:a16="http://schemas.microsoft.com/office/drawing/2014/main" id="{7DAE9E6C-D755-421A-8FF7-FE7D56F127C5}"/>
+                <a16:creationId xmlns:a16="http://schemas.microsoft.com/office/drawing/2014/main" id="{73C5B675-CD74-413C-BBA8-E16D2FD7EC57}"/>
               </a:ext>
             </a:extLst>
           </p:cNvPr>
@@ -8951,7 +8983,7 @@
             </a:avLst>
           </a:prstGeom>
           <a:solidFill xmlns:a="http://schemas.openxmlformats.org/drawingml/2006/main">
-            <a:srgbClr val="EEF7FF"/>
+            <a:srgbClr val="D1CFC9"/>
           </a:solidFill>
           <a:ln xmlns:a="http://schemas.openxmlformats.org/drawingml/2006/main" w="0">
             <a:noFill/>
@@ -8963,7 +8995,7 @@
           <p:cNvPr id="7" name="">
             <a:extLst xmlns:a="http://schemas.openxmlformats.org/drawingml/2006/main">
               <a:ext uri="{FF2B5EF4-FFF2-40B4-BE49-F238E27FC236}">
-                <a16:creationId xmlns:a16="http://schemas.microsoft.com/office/drawing/2014/main" id="{5B198E2D-ECF1-4A74-BD70-789865F06ABF}"/>
+                <a16:creationId xmlns:a16="http://schemas.microsoft.com/office/drawing/2014/main" id="{36A6598B-CE6E-41BB-961B-78BCC9E7D8EB}"/>
               </a:ext>
             </a:extLst>
           </p:cNvPr>
@@ -8994,7 +9026,7 @@
             <a:pPr algn="ctr">
               <a:defRPr sz="1350" b="1">
                 <a:solidFill>
-                  <a:srgbClr val="2563EB"/>
+                  <a:srgbClr val="52677D"/>
                 </a:solidFill>
                 <a:latin typeface="Helvetica Neue"/>
                 <a:ea typeface="Helvetica Neue"/>
@@ -9004,7 +9036,7 @@
             <a:r>
               <a:rPr sz="1350" b="1">
                 <a:solidFill>
-                  <a:srgbClr val="2563EB"/>
+                  <a:srgbClr val="52677D"/>
                 </a:solidFill>
                 <a:latin typeface="Helvetica Neue"/>
                 <a:ea typeface="Helvetica Neue"/>
@@ -9020,7 +9052,7 @@
           <p:cNvPr id="8" name="">
             <a:extLst xmlns:a="http://schemas.openxmlformats.org/drawingml/2006/main">
               <a:ext uri="{FF2B5EF4-FFF2-40B4-BE49-F238E27FC236}">
-                <a16:creationId xmlns:a16="http://schemas.microsoft.com/office/drawing/2014/main" id="{63506E4B-16FC-49C0-B42E-EEB4150303B6}"/>
+                <a16:creationId xmlns:a16="http://schemas.microsoft.com/office/drawing/2014/main" id="{C90CD271-7EB5-4EB7-97F4-4C39A66D809B}"/>
               </a:ext>
             </a:extLst>
           </p:cNvPr>
@@ -9051,7 +9083,7 @@
             <a:pPr algn="l">
               <a:defRPr sz="1575" b="0">
                 <a:solidFill>
-                  <a:srgbClr val="10213D"/>
+                  <a:srgbClr val="0F1A2B"/>
                 </a:solidFill>
                 <a:latin typeface="Helvetica Neue"/>
                 <a:ea typeface="Helvetica Neue"/>
@@ -9061,7 +9093,7 @@
             <a:r>
               <a:rPr sz="1575" b="0">
                 <a:solidFill>
-                  <a:srgbClr val="10213D"/>
+                  <a:srgbClr val="0F1A2B"/>
                 </a:solidFill>
                 <a:latin typeface="Helvetica Neue"/>
                 <a:ea typeface="Helvetica Neue"/>
@@ -9077,7 +9109,7 @@
           <p:cNvPr id="9" name="">
             <a:extLst xmlns:a="http://schemas.openxmlformats.org/drawingml/2006/main">
               <a:ext uri="{FF2B5EF4-FFF2-40B4-BE49-F238E27FC236}">
-                <a16:creationId xmlns:a16="http://schemas.microsoft.com/office/drawing/2014/main" id="{7545784D-067A-40AF-A2FA-E507BCFC7620}"/>
+                <a16:creationId xmlns:a16="http://schemas.microsoft.com/office/drawing/2014/main" id="{F0382792-F03A-4FCB-BC0D-2E11DAA8A460}"/>
               </a:ext>
             </a:extLst>
           </p:cNvPr>
@@ -9097,7 +9129,7 @@
             </a:avLst>
           </a:prstGeom>
           <a:solidFill xmlns:a="http://schemas.openxmlformats.org/drawingml/2006/main">
-            <a:srgbClr val="EEF7FF"/>
+            <a:srgbClr val="D1CFC9"/>
           </a:solidFill>
           <a:ln xmlns:a="http://schemas.openxmlformats.org/drawingml/2006/main" w="0">
             <a:noFill/>
@@ -9109,7 +9141,7 @@
           <p:cNvPr id="10" name="">
             <a:extLst xmlns:a="http://schemas.openxmlformats.org/drawingml/2006/main">
               <a:ext uri="{FF2B5EF4-FFF2-40B4-BE49-F238E27FC236}">
-                <a16:creationId xmlns:a16="http://schemas.microsoft.com/office/drawing/2014/main" id="{3615A283-CC5C-4F28-B457-D17EEFED90E5}"/>
+                <a16:creationId xmlns:a16="http://schemas.microsoft.com/office/drawing/2014/main" id="{50DA6C20-6A61-4994-986A-6A7CD6256839}"/>
               </a:ext>
             </a:extLst>
           </p:cNvPr>
@@ -9140,7 +9172,7 @@
             <a:pPr algn="ctr">
               <a:defRPr sz="1350" b="1">
                 <a:solidFill>
-                  <a:srgbClr val="2563EB"/>
+                  <a:srgbClr val="52677D"/>
                 </a:solidFill>
                 <a:latin typeface="Helvetica Neue"/>
                 <a:ea typeface="Helvetica Neue"/>
@@ -9150,7 +9182,7 @@
             <a:r>
               <a:rPr sz="1350" b="1">
                 <a:solidFill>
-                  <a:srgbClr val="2563EB"/>
+                  <a:srgbClr val="52677D"/>
                 </a:solidFill>
                 <a:latin typeface="Helvetica Neue"/>
                 <a:ea typeface="Helvetica Neue"/>
@@ -9166,7 +9198,7 @@
           <p:cNvPr id="11" name="">
             <a:extLst xmlns:a="http://schemas.openxmlformats.org/drawingml/2006/main">
               <a:ext uri="{FF2B5EF4-FFF2-40B4-BE49-F238E27FC236}">
-                <a16:creationId xmlns:a16="http://schemas.microsoft.com/office/drawing/2014/main" id="{784DA420-A94E-4F6F-9800-130DA2E85B0D}"/>
+                <a16:creationId xmlns:a16="http://schemas.microsoft.com/office/drawing/2014/main" id="{BD522A68-B3E9-4748-AEB5-61C5015D65C7}"/>
               </a:ext>
             </a:extLst>
           </p:cNvPr>
@@ -9197,7 +9229,7 @@
             <a:pPr algn="l">
               <a:defRPr sz="1575" b="0">
                 <a:solidFill>
-                  <a:srgbClr val="10213D"/>
+                  <a:srgbClr val="0F1A2B"/>
                 </a:solidFill>
                 <a:latin typeface="Helvetica Neue"/>
                 <a:ea typeface="Helvetica Neue"/>
@@ -9207,7 +9239,7 @@
             <a:r>
               <a:rPr sz="1575" b="0">
                 <a:solidFill>
-                  <a:srgbClr val="10213D"/>
+                  <a:srgbClr val="0F1A2B"/>
                 </a:solidFill>
                 <a:latin typeface="Helvetica Neue"/>
                 <a:ea typeface="Helvetica Neue"/>
@@ -9223,7 +9255,7 @@
           <p:cNvPr id="12" name="">
             <a:extLst xmlns:a="http://schemas.openxmlformats.org/drawingml/2006/main">
               <a:ext uri="{FF2B5EF4-FFF2-40B4-BE49-F238E27FC236}">
-                <a16:creationId xmlns:a16="http://schemas.microsoft.com/office/drawing/2014/main" id="{5F94807B-D6A7-4726-AD53-F9153CA42138}"/>
+                <a16:creationId xmlns:a16="http://schemas.microsoft.com/office/drawing/2014/main" id="{0B65C10F-FEFA-49D3-A154-B0E877B9D4F3}"/>
               </a:ext>
             </a:extLst>
           </p:cNvPr>
@@ -9243,7 +9275,7 @@
             </a:avLst>
           </a:prstGeom>
           <a:solidFill xmlns:a="http://schemas.openxmlformats.org/drawingml/2006/main">
-            <a:srgbClr val="EEF7FF"/>
+            <a:srgbClr val="D1CFC9"/>
           </a:solidFill>
           <a:ln xmlns:a="http://schemas.openxmlformats.org/drawingml/2006/main" w="0">
             <a:noFill/>
@@ -9255,7 +9287,7 @@
           <p:cNvPr id="13" name="">
             <a:extLst xmlns:a="http://schemas.openxmlformats.org/drawingml/2006/main">
               <a:ext uri="{FF2B5EF4-FFF2-40B4-BE49-F238E27FC236}">
-                <a16:creationId xmlns:a16="http://schemas.microsoft.com/office/drawing/2014/main" id="{32F7D37B-9F1A-4780-8F35-2DF5C9E9922B}"/>
+                <a16:creationId xmlns:a16="http://schemas.microsoft.com/office/drawing/2014/main" id="{8EB498CA-C919-4D81-936B-B8B05825684A}"/>
               </a:ext>
             </a:extLst>
           </p:cNvPr>
@@ -9286,7 +9318,7 @@
             <a:pPr algn="ctr">
               <a:defRPr sz="1350" b="1">
                 <a:solidFill>
-                  <a:srgbClr val="2563EB"/>
+                  <a:srgbClr val="52677D"/>
                 </a:solidFill>
                 <a:latin typeface="Helvetica Neue"/>
                 <a:ea typeface="Helvetica Neue"/>
@@ -9296,7 +9328,7 @@
             <a:r>
               <a:rPr sz="1350" b="1">
                 <a:solidFill>
-                  <a:srgbClr val="2563EB"/>
+                  <a:srgbClr val="52677D"/>
                 </a:solidFill>
                 <a:latin typeface="Helvetica Neue"/>
                 <a:ea typeface="Helvetica Neue"/>
@@ -9312,7 +9344,7 @@
           <p:cNvPr id="14" name="">
             <a:extLst xmlns:a="http://schemas.openxmlformats.org/drawingml/2006/main">
               <a:ext uri="{FF2B5EF4-FFF2-40B4-BE49-F238E27FC236}">
-                <a16:creationId xmlns:a16="http://schemas.microsoft.com/office/drawing/2014/main" id="{A25C8C80-8809-46CC-9750-C17A4BBC0F06}"/>
+                <a16:creationId xmlns:a16="http://schemas.microsoft.com/office/drawing/2014/main" id="{CF260233-7783-48AA-844D-3959CE0DB05E}"/>
               </a:ext>
             </a:extLst>
           </p:cNvPr>
@@ -9343,7 +9375,7 @@
             <a:pPr algn="l">
               <a:defRPr sz="1575" b="0">
                 <a:solidFill>
-                  <a:srgbClr val="10213D"/>
+                  <a:srgbClr val="0F1A2B"/>
                 </a:solidFill>
                 <a:latin typeface="Helvetica Neue"/>
                 <a:ea typeface="Helvetica Neue"/>
@@ -9353,7 +9385,7 @@
             <a:r>
               <a:rPr sz="1575" b="0">
                 <a:solidFill>
-                  <a:srgbClr val="10213D"/>
+                  <a:srgbClr val="0F1A2B"/>
                 </a:solidFill>
                 <a:latin typeface="Helvetica Neue"/>
                 <a:ea typeface="Helvetica Neue"/>
@@ -9369,7 +9401,7 @@
           <p:cNvPr id="15" name="">
             <a:extLst xmlns:a="http://schemas.openxmlformats.org/drawingml/2006/main">
               <a:ext uri="{FF2B5EF4-FFF2-40B4-BE49-F238E27FC236}">
-                <a16:creationId xmlns:a16="http://schemas.microsoft.com/office/drawing/2014/main" id="{075269E5-72EC-41FA-98DC-C2A260966703}"/>
+                <a16:creationId xmlns:a16="http://schemas.microsoft.com/office/drawing/2014/main" id="{2237F537-70C6-496C-95CB-A67D7CBD9FC7}"/>
               </a:ext>
             </a:extLst>
           </p:cNvPr>
@@ -9389,7 +9421,7 @@
             </a:avLst>
           </a:prstGeom>
           <a:solidFill xmlns:a="http://schemas.openxmlformats.org/drawingml/2006/main">
-            <a:srgbClr val="EEF7FF"/>
+            <a:srgbClr val="D1CFC9"/>
           </a:solidFill>
           <a:ln xmlns:a="http://schemas.openxmlformats.org/drawingml/2006/main" w="0">
             <a:noFill/>
@@ -9401,7 +9433,7 @@
           <p:cNvPr id="16" name="">
             <a:extLst xmlns:a="http://schemas.openxmlformats.org/drawingml/2006/main">
               <a:ext uri="{FF2B5EF4-FFF2-40B4-BE49-F238E27FC236}">
-                <a16:creationId xmlns:a16="http://schemas.microsoft.com/office/drawing/2014/main" id="{97AD9FCB-90D4-48CB-8709-5299E52C3B5A}"/>
+                <a16:creationId xmlns:a16="http://schemas.microsoft.com/office/drawing/2014/main" id="{F478A8EE-A1AB-40AF-A301-792F1B701168}"/>
               </a:ext>
             </a:extLst>
           </p:cNvPr>
@@ -9432,7 +9464,7 @@
             <a:pPr algn="l">
               <a:defRPr sz="1125" b="0">
                 <a:solidFill>
-                  <a:srgbClr val="092454"/>
+                  <a:srgbClr val="1C2E4A"/>
                 </a:solidFill>
                 <a:latin typeface="Helvetica Neue"/>
                 <a:ea typeface="Helvetica Neue"/>
@@ -9442,7 +9474,7 @@
             <a:r>
               <a:rPr sz="1125" b="0">
                 <a:solidFill>
-                  <a:srgbClr val="092454"/>
+                  <a:srgbClr val="1C2E4A"/>
                 </a:solidFill>
                 <a:latin typeface="Helvetica Neue"/>
                 <a:ea typeface="Helvetica Neue"/>
@@ -9458,7 +9490,7 @@
           <p:cNvPr id="17" name="">
             <a:extLst xmlns:a="http://schemas.openxmlformats.org/drawingml/2006/main">
               <a:ext uri="{FF2B5EF4-FFF2-40B4-BE49-F238E27FC236}">
-                <a16:creationId xmlns:a16="http://schemas.microsoft.com/office/drawing/2014/main" id="{7B870DD3-3450-4792-9C61-DA58E9A5E385}"/>
+                <a16:creationId xmlns:a16="http://schemas.microsoft.com/office/drawing/2014/main" id="{F53AFD16-ACB5-4027-ACA9-4E45FD815FBE}"/>
               </a:ext>
             </a:extLst>
           </p:cNvPr>
@@ -9478,7 +9510,7 @@
             </a:avLst>
           </a:prstGeom>
           <a:solidFill xmlns:a="http://schemas.openxmlformats.org/drawingml/2006/main">
-            <a:srgbClr val="092454"/>
+            <a:srgbClr val="1C2E4A"/>
           </a:solidFill>
           <a:ln xmlns:a="http://schemas.openxmlformats.org/drawingml/2006/main" w="0">
             <a:noFill/>
@@ -9490,7 +9522,7 @@
           <p:cNvPr id="18" name="">
             <a:extLst xmlns:a="http://schemas.openxmlformats.org/drawingml/2006/main">
               <a:ext uri="{FF2B5EF4-FFF2-40B4-BE49-F238E27FC236}">
-                <a16:creationId xmlns:a16="http://schemas.microsoft.com/office/drawing/2014/main" id="{399174EB-A95A-4632-BA79-8C51AB12D0F1}"/>
+                <a16:creationId xmlns:a16="http://schemas.microsoft.com/office/drawing/2014/main" id="{18D8285E-E068-40A9-8881-7F208452B37B}"/>
               </a:ext>
             </a:extLst>
           </p:cNvPr>
@@ -9521,7 +9553,7 @@
             <a:pPr algn="l">
               <a:defRPr sz="1050" b="1">
                 <a:solidFill>
-                  <a:srgbClr val="FFD43B"/>
+                  <a:srgbClr val="D1CFC9"/>
                 </a:solidFill>
                 <a:latin typeface="Helvetica Neue"/>
                 <a:ea typeface="Helvetica Neue"/>
@@ -9531,7 +9563,7 @@
             <a:r>
               <a:rPr sz="1050" b="1">
                 <a:solidFill>
-                  <a:srgbClr val="FFD43B"/>
+                  <a:srgbClr val="D1CFC9"/>
                 </a:solidFill>
                 <a:latin typeface="Helvetica Neue"/>
                 <a:ea typeface="Helvetica Neue"/>
@@ -9547,7 +9579,7 @@
           <p:cNvPr id="19" name="">
             <a:extLst xmlns:a="http://schemas.openxmlformats.org/drawingml/2006/main">
               <a:ext uri="{FF2B5EF4-FFF2-40B4-BE49-F238E27FC236}">
-                <a16:creationId xmlns:a16="http://schemas.microsoft.com/office/drawing/2014/main" id="{8178C844-F24E-484D-9219-5B91FD4D5A7F}"/>
+                <a16:creationId xmlns:a16="http://schemas.microsoft.com/office/drawing/2014/main" id="{73626BDB-73D4-48C1-84A2-898D03A7D7C5}"/>
               </a:ext>
             </a:extLst>
           </p:cNvPr>
@@ -9604,7 +9636,7 @@
           <p:cNvPr id="20" name="">
             <a:extLst xmlns:a="http://schemas.openxmlformats.org/drawingml/2006/main">
               <a:ext uri="{FF2B5EF4-FFF2-40B4-BE49-F238E27FC236}">
-                <a16:creationId xmlns:a16="http://schemas.microsoft.com/office/drawing/2014/main" id="{ED49B775-87DF-4F37-ADDA-A4DFE808EF48}"/>
+                <a16:creationId xmlns:a16="http://schemas.microsoft.com/office/drawing/2014/main" id="{DB8A8165-B77F-4BBF-883D-1BF51143F84A}"/>
               </a:ext>
             </a:extLst>
           </p:cNvPr>
@@ -9635,7 +9667,7 @@
             <a:pPr algn="l">
               <a:defRPr sz="1125" b="0">
                 <a:solidFill>
-                  <a:srgbClr val="BFE6FF"/>
+                  <a:srgbClr val="BDC4D4"/>
                 </a:solidFill>
                 <a:latin typeface="Helvetica Neue"/>
                 <a:ea typeface="Helvetica Neue"/>
@@ -9645,7 +9677,7 @@
             <a:r>
               <a:rPr sz="1125" b="0">
                 <a:solidFill>
-                  <a:srgbClr val="BFE6FF"/>
+                  <a:srgbClr val="BDC4D4"/>
                 </a:solidFill>
                 <a:latin typeface="Helvetica Neue"/>
                 <a:ea typeface="Helvetica Neue"/>
@@ -9661,7 +9693,7 @@
           <p:cNvPr id="21" name="">
             <a:extLst xmlns:a="http://schemas.openxmlformats.org/drawingml/2006/main">
               <a:ext uri="{FF2B5EF4-FFF2-40B4-BE49-F238E27FC236}">
-                <a16:creationId xmlns:a16="http://schemas.microsoft.com/office/drawing/2014/main" id="{FEA3852D-46D6-4F14-A406-8D959D2C45A9}"/>
+                <a16:creationId xmlns:a16="http://schemas.microsoft.com/office/drawing/2014/main" id="{0DEEAC65-DEC2-4239-B205-20F3DD00468A}"/>
               </a:ext>
             </a:extLst>
           </p:cNvPr>
@@ -9679,7 +9711,7 @@
             <a:avLst/>
           </a:prstGeom>
           <a:solidFill xmlns:a="http://schemas.openxmlformats.org/drawingml/2006/main">
-            <a:srgbClr val="D8E5F2"/>
+            <a:srgbClr val="BDC4D4"/>
           </a:solidFill>
           <a:ln xmlns:a="http://schemas.openxmlformats.org/drawingml/2006/main" w="0">
             <a:noFill/>
@@ -9691,7 +9723,7 @@
           <p:cNvPr id="22" name="">
             <a:extLst xmlns:a="http://schemas.openxmlformats.org/drawingml/2006/main">
               <a:ext uri="{FF2B5EF4-FFF2-40B4-BE49-F238E27FC236}">
-                <a16:creationId xmlns:a16="http://schemas.microsoft.com/office/drawing/2014/main" id="{C9ABE048-4A66-4314-A1EA-578D3AEC5F68}"/>
+                <a16:creationId xmlns:a16="http://schemas.microsoft.com/office/drawing/2014/main" id="{AC587381-FAE9-4694-9D81-8B20BD821C85}"/>
               </a:ext>
             </a:extLst>
           </p:cNvPr>
@@ -9722,7 +9754,7 @@
             <a:pPr algn="l">
               <a:defRPr sz="750" b="0">
                 <a:solidFill>
-                  <a:srgbClr val="61718A"/>
+                  <a:srgbClr val="52677D"/>
                 </a:solidFill>
                 <a:latin typeface="Helvetica Neue"/>
                 <a:ea typeface="Helvetica Neue"/>
@@ -9732,7 +9764,7 @@
             <a:r>
               <a:rPr sz="750" b="0">
                 <a:solidFill>
-                  <a:srgbClr val="61718A"/>
+                  <a:srgbClr val="52677D"/>
                 </a:solidFill>
                 <a:latin typeface="Helvetica Neue"/>
                 <a:ea typeface="Helvetica Neue"/>
@@ -9748,7 +9780,7 @@
           <p:cNvPr id="23" name="">
             <a:extLst xmlns:a="http://schemas.openxmlformats.org/drawingml/2006/main">
               <a:ext uri="{FF2B5EF4-FFF2-40B4-BE49-F238E27FC236}">
-                <a16:creationId xmlns:a16="http://schemas.microsoft.com/office/drawing/2014/main" id="{00DC8500-1490-48FB-A900-9375E5497260}"/>
+                <a16:creationId xmlns:a16="http://schemas.microsoft.com/office/drawing/2014/main" id="{0BCBEC50-0E51-4F43-9B9B-A8CD0C3A4387}"/>
               </a:ext>
             </a:extLst>
           </p:cNvPr>
@@ -9779,7 +9811,7 @@
             <a:pPr algn="r">
               <a:defRPr sz="825" b="1">
                 <a:solidFill>
-                  <a:srgbClr val="2563EB"/>
+                  <a:srgbClr val="52677D"/>
                 </a:solidFill>
                 <a:latin typeface="Helvetica Neue"/>
                 <a:ea typeface="Helvetica Neue"/>
@@ -9789,7 +9821,7 @@
             <a:r>
               <a:rPr sz="825" b="1">
                 <a:solidFill>
-                  <a:srgbClr val="2563EB"/>
+                  <a:srgbClr val="52677D"/>
                 </a:solidFill>
                 <a:latin typeface="Helvetica Neue"/>
                 <a:ea typeface="Helvetica Neue"/>
@@ -9803,7 +9835,7 @@
     </p:spTree>
     <p:extLst>
       <p:ext uri="{BB962C8B-B14F-4D97-AF65-F5344CB8AC3E}">
-        <p14:creationId xmlns:p14="http://schemas.microsoft.com/office/powerpoint/2010/main" val="599376624"/>
+        <p14:creationId xmlns:p14="http://schemas.microsoft.com/office/powerpoint/2010/main" val="1765778883"/>
       </p:ext>
     </p:extLst>
   </p:cSld>
@@ -9834,7 +9866,7 @@
           <p:cNvPr id="24" name="">
             <a:extLst xmlns:a="http://schemas.openxmlformats.org/drawingml/2006/main">
               <a:ext uri="{FF2B5EF4-FFF2-40B4-BE49-F238E27FC236}">
-                <a16:creationId xmlns:a16="http://schemas.microsoft.com/office/drawing/2014/main" id="{3CBE67A6-8580-4EEB-87E5-DC360D062DC6}"/>
+                <a16:creationId xmlns:a16="http://schemas.microsoft.com/office/drawing/2014/main" id="{77FB328A-93E0-4501-914B-5E87766515D0}"/>
               </a:ext>
             </a:extLst>
           </p:cNvPr>
@@ -9852,7 +9884,7 @@
             <a:avLst/>
           </a:prstGeom>
           <a:solidFill xmlns:a="http://schemas.openxmlformats.org/drawingml/2006/main">
-            <a:srgbClr val="00A7A0"/>
+            <a:srgbClr val="1C2E4A"/>
           </a:solidFill>
           <a:ln xmlns:a="http://schemas.openxmlformats.org/drawingml/2006/main" w="0">
             <a:noFill/>
@@ -9864,7 +9896,7 @@
           <p:cNvPr id="2" name="">
             <a:extLst xmlns:a="http://schemas.openxmlformats.org/drawingml/2006/main">
               <a:ext uri="{FF2B5EF4-FFF2-40B4-BE49-F238E27FC236}">
-                <a16:creationId xmlns:a16="http://schemas.microsoft.com/office/drawing/2014/main" id="{D81272B2-E7C5-4F66-9FAA-40E64C5DEC2B}"/>
+                <a16:creationId xmlns:a16="http://schemas.microsoft.com/office/drawing/2014/main" id="{1D34A3B0-C612-49A5-B126-82775E20E1D7}"/>
               </a:ext>
             </a:extLst>
           </p:cNvPr>
@@ -9895,7 +9927,7 @@
             <a:pPr algn="l">
               <a:defRPr sz="1125" b="1">
                 <a:solidFill>
-                  <a:srgbClr val="2563EB"/>
+                  <a:srgbClr val="52677D"/>
                 </a:solidFill>
                 <a:latin typeface="Helvetica Neue"/>
                 <a:ea typeface="Helvetica Neue"/>
@@ -9905,7 +9937,7 @@
             <a:r>
               <a:rPr sz="1125" b="1">
                 <a:solidFill>
-                  <a:srgbClr val="2563EB"/>
+                  <a:srgbClr val="52677D"/>
                 </a:solidFill>
                 <a:latin typeface="Helvetica Neue"/>
                 <a:ea typeface="Helvetica Neue"/>
@@ -9921,7 +9953,7 @@
           <p:cNvPr id="3" name="">
             <a:extLst xmlns:a="http://schemas.openxmlformats.org/drawingml/2006/main">
               <a:ext uri="{FF2B5EF4-FFF2-40B4-BE49-F238E27FC236}">
-                <a16:creationId xmlns:a16="http://schemas.microsoft.com/office/drawing/2014/main" id="{C6A845A4-722C-41D7-8F61-D0F345DAFEEE}"/>
+                <a16:creationId xmlns:a16="http://schemas.microsoft.com/office/drawing/2014/main" id="{84BE0FD2-E049-4654-8AA8-1261893370FC}"/>
               </a:ext>
             </a:extLst>
           </p:cNvPr>
@@ -9941,7 +9973,7 @@
             </a:avLst>
           </a:prstGeom>
           <a:solidFill xmlns:a="http://schemas.openxmlformats.org/drawingml/2006/main">
-            <a:srgbClr val="FFD43B"/>
+            <a:srgbClr val="D1CFC9"/>
           </a:solidFill>
           <a:ln xmlns:a="http://schemas.openxmlformats.org/drawingml/2006/main" w="0">
             <a:noFill/>
@@ -9953,7 +9985,7 @@
           <p:cNvPr id="4" name="">
             <a:extLst xmlns:a="http://schemas.openxmlformats.org/drawingml/2006/main">
               <a:ext uri="{FF2B5EF4-FFF2-40B4-BE49-F238E27FC236}">
-                <a16:creationId xmlns:a16="http://schemas.microsoft.com/office/drawing/2014/main" id="{F393085C-EBD6-49A4-9AC2-92F409DBE279}"/>
+                <a16:creationId xmlns:a16="http://schemas.microsoft.com/office/drawing/2014/main" id="{637D1C42-7D18-4310-9A14-D16AAA078B18}"/>
               </a:ext>
             </a:extLst>
           </p:cNvPr>
@@ -9984,7 +10016,7 @@
             <a:pPr algn="ctr">
               <a:defRPr sz="1275" b="1">
                 <a:solidFill>
-                  <a:srgbClr val="092454"/>
+                  <a:srgbClr val="1C2E4A"/>
                 </a:solidFill>
                 <a:latin typeface="Helvetica Neue"/>
                 <a:ea typeface="Helvetica Neue"/>
@@ -9994,7 +10026,7 @@
             <a:r>
               <a:rPr sz="1275" b="1">
                 <a:solidFill>
-                  <a:srgbClr val="092454"/>
+                  <a:srgbClr val="1C2E4A"/>
                 </a:solidFill>
                 <a:latin typeface="Helvetica Neue"/>
                 <a:ea typeface="Helvetica Neue"/>
@@ -10010,7 +10042,7 @@
           <p:cNvPr id="5" name="">
             <a:extLst xmlns:a="http://schemas.openxmlformats.org/drawingml/2006/main">
               <a:ext uri="{FF2B5EF4-FFF2-40B4-BE49-F238E27FC236}">
-                <a16:creationId xmlns:a16="http://schemas.microsoft.com/office/drawing/2014/main" id="{0B662B7B-D347-49D2-87A1-9B4C7AAD6C78}"/>
+                <a16:creationId xmlns:a16="http://schemas.microsoft.com/office/drawing/2014/main" id="{B820D1AD-C4B8-45FB-BEBA-2DC73844D53C}"/>
               </a:ext>
             </a:extLst>
           </p:cNvPr>
@@ -10041,7 +10073,7 @@
             <a:pPr algn="l">
               <a:defRPr sz="2550" b="1">
                 <a:solidFill>
-                  <a:srgbClr val="092454"/>
+                  <a:srgbClr val="1C2E4A"/>
                 </a:solidFill>
                 <a:latin typeface="Helvetica Neue"/>
                 <a:ea typeface="Helvetica Neue"/>
@@ -10051,7 +10083,7 @@
             <a:r>
               <a:rPr sz="2550" b="1">
                 <a:solidFill>
-                  <a:srgbClr val="092454"/>
+                  <a:srgbClr val="1C2E4A"/>
                 </a:solidFill>
                 <a:latin typeface="Helvetica Neue"/>
                 <a:ea typeface="Helvetica Neue"/>
@@ -10067,7 +10099,7 @@
           <p:cNvPr id="6" name="">
             <a:extLst xmlns:a="http://schemas.openxmlformats.org/drawingml/2006/main">
               <a:ext uri="{FF2B5EF4-FFF2-40B4-BE49-F238E27FC236}">
-                <a16:creationId xmlns:a16="http://schemas.microsoft.com/office/drawing/2014/main" id="{9EF999B5-52F7-4826-A86B-CA987D80D587}"/>
+                <a16:creationId xmlns:a16="http://schemas.microsoft.com/office/drawing/2014/main" id="{4FCF48B0-1E53-4597-8BBC-71AF5C5803B9}"/>
               </a:ext>
             </a:extLst>
           </p:cNvPr>
@@ -10087,7 +10119,7 @@
             </a:avLst>
           </a:prstGeom>
           <a:solidFill xmlns:a="http://schemas.openxmlformats.org/drawingml/2006/main">
-            <a:srgbClr val="EEF7FF"/>
+            <a:srgbClr val="D1CFC9"/>
           </a:solidFill>
           <a:ln xmlns:a="http://schemas.openxmlformats.org/drawingml/2006/main" w="0">
             <a:noFill/>
@@ -10099,7 +10131,7 @@
           <p:cNvPr id="7" name="">
             <a:extLst xmlns:a="http://schemas.openxmlformats.org/drawingml/2006/main">
               <a:ext uri="{FF2B5EF4-FFF2-40B4-BE49-F238E27FC236}">
-                <a16:creationId xmlns:a16="http://schemas.microsoft.com/office/drawing/2014/main" id="{78FD2657-7ECD-49DD-96C4-4EAAA28B600D}"/>
+                <a16:creationId xmlns:a16="http://schemas.microsoft.com/office/drawing/2014/main" id="{933F8537-D10C-4A39-87FE-8772BD511AEB}"/>
               </a:ext>
             </a:extLst>
           </p:cNvPr>
@@ -10130,7 +10162,7 @@
             <a:pPr algn="ctr">
               <a:defRPr sz="1350" b="1">
                 <a:solidFill>
-                  <a:srgbClr val="2563EB"/>
+                  <a:srgbClr val="52677D"/>
                 </a:solidFill>
                 <a:latin typeface="Helvetica Neue"/>
                 <a:ea typeface="Helvetica Neue"/>
@@ -10140,7 +10172,7 @@
             <a:r>
               <a:rPr sz="1350" b="1">
                 <a:solidFill>
-                  <a:srgbClr val="2563EB"/>
+                  <a:srgbClr val="52677D"/>
                 </a:solidFill>
                 <a:latin typeface="Helvetica Neue"/>
                 <a:ea typeface="Helvetica Neue"/>
@@ -10156,7 +10188,7 @@
           <p:cNvPr id="8" name="">
             <a:extLst xmlns:a="http://schemas.openxmlformats.org/drawingml/2006/main">
               <a:ext uri="{FF2B5EF4-FFF2-40B4-BE49-F238E27FC236}">
-                <a16:creationId xmlns:a16="http://schemas.microsoft.com/office/drawing/2014/main" id="{E2E21893-A46A-461E-B8EF-47EE5B63AD9F}"/>
+                <a16:creationId xmlns:a16="http://schemas.microsoft.com/office/drawing/2014/main" id="{30C89CBA-D1A2-4D38-A4E3-9AA0FAD58920}"/>
               </a:ext>
             </a:extLst>
           </p:cNvPr>
@@ -10187,7 +10219,7 @@
             <a:pPr algn="l">
               <a:defRPr sz="1575" b="0">
                 <a:solidFill>
-                  <a:srgbClr val="10213D"/>
+                  <a:srgbClr val="0F1A2B"/>
                 </a:solidFill>
                 <a:latin typeface="Helvetica Neue"/>
                 <a:ea typeface="Helvetica Neue"/>
@@ -10197,7 +10229,7 @@
             <a:r>
               <a:rPr sz="1575" b="0">
                 <a:solidFill>
-                  <a:srgbClr val="10213D"/>
+                  <a:srgbClr val="0F1A2B"/>
                 </a:solidFill>
                 <a:latin typeface="Helvetica Neue"/>
                 <a:ea typeface="Helvetica Neue"/>
@@ -10213,7 +10245,7 @@
           <p:cNvPr id="9" name="">
             <a:extLst xmlns:a="http://schemas.openxmlformats.org/drawingml/2006/main">
               <a:ext uri="{FF2B5EF4-FFF2-40B4-BE49-F238E27FC236}">
-                <a16:creationId xmlns:a16="http://schemas.microsoft.com/office/drawing/2014/main" id="{AF9DB03B-A541-4012-B1D0-26BBB367447C}"/>
+                <a16:creationId xmlns:a16="http://schemas.microsoft.com/office/drawing/2014/main" id="{A56C9451-E789-42B1-BD48-7F42C5690A08}"/>
               </a:ext>
             </a:extLst>
           </p:cNvPr>
@@ -10233,7 +10265,7 @@
             </a:avLst>
           </a:prstGeom>
           <a:solidFill xmlns:a="http://schemas.openxmlformats.org/drawingml/2006/main">
-            <a:srgbClr val="EEF7FF"/>
+            <a:srgbClr val="D1CFC9"/>
           </a:solidFill>
           <a:ln xmlns:a="http://schemas.openxmlformats.org/drawingml/2006/main" w="0">
             <a:noFill/>
@@ -10245,7 +10277,7 @@
           <p:cNvPr id="10" name="">
             <a:extLst xmlns:a="http://schemas.openxmlformats.org/drawingml/2006/main">
               <a:ext uri="{FF2B5EF4-FFF2-40B4-BE49-F238E27FC236}">
-                <a16:creationId xmlns:a16="http://schemas.microsoft.com/office/drawing/2014/main" id="{BDBE3F07-7048-4276-A219-F95C5642ED53}"/>
+                <a16:creationId xmlns:a16="http://schemas.microsoft.com/office/drawing/2014/main" id="{63EAC63C-FDB9-4C43-B153-727D4B4724D3}"/>
               </a:ext>
             </a:extLst>
           </p:cNvPr>
@@ -10276,7 +10308,7 @@
             <a:pPr algn="ctr">
               <a:defRPr sz="1350" b="1">
                 <a:solidFill>
-                  <a:srgbClr val="2563EB"/>
+                  <a:srgbClr val="52677D"/>
                 </a:solidFill>
                 <a:latin typeface="Helvetica Neue"/>
                 <a:ea typeface="Helvetica Neue"/>
@@ -10286,7 +10318,7 @@
             <a:r>
               <a:rPr sz="1350" b="1">
                 <a:solidFill>
-                  <a:srgbClr val="2563EB"/>
+                  <a:srgbClr val="52677D"/>
                 </a:solidFill>
                 <a:latin typeface="Helvetica Neue"/>
                 <a:ea typeface="Helvetica Neue"/>
@@ -10302,7 +10334,7 @@
           <p:cNvPr id="11" name="">
             <a:extLst xmlns:a="http://schemas.openxmlformats.org/drawingml/2006/main">
               <a:ext uri="{FF2B5EF4-FFF2-40B4-BE49-F238E27FC236}">
-                <a16:creationId xmlns:a16="http://schemas.microsoft.com/office/drawing/2014/main" id="{8BDF98C1-2CE3-46CB-91DA-709F7CA815B9}"/>
+                <a16:creationId xmlns:a16="http://schemas.microsoft.com/office/drawing/2014/main" id="{41138AC2-D692-4864-9FD2-8FC99D86284E}"/>
               </a:ext>
             </a:extLst>
           </p:cNvPr>
@@ -10333,7 +10365,7 @@
             <a:pPr algn="l">
               <a:defRPr sz="1575" b="0">
                 <a:solidFill>
-                  <a:srgbClr val="10213D"/>
+                  <a:srgbClr val="0F1A2B"/>
                 </a:solidFill>
                 <a:latin typeface="Helvetica Neue"/>
                 <a:ea typeface="Helvetica Neue"/>
@@ -10343,7 +10375,7 @@
             <a:r>
               <a:rPr sz="1575" b="0">
                 <a:solidFill>
-                  <a:srgbClr val="10213D"/>
+                  <a:srgbClr val="0F1A2B"/>
                 </a:solidFill>
                 <a:latin typeface="Helvetica Neue"/>
                 <a:ea typeface="Helvetica Neue"/>
@@ -10359,7 +10391,7 @@
           <p:cNvPr id="12" name="">
             <a:extLst xmlns:a="http://schemas.openxmlformats.org/drawingml/2006/main">
               <a:ext uri="{FF2B5EF4-FFF2-40B4-BE49-F238E27FC236}">
-                <a16:creationId xmlns:a16="http://schemas.microsoft.com/office/drawing/2014/main" id="{DD0249B6-C22C-455B-8D45-8F57A61C42C2}"/>
+                <a16:creationId xmlns:a16="http://schemas.microsoft.com/office/drawing/2014/main" id="{D2ABC323-AF4C-496E-9DAD-050B3570FE80}"/>
               </a:ext>
             </a:extLst>
           </p:cNvPr>
@@ -10379,7 +10411,7 @@
             </a:avLst>
           </a:prstGeom>
           <a:solidFill xmlns:a="http://schemas.openxmlformats.org/drawingml/2006/main">
-            <a:srgbClr val="EEF7FF"/>
+            <a:srgbClr val="D1CFC9"/>
           </a:solidFill>
           <a:ln xmlns:a="http://schemas.openxmlformats.org/drawingml/2006/main" w="0">
             <a:noFill/>
@@ -10391,7 +10423,7 @@
           <p:cNvPr id="13" name="">
             <a:extLst xmlns:a="http://schemas.openxmlformats.org/drawingml/2006/main">
               <a:ext uri="{FF2B5EF4-FFF2-40B4-BE49-F238E27FC236}">
-                <a16:creationId xmlns:a16="http://schemas.microsoft.com/office/drawing/2014/main" id="{197E8815-307E-45EE-BB11-4F8127CCABD7}"/>
+                <a16:creationId xmlns:a16="http://schemas.microsoft.com/office/drawing/2014/main" id="{54806D01-7617-4D55-A6A1-78BB1EA8522E}"/>
               </a:ext>
             </a:extLst>
           </p:cNvPr>
@@ -10422,7 +10454,7 @@
             <a:pPr algn="ctr">
               <a:defRPr sz="1350" b="1">
                 <a:solidFill>
-                  <a:srgbClr val="2563EB"/>
+                  <a:srgbClr val="52677D"/>
                 </a:solidFill>
                 <a:latin typeface="Helvetica Neue"/>
                 <a:ea typeface="Helvetica Neue"/>
@@ -10432,7 +10464,7 @@
             <a:r>
               <a:rPr sz="1350" b="1">
                 <a:solidFill>
-                  <a:srgbClr val="2563EB"/>
+                  <a:srgbClr val="52677D"/>
                 </a:solidFill>
                 <a:latin typeface="Helvetica Neue"/>
                 <a:ea typeface="Helvetica Neue"/>
@@ -10448,7 +10480,7 @@
           <p:cNvPr id="14" name="">
             <a:extLst xmlns:a="http://schemas.openxmlformats.org/drawingml/2006/main">
               <a:ext uri="{FF2B5EF4-FFF2-40B4-BE49-F238E27FC236}">
-                <a16:creationId xmlns:a16="http://schemas.microsoft.com/office/drawing/2014/main" id="{EC319E2B-3535-46B0-BB3D-7C21CE52DED7}"/>
+                <a16:creationId xmlns:a16="http://schemas.microsoft.com/office/drawing/2014/main" id="{1B87A358-F057-400A-8C24-87B9E0FAC3C1}"/>
               </a:ext>
             </a:extLst>
           </p:cNvPr>
@@ -10479,7 +10511,7 @@
             <a:pPr algn="l">
               <a:defRPr sz="1575" b="0">
                 <a:solidFill>
-                  <a:srgbClr val="10213D"/>
+                  <a:srgbClr val="0F1A2B"/>
                 </a:solidFill>
                 <a:latin typeface="Helvetica Neue"/>
                 <a:ea typeface="Helvetica Neue"/>
@@ -10489,7 +10521,7 @@
             <a:r>
               <a:rPr sz="1575" b="0">
                 <a:solidFill>
-                  <a:srgbClr val="10213D"/>
+                  <a:srgbClr val="0F1A2B"/>
                 </a:solidFill>
                 <a:latin typeface="Helvetica Neue"/>
                 <a:ea typeface="Helvetica Neue"/>
@@ -10505,7 +10537,7 @@
           <p:cNvPr id="15" name="">
             <a:extLst xmlns:a="http://schemas.openxmlformats.org/drawingml/2006/main">
               <a:ext uri="{FF2B5EF4-FFF2-40B4-BE49-F238E27FC236}">
-                <a16:creationId xmlns:a16="http://schemas.microsoft.com/office/drawing/2014/main" id="{41C12E6A-572A-44DE-8F71-E65A038FC4E0}"/>
+                <a16:creationId xmlns:a16="http://schemas.microsoft.com/office/drawing/2014/main" id="{16CFE02F-4537-4D79-9460-EF100AB2A3B5}"/>
               </a:ext>
             </a:extLst>
           </p:cNvPr>
@@ -10525,7 +10557,7 @@
             </a:avLst>
           </a:prstGeom>
           <a:solidFill xmlns:a="http://schemas.openxmlformats.org/drawingml/2006/main">
-            <a:srgbClr val="EEF7FF"/>
+            <a:srgbClr val="D1CFC9"/>
           </a:solidFill>
           <a:ln xmlns:a="http://schemas.openxmlformats.org/drawingml/2006/main" w="0">
             <a:noFill/>
@@ -10537,7 +10569,7 @@
           <p:cNvPr id="16" name="">
             <a:extLst xmlns:a="http://schemas.openxmlformats.org/drawingml/2006/main">
               <a:ext uri="{FF2B5EF4-FFF2-40B4-BE49-F238E27FC236}">
-                <a16:creationId xmlns:a16="http://schemas.microsoft.com/office/drawing/2014/main" id="{54105D33-60A5-4640-99DE-51F062002E73}"/>
+                <a16:creationId xmlns:a16="http://schemas.microsoft.com/office/drawing/2014/main" id="{06EF136B-7D7F-43F5-ACDF-93350EC7E6A9}"/>
               </a:ext>
             </a:extLst>
           </p:cNvPr>
@@ -10568,7 +10600,7 @@
             <a:pPr algn="l">
               <a:defRPr sz="1125" b="0">
                 <a:solidFill>
-                  <a:srgbClr val="092454"/>
+                  <a:srgbClr val="1C2E4A"/>
                 </a:solidFill>
                 <a:latin typeface="Helvetica Neue"/>
                 <a:ea typeface="Helvetica Neue"/>
@@ -10578,7 +10610,7 @@
             <a:r>
               <a:rPr sz="1125" b="0">
                 <a:solidFill>
-                  <a:srgbClr val="092454"/>
+                  <a:srgbClr val="1C2E4A"/>
                 </a:solidFill>
                 <a:latin typeface="Helvetica Neue"/>
                 <a:ea typeface="Helvetica Neue"/>
@@ -10594,7 +10626,7 @@
           <p:cNvPr id="17" name="">
             <a:extLst xmlns:a="http://schemas.openxmlformats.org/drawingml/2006/main">
               <a:ext uri="{FF2B5EF4-FFF2-40B4-BE49-F238E27FC236}">
-                <a16:creationId xmlns:a16="http://schemas.microsoft.com/office/drawing/2014/main" id="{94991285-9D75-49C6-BB87-122B76ED5FD7}"/>
+                <a16:creationId xmlns:a16="http://schemas.microsoft.com/office/drawing/2014/main" id="{595018ED-8A6B-4F68-B2D3-22601910C94F}"/>
               </a:ext>
             </a:extLst>
           </p:cNvPr>
@@ -10614,7 +10646,7 @@
             </a:avLst>
           </a:prstGeom>
           <a:solidFill xmlns:a="http://schemas.openxmlformats.org/drawingml/2006/main">
-            <a:srgbClr val="092454"/>
+            <a:srgbClr val="1C2E4A"/>
           </a:solidFill>
           <a:ln xmlns:a="http://schemas.openxmlformats.org/drawingml/2006/main" w="0">
             <a:noFill/>
@@ -10626,7 +10658,7 @@
           <p:cNvPr id="18" name="">
             <a:extLst xmlns:a="http://schemas.openxmlformats.org/drawingml/2006/main">
               <a:ext uri="{FF2B5EF4-FFF2-40B4-BE49-F238E27FC236}">
-                <a16:creationId xmlns:a16="http://schemas.microsoft.com/office/drawing/2014/main" id="{03E0DEB4-8B44-41F4-9D09-E66C329984FE}"/>
+                <a16:creationId xmlns:a16="http://schemas.microsoft.com/office/drawing/2014/main" id="{02BFD961-CE3C-4D1F-A294-3DBE171136D7}"/>
               </a:ext>
             </a:extLst>
           </p:cNvPr>
@@ -10657,7 +10689,7 @@
             <a:pPr algn="l">
               <a:defRPr sz="1050" b="1">
                 <a:solidFill>
-                  <a:srgbClr val="FFD43B"/>
+                  <a:srgbClr val="D1CFC9"/>
                 </a:solidFill>
                 <a:latin typeface="Helvetica Neue"/>
                 <a:ea typeface="Helvetica Neue"/>
@@ -10667,7 +10699,7 @@
             <a:r>
               <a:rPr sz="1050" b="1">
                 <a:solidFill>
-                  <a:srgbClr val="FFD43B"/>
+                  <a:srgbClr val="D1CFC9"/>
                 </a:solidFill>
                 <a:latin typeface="Helvetica Neue"/>
                 <a:ea typeface="Helvetica Neue"/>
@@ -10683,7 +10715,7 @@
           <p:cNvPr id="19" name="">
             <a:extLst xmlns:a="http://schemas.openxmlformats.org/drawingml/2006/main">
               <a:ext uri="{FF2B5EF4-FFF2-40B4-BE49-F238E27FC236}">
-                <a16:creationId xmlns:a16="http://schemas.microsoft.com/office/drawing/2014/main" id="{66523FB9-36B8-43E2-BE65-5FD46755FD8B}"/>
+                <a16:creationId xmlns:a16="http://schemas.microsoft.com/office/drawing/2014/main" id="{E4E04829-CCE9-46E4-94E2-D6A11262B2CD}"/>
               </a:ext>
             </a:extLst>
           </p:cNvPr>
@@ -10740,7 +10772,7 @@
           <p:cNvPr id="20" name="">
             <a:extLst xmlns:a="http://schemas.openxmlformats.org/drawingml/2006/main">
               <a:ext uri="{FF2B5EF4-FFF2-40B4-BE49-F238E27FC236}">
-                <a16:creationId xmlns:a16="http://schemas.microsoft.com/office/drawing/2014/main" id="{158C6D68-3447-4FB7-A025-71AB3F6193E3}"/>
+                <a16:creationId xmlns:a16="http://schemas.microsoft.com/office/drawing/2014/main" id="{6733D3A8-15CF-441D-9692-5001EEA7A71A}"/>
               </a:ext>
             </a:extLst>
           </p:cNvPr>
@@ -10771,7 +10803,7 @@
             <a:pPr algn="l">
               <a:defRPr sz="1125" b="0">
                 <a:solidFill>
-                  <a:srgbClr val="BFE6FF"/>
+                  <a:srgbClr val="BDC4D4"/>
                 </a:solidFill>
                 <a:latin typeface="Helvetica Neue"/>
                 <a:ea typeface="Helvetica Neue"/>
@@ -10781,7 +10813,7 @@
             <a:r>
               <a:rPr sz="1125" b="0">
                 <a:solidFill>
-                  <a:srgbClr val="BFE6FF"/>
+                  <a:srgbClr val="BDC4D4"/>
                 </a:solidFill>
                 <a:latin typeface="Helvetica Neue"/>
                 <a:ea typeface="Helvetica Neue"/>
@@ -10797,7 +10829,7 @@
           <p:cNvPr id="21" name="">
             <a:extLst xmlns:a="http://schemas.openxmlformats.org/drawingml/2006/main">
               <a:ext uri="{FF2B5EF4-FFF2-40B4-BE49-F238E27FC236}">
-                <a16:creationId xmlns:a16="http://schemas.microsoft.com/office/drawing/2014/main" id="{1C99E1CB-A8B6-4F15-8966-FC0F6E01B3B5}"/>
+                <a16:creationId xmlns:a16="http://schemas.microsoft.com/office/drawing/2014/main" id="{1B1E4BD2-BA51-42BD-8C81-E562100E6332}"/>
               </a:ext>
             </a:extLst>
           </p:cNvPr>
@@ -10815,7 +10847,7 @@
             <a:avLst/>
           </a:prstGeom>
           <a:solidFill xmlns:a="http://schemas.openxmlformats.org/drawingml/2006/main">
-            <a:srgbClr val="D8E5F2"/>
+            <a:srgbClr val="BDC4D4"/>
           </a:solidFill>
           <a:ln xmlns:a="http://schemas.openxmlformats.org/drawingml/2006/main" w="0">
             <a:noFill/>
@@ -10827,7 +10859,7 @@
           <p:cNvPr id="22" name="">
             <a:extLst xmlns:a="http://schemas.openxmlformats.org/drawingml/2006/main">
               <a:ext uri="{FF2B5EF4-FFF2-40B4-BE49-F238E27FC236}">
-                <a16:creationId xmlns:a16="http://schemas.microsoft.com/office/drawing/2014/main" id="{F0D9A606-6965-4C8B-917C-489D5E82D922}"/>
+                <a16:creationId xmlns:a16="http://schemas.microsoft.com/office/drawing/2014/main" id="{ACAA252B-A901-4171-A478-C3C5AD4E0BA6}"/>
               </a:ext>
             </a:extLst>
           </p:cNvPr>
@@ -10858,7 +10890,7 @@
             <a:pPr algn="l">
               <a:defRPr sz="750" b="0">
                 <a:solidFill>
-                  <a:srgbClr val="61718A"/>
+                  <a:srgbClr val="52677D"/>
                 </a:solidFill>
                 <a:latin typeface="Helvetica Neue"/>
                 <a:ea typeface="Helvetica Neue"/>
@@ -10868,7 +10900,7 @@
             <a:r>
               <a:rPr sz="750" b="0">
                 <a:solidFill>
-                  <a:srgbClr val="61718A"/>
+                  <a:srgbClr val="52677D"/>
                 </a:solidFill>
                 <a:latin typeface="Helvetica Neue"/>
                 <a:ea typeface="Helvetica Neue"/>
@@ -10884,7 +10916,7 @@
           <p:cNvPr id="23" name="">
             <a:extLst xmlns:a="http://schemas.openxmlformats.org/drawingml/2006/main">
               <a:ext uri="{FF2B5EF4-FFF2-40B4-BE49-F238E27FC236}">
-                <a16:creationId xmlns:a16="http://schemas.microsoft.com/office/drawing/2014/main" id="{66D4CBBB-47E2-4325-A27B-F128F776F838}"/>
+                <a16:creationId xmlns:a16="http://schemas.microsoft.com/office/drawing/2014/main" id="{41704587-C835-45FD-8755-AE3B5DDE3A33}"/>
               </a:ext>
             </a:extLst>
           </p:cNvPr>
@@ -10915,7 +10947,7 @@
             <a:pPr algn="r">
               <a:defRPr sz="825" b="1">
                 <a:solidFill>
-                  <a:srgbClr val="2563EB"/>
+                  <a:srgbClr val="52677D"/>
                 </a:solidFill>
                 <a:latin typeface="Helvetica Neue"/>
                 <a:ea typeface="Helvetica Neue"/>
@@ -10925,7 +10957,7 @@
             <a:r>
               <a:rPr sz="825" b="1">
                 <a:solidFill>
-                  <a:srgbClr val="2563EB"/>
+                  <a:srgbClr val="52677D"/>
                 </a:solidFill>
                 <a:latin typeface="Helvetica Neue"/>
                 <a:ea typeface="Helvetica Neue"/>
@@ -10939,7 +10971,7 @@
     </p:spTree>
     <p:extLst>
       <p:ext uri="{BB962C8B-B14F-4D97-AF65-F5344CB8AC3E}">
-        <p14:creationId xmlns:p14="http://schemas.microsoft.com/office/powerpoint/2010/main" val="1833055845"/>
+        <p14:creationId xmlns:p14="http://schemas.microsoft.com/office/powerpoint/2010/main" val="565444327"/>
       </p:ext>
     </p:extLst>
   </p:cSld>
@@ -10970,7 +11002,7 @@
           <p:cNvPr id="24" name="">
             <a:extLst xmlns:a="http://schemas.openxmlformats.org/drawingml/2006/main">
               <a:ext uri="{FF2B5EF4-FFF2-40B4-BE49-F238E27FC236}">
-                <a16:creationId xmlns:a16="http://schemas.microsoft.com/office/drawing/2014/main" id="{8988809C-1531-4005-A3FD-B2E283B38F4D}"/>
+                <a16:creationId xmlns:a16="http://schemas.microsoft.com/office/drawing/2014/main" id="{283A2E57-81DF-4562-9CAA-5F14FD9B4B17}"/>
               </a:ext>
             </a:extLst>
           </p:cNvPr>
@@ -10988,7 +11020,7 @@
             <a:avLst/>
           </a:prstGeom>
           <a:solidFill xmlns:a="http://schemas.openxmlformats.org/drawingml/2006/main">
-            <a:srgbClr val="092454"/>
+            <a:srgbClr val="1C2E4A"/>
           </a:solidFill>
           <a:ln xmlns:a="http://schemas.openxmlformats.org/drawingml/2006/main" w="0">
             <a:noFill/>
@@ -11000,7 +11032,7 @@
           <p:cNvPr id="2" name="">
             <a:extLst xmlns:a="http://schemas.openxmlformats.org/drawingml/2006/main">
               <a:ext uri="{FF2B5EF4-FFF2-40B4-BE49-F238E27FC236}">
-                <a16:creationId xmlns:a16="http://schemas.microsoft.com/office/drawing/2014/main" id="{44EB7505-0BF5-4055-B1DC-3F1E0042C9A8}"/>
+                <a16:creationId xmlns:a16="http://schemas.microsoft.com/office/drawing/2014/main" id="{17D8BDFF-E179-44DC-95E1-787F2DE4263E}"/>
               </a:ext>
             </a:extLst>
           </p:cNvPr>
@@ -11031,7 +11063,7 @@
             <a:pPr algn="l">
               <a:defRPr sz="1125" b="1">
                 <a:solidFill>
-                  <a:srgbClr val="2563EB"/>
+                  <a:srgbClr val="52677D"/>
                 </a:solidFill>
                 <a:latin typeface="Helvetica Neue"/>
                 <a:ea typeface="Helvetica Neue"/>
@@ -11041,7 +11073,7 @@
             <a:r>
               <a:rPr sz="1125" b="1">
                 <a:solidFill>
-                  <a:srgbClr val="2563EB"/>
+                  <a:srgbClr val="52677D"/>
                 </a:solidFill>
                 <a:latin typeface="Helvetica Neue"/>
                 <a:ea typeface="Helvetica Neue"/>
@@ -11057,7 +11089,7 @@
           <p:cNvPr id="3" name="">
             <a:extLst xmlns:a="http://schemas.openxmlformats.org/drawingml/2006/main">
               <a:ext uri="{FF2B5EF4-FFF2-40B4-BE49-F238E27FC236}">
-                <a16:creationId xmlns:a16="http://schemas.microsoft.com/office/drawing/2014/main" id="{E04513A8-1357-4007-9DD6-A6CBB86150A6}"/>
+                <a16:creationId xmlns:a16="http://schemas.microsoft.com/office/drawing/2014/main" id="{7C7EB0DE-0547-4F65-A9CD-D97ADF2FD9B9}"/>
               </a:ext>
             </a:extLst>
           </p:cNvPr>
@@ -11077,7 +11109,7 @@
             </a:avLst>
           </a:prstGeom>
           <a:solidFill xmlns:a="http://schemas.openxmlformats.org/drawingml/2006/main">
-            <a:srgbClr val="FFD43B"/>
+            <a:srgbClr val="D1CFC9"/>
           </a:solidFill>
           <a:ln xmlns:a="http://schemas.openxmlformats.org/drawingml/2006/main" w="0">
             <a:noFill/>
@@ -11089,7 +11121,7 @@
           <p:cNvPr id="4" name="">
             <a:extLst xmlns:a="http://schemas.openxmlformats.org/drawingml/2006/main">
               <a:ext uri="{FF2B5EF4-FFF2-40B4-BE49-F238E27FC236}">
-                <a16:creationId xmlns:a16="http://schemas.microsoft.com/office/drawing/2014/main" id="{A2A3517E-E4B0-4E03-8F75-D5430BE9AAAC}"/>
+                <a16:creationId xmlns:a16="http://schemas.microsoft.com/office/drawing/2014/main" id="{F5BEDCB4-21A8-4122-BB76-9D8E6132A089}"/>
               </a:ext>
             </a:extLst>
           </p:cNvPr>
@@ -11120,7 +11152,7 @@
             <a:pPr algn="ctr">
               <a:defRPr sz="1275" b="1">
                 <a:solidFill>
-                  <a:srgbClr val="092454"/>
+                  <a:srgbClr val="1C2E4A"/>
                 </a:solidFill>
                 <a:latin typeface="Helvetica Neue"/>
                 <a:ea typeface="Helvetica Neue"/>
@@ -11130,7 +11162,7 @@
             <a:r>
               <a:rPr sz="1275" b="1">
                 <a:solidFill>
-                  <a:srgbClr val="092454"/>
+                  <a:srgbClr val="1C2E4A"/>
                 </a:solidFill>
                 <a:latin typeface="Helvetica Neue"/>
                 <a:ea typeface="Helvetica Neue"/>
@@ -11146,7 +11178,7 @@
           <p:cNvPr id="5" name="">
             <a:extLst xmlns:a="http://schemas.openxmlformats.org/drawingml/2006/main">
               <a:ext uri="{FF2B5EF4-FFF2-40B4-BE49-F238E27FC236}">
-                <a16:creationId xmlns:a16="http://schemas.microsoft.com/office/drawing/2014/main" id="{905B8D0A-953A-452E-A832-D7DD1DEF1FD3}"/>
+                <a16:creationId xmlns:a16="http://schemas.microsoft.com/office/drawing/2014/main" id="{53DD4379-33E4-4AA9-8E75-85A7113E20DD}"/>
               </a:ext>
             </a:extLst>
           </p:cNvPr>
@@ -11177,7 +11209,7 @@
             <a:pPr algn="l">
               <a:defRPr sz="2550" b="1">
                 <a:solidFill>
-                  <a:srgbClr val="092454"/>
+                  <a:srgbClr val="1C2E4A"/>
                 </a:solidFill>
                 <a:latin typeface="Helvetica Neue"/>
                 <a:ea typeface="Helvetica Neue"/>
@@ -11187,7 +11219,7 @@
             <a:r>
               <a:rPr sz="2550" b="1">
                 <a:solidFill>
-                  <a:srgbClr val="092454"/>
+                  <a:srgbClr val="1C2E4A"/>
                 </a:solidFill>
                 <a:latin typeface="Helvetica Neue"/>
                 <a:ea typeface="Helvetica Neue"/>
@@ -11203,7 +11235,7 @@
           <p:cNvPr id="6" name="">
             <a:extLst xmlns:a="http://schemas.openxmlformats.org/drawingml/2006/main">
               <a:ext uri="{FF2B5EF4-FFF2-40B4-BE49-F238E27FC236}">
-                <a16:creationId xmlns:a16="http://schemas.microsoft.com/office/drawing/2014/main" id="{EBC2CD1E-A57D-48E3-AAF8-5F10691D2304}"/>
+                <a16:creationId xmlns:a16="http://schemas.microsoft.com/office/drawing/2014/main" id="{CC1D06E2-EF83-4ADF-8113-AFB554871367}"/>
               </a:ext>
             </a:extLst>
           </p:cNvPr>
@@ -11223,7 +11255,7 @@
             </a:avLst>
           </a:prstGeom>
           <a:solidFill xmlns:a="http://schemas.openxmlformats.org/drawingml/2006/main">
-            <a:srgbClr val="EEF7FF"/>
+            <a:srgbClr val="D1CFC9"/>
           </a:solidFill>
           <a:ln xmlns:a="http://schemas.openxmlformats.org/drawingml/2006/main" w="0">
             <a:noFill/>
@@ -11235,7 +11267,7 @@
           <p:cNvPr id="7" name="">
             <a:extLst xmlns:a="http://schemas.openxmlformats.org/drawingml/2006/main">
               <a:ext uri="{FF2B5EF4-FFF2-40B4-BE49-F238E27FC236}">
-                <a16:creationId xmlns:a16="http://schemas.microsoft.com/office/drawing/2014/main" id="{FE36D826-0368-4DA7-9629-9FBAAAD67CAB}"/>
+                <a16:creationId xmlns:a16="http://schemas.microsoft.com/office/drawing/2014/main" id="{4151FC5F-F1A7-4308-86CC-15986AEAAF5A}"/>
               </a:ext>
             </a:extLst>
           </p:cNvPr>
@@ -11266,7 +11298,7 @@
             <a:pPr algn="ctr">
               <a:defRPr sz="1350" b="1">
                 <a:solidFill>
-                  <a:srgbClr val="2563EB"/>
+                  <a:srgbClr val="52677D"/>
                 </a:solidFill>
                 <a:latin typeface="Helvetica Neue"/>
                 <a:ea typeface="Helvetica Neue"/>
@@ -11276,7 +11308,7 @@
             <a:r>
               <a:rPr sz="1350" b="1">
                 <a:solidFill>
-                  <a:srgbClr val="2563EB"/>
+                  <a:srgbClr val="52677D"/>
                 </a:solidFill>
                 <a:latin typeface="Helvetica Neue"/>
                 <a:ea typeface="Helvetica Neue"/>
@@ -11292,7 +11324,7 @@
           <p:cNvPr id="8" name="">
             <a:extLst xmlns:a="http://schemas.openxmlformats.org/drawingml/2006/main">
               <a:ext uri="{FF2B5EF4-FFF2-40B4-BE49-F238E27FC236}">
-                <a16:creationId xmlns:a16="http://schemas.microsoft.com/office/drawing/2014/main" id="{178ED1B2-CF3B-456D-9B8A-B6BB5E19397A}"/>
+                <a16:creationId xmlns:a16="http://schemas.microsoft.com/office/drawing/2014/main" id="{16659432-21DF-46C1-80CA-B2BDD4071CE7}"/>
               </a:ext>
             </a:extLst>
           </p:cNvPr>
@@ -11323,7 +11355,7 @@
             <a:pPr algn="l">
               <a:defRPr sz="1575" b="0">
                 <a:solidFill>
-                  <a:srgbClr val="10213D"/>
+                  <a:srgbClr val="0F1A2B"/>
                 </a:solidFill>
                 <a:latin typeface="Helvetica Neue"/>
                 <a:ea typeface="Helvetica Neue"/>
@@ -11333,7 +11365,7 @@
             <a:r>
               <a:rPr sz="1575" b="0">
                 <a:solidFill>
-                  <a:srgbClr val="10213D"/>
+                  <a:srgbClr val="0F1A2B"/>
                 </a:solidFill>
                 <a:latin typeface="Helvetica Neue"/>
                 <a:ea typeface="Helvetica Neue"/>
@@ -11349,7 +11381,7 @@
           <p:cNvPr id="9" name="">
             <a:extLst xmlns:a="http://schemas.openxmlformats.org/drawingml/2006/main">
               <a:ext uri="{FF2B5EF4-FFF2-40B4-BE49-F238E27FC236}">
-                <a16:creationId xmlns:a16="http://schemas.microsoft.com/office/drawing/2014/main" id="{CA22B89A-9AE2-4169-9509-41F02875BD18}"/>
+                <a16:creationId xmlns:a16="http://schemas.microsoft.com/office/drawing/2014/main" id="{BCACCCA6-D535-4585-B30B-91E013CE6620}"/>
               </a:ext>
             </a:extLst>
           </p:cNvPr>
@@ -11369,7 +11401,7 @@
             </a:avLst>
           </a:prstGeom>
           <a:solidFill xmlns:a="http://schemas.openxmlformats.org/drawingml/2006/main">
-            <a:srgbClr val="EEF7FF"/>
+            <a:srgbClr val="D1CFC9"/>
           </a:solidFill>
           <a:ln xmlns:a="http://schemas.openxmlformats.org/drawingml/2006/main" w="0">
             <a:noFill/>
@@ -11381,7 +11413,7 @@
           <p:cNvPr id="10" name="">
             <a:extLst xmlns:a="http://schemas.openxmlformats.org/drawingml/2006/main">
               <a:ext uri="{FF2B5EF4-FFF2-40B4-BE49-F238E27FC236}">
-                <a16:creationId xmlns:a16="http://schemas.microsoft.com/office/drawing/2014/main" id="{BC2A1CDD-CB22-4AA6-945D-98704445CCBC}"/>
+                <a16:creationId xmlns:a16="http://schemas.microsoft.com/office/drawing/2014/main" id="{E6836F8B-682D-4C57-8368-6AB8B4B0EBA8}"/>
               </a:ext>
             </a:extLst>
           </p:cNvPr>
@@ -11412,7 +11444,7 @@
             <a:pPr algn="ctr">
               <a:defRPr sz="1350" b="1">
                 <a:solidFill>
-                  <a:srgbClr val="2563EB"/>
+                  <a:srgbClr val="52677D"/>
                 </a:solidFill>
                 <a:latin typeface="Helvetica Neue"/>
                 <a:ea typeface="Helvetica Neue"/>
@@ -11422,7 +11454,7 @@
             <a:r>
               <a:rPr sz="1350" b="1">
                 <a:solidFill>
-                  <a:srgbClr val="2563EB"/>
+                  <a:srgbClr val="52677D"/>
                 </a:solidFill>
                 <a:latin typeface="Helvetica Neue"/>
                 <a:ea typeface="Helvetica Neue"/>
@@ -11438,7 +11470,7 @@
           <p:cNvPr id="11" name="">
             <a:extLst xmlns:a="http://schemas.openxmlformats.org/drawingml/2006/main">
               <a:ext uri="{FF2B5EF4-FFF2-40B4-BE49-F238E27FC236}">
-                <a16:creationId xmlns:a16="http://schemas.microsoft.com/office/drawing/2014/main" id="{056C00B6-B459-48BA-95A6-93823918240F}"/>
+                <a16:creationId xmlns:a16="http://schemas.microsoft.com/office/drawing/2014/main" id="{7F3CB18C-63D2-4E3C-B0EF-85357E6D6FA0}"/>
               </a:ext>
             </a:extLst>
           </p:cNvPr>
@@ -11469,7 +11501,7 @@
             <a:pPr algn="l">
               <a:defRPr sz="1575" b="0">
                 <a:solidFill>
-                  <a:srgbClr val="10213D"/>
+                  <a:srgbClr val="0F1A2B"/>
                 </a:solidFill>
                 <a:latin typeface="Helvetica Neue"/>
                 <a:ea typeface="Helvetica Neue"/>
@@ -11479,7 +11511,7 @@
             <a:r>
               <a:rPr sz="1575" b="0">
                 <a:solidFill>
-                  <a:srgbClr val="10213D"/>
+                  <a:srgbClr val="0F1A2B"/>
                 </a:solidFill>
                 <a:latin typeface="Helvetica Neue"/>
                 <a:ea typeface="Helvetica Neue"/>
@@ -11495,7 +11527,7 @@
           <p:cNvPr id="12" name="">
             <a:extLst xmlns:a="http://schemas.openxmlformats.org/drawingml/2006/main">
               <a:ext uri="{FF2B5EF4-FFF2-40B4-BE49-F238E27FC236}">
-                <a16:creationId xmlns:a16="http://schemas.microsoft.com/office/drawing/2014/main" id="{4BDA5463-3115-481A-8C36-4DBB12DC7633}"/>
+                <a16:creationId xmlns:a16="http://schemas.microsoft.com/office/drawing/2014/main" id="{8DDC0734-A4AA-427F-854A-A0D8BD123A62}"/>
               </a:ext>
             </a:extLst>
           </p:cNvPr>
@@ -11515,7 +11547,7 @@
             </a:avLst>
           </a:prstGeom>
           <a:solidFill xmlns:a="http://schemas.openxmlformats.org/drawingml/2006/main">
-            <a:srgbClr val="EEF7FF"/>
+            <a:srgbClr val="D1CFC9"/>
           </a:solidFill>
           <a:ln xmlns:a="http://schemas.openxmlformats.org/drawingml/2006/main" w="0">
             <a:noFill/>
@@ -11527,7 +11559,7 @@
           <p:cNvPr id="13" name="">
             <a:extLst xmlns:a="http://schemas.openxmlformats.org/drawingml/2006/main">
               <a:ext uri="{FF2B5EF4-FFF2-40B4-BE49-F238E27FC236}">
-                <a16:creationId xmlns:a16="http://schemas.microsoft.com/office/drawing/2014/main" id="{78F5ED9D-6FD4-4516-9041-1C942AF8F452}"/>
+                <a16:creationId xmlns:a16="http://schemas.microsoft.com/office/drawing/2014/main" id="{CE789B25-D89A-437D-AA4F-E85579C6C80E}"/>
               </a:ext>
             </a:extLst>
           </p:cNvPr>
@@ -11558,7 +11590,7 @@
             <a:pPr algn="ctr">
               <a:defRPr sz="1350" b="1">
                 <a:solidFill>
-                  <a:srgbClr val="2563EB"/>
+                  <a:srgbClr val="52677D"/>
                 </a:solidFill>
                 <a:latin typeface="Helvetica Neue"/>
                 <a:ea typeface="Helvetica Neue"/>
@@ -11568,7 +11600,7 @@
             <a:r>
               <a:rPr sz="1350" b="1">
                 <a:solidFill>
-                  <a:srgbClr val="2563EB"/>
+                  <a:srgbClr val="52677D"/>
                 </a:solidFill>
                 <a:latin typeface="Helvetica Neue"/>
                 <a:ea typeface="Helvetica Neue"/>
@@ -11584,7 +11616,7 @@
           <p:cNvPr id="14" name="">
             <a:extLst xmlns:a="http://schemas.openxmlformats.org/drawingml/2006/main">
               <a:ext uri="{FF2B5EF4-FFF2-40B4-BE49-F238E27FC236}">
-                <a16:creationId xmlns:a16="http://schemas.microsoft.com/office/drawing/2014/main" id="{D953AB64-1F19-43BC-882C-722C4D4D4B85}"/>
+                <a16:creationId xmlns:a16="http://schemas.microsoft.com/office/drawing/2014/main" id="{901DE8C9-D057-44F1-9D35-9758F503F738}"/>
               </a:ext>
             </a:extLst>
           </p:cNvPr>
@@ -11615,7 +11647,7 @@
             <a:pPr algn="l">
               <a:defRPr sz="1575" b="0">
                 <a:solidFill>
-                  <a:srgbClr val="10213D"/>
+                  <a:srgbClr val="0F1A2B"/>
                 </a:solidFill>
                 <a:latin typeface="Helvetica Neue"/>
                 <a:ea typeface="Helvetica Neue"/>
@@ -11625,7 +11657,7 @@
             <a:r>
               <a:rPr sz="1575" b="0">
                 <a:solidFill>
-                  <a:srgbClr val="10213D"/>
+                  <a:srgbClr val="0F1A2B"/>
                 </a:solidFill>
                 <a:latin typeface="Helvetica Neue"/>
                 <a:ea typeface="Helvetica Neue"/>
@@ -11641,7 +11673,7 @@
           <p:cNvPr id="15" name="">
             <a:extLst xmlns:a="http://schemas.openxmlformats.org/drawingml/2006/main">
               <a:ext uri="{FF2B5EF4-FFF2-40B4-BE49-F238E27FC236}">
-                <a16:creationId xmlns:a16="http://schemas.microsoft.com/office/drawing/2014/main" id="{1B6E2F47-0634-4F40-A741-E78B5DA94A79}"/>
+                <a16:creationId xmlns:a16="http://schemas.microsoft.com/office/drawing/2014/main" id="{82990FCE-A5DF-435E-8D17-3E22C4886229}"/>
               </a:ext>
             </a:extLst>
           </p:cNvPr>
@@ -11661,7 +11693,7 @@
             </a:avLst>
           </a:prstGeom>
           <a:solidFill xmlns:a="http://schemas.openxmlformats.org/drawingml/2006/main">
-            <a:srgbClr val="EEF7FF"/>
+            <a:srgbClr val="D1CFC9"/>
           </a:solidFill>
           <a:ln xmlns:a="http://schemas.openxmlformats.org/drawingml/2006/main" w="0">
             <a:noFill/>
@@ -11673,7 +11705,7 @@
           <p:cNvPr id="16" name="">
             <a:extLst xmlns:a="http://schemas.openxmlformats.org/drawingml/2006/main">
               <a:ext uri="{FF2B5EF4-FFF2-40B4-BE49-F238E27FC236}">
-                <a16:creationId xmlns:a16="http://schemas.microsoft.com/office/drawing/2014/main" id="{3431B411-F0DF-4BE8-976F-ED77D3C3C688}"/>
+                <a16:creationId xmlns:a16="http://schemas.microsoft.com/office/drawing/2014/main" id="{77F8A473-661D-42B1-BA3D-6E1F8BFD4DDA}"/>
               </a:ext>
             </a:extLst>
           </p:cNvPr>
@@ -11704,7 +11736,7 @@
             <a:pPr algn="l">
               <a:defRPr sz="1125" b="0">
                 <a:solidFill>
-                  <a:srgbClr val="092454"/>
+                  <a:srgbClr val="1C2E4A"/>
                 </a:solidFill>
                 <a:latin typeface="Helvetica Neue"/>
                 <a:ea typeface="Helvetica Neue"/>
@@ -11714,7 +11746,7 @@
             <a:r>
               <a:rPr sz="1125" b="0">
                 <a:solidFill>
-                  <a:srgbClr val="092454"/>
+                  <a:srgbClr val="1C2E4A"/>
                 </a:solidFill>
                 <a:latin typeface="Helvetica Neue"/>
                 <a:ea typeface="Helvetica Neue"/>
@@ -11730,7 +11762,7 @@
           <p:cNvPr id="17" name="">
             <a:extLst xmlns:a="http://schemas.openxmlformats.org/drawingml/2006/main">
               <a:ext uri="{FF2B5EF4-FFF2-40B4-BE49-F238E27FC236}">
-                <a16:creationId xmlns:a16="http://schemas.microsoft.com/office/drawing/2014/main" id="{2040922B-5CD5-4824-A907-0DEA7AA095DA}"/>
+                <a16:creationId xmlns:a16="http://schemas.microsoft.com/office/drawing/2014/main" id="{974000C0-0E78-4501-8F0E-4EB4B7DA0F20}"/>
               </a:ext>
             </a:extLst>
           </p:cNvPr>
@@ -11750,7 +11782,7 @@
             </a:avLst>
           </a:prstGeom>
           <a:solidFill xmlns:a="http://schemas.openxmlformats.org/drawingml/2006/main">
-            <a:srgbClr val="092454"/>
+            <a:srgbClr val="1C2E4A"/>
           </a:solidFill>
           <a:ln xmlns:a="http://schemas.openxmlformats.org/drawingml/2006/main" w="0">
             <a:noFill/>
@@ -11762,7 +11794,7 @@
           <p:cNvPr id="18" name="">
             <a:extLst xmlns:a="http://schemas.openxmlformats.org/drawingml/2006/main">
               <a:ext uri="{FF2B5EF4-FFF2-40B4-BE49-F238E27FC236}">
-                <a16:creationId xmlns:a16="http://schemas.microsoft.com/office/drawing/2014/main" id="{982037F9-ACCE-4503-81CB-A565CD7E48B0}"/>
+                <a16:creationId xmlns:a16="http://schemas.microsoft.com/office/drawing/2014/main" id="{053A97BC-3FA2-4D5C-A835-FF2393BDB0F4}"/>
               </a:ext>
             </a:extLst>
           </p:cNvPr>
@@ -11793,7 +11825,7 @@
             <a:pPr algn="l">
               <a:defRPr sz="1050" b="1">
                 <a:solidFill>
-                  <a:srgbClr val="FFD43B"/>
+                  <a:srgbClr val="D1CFC9"/>
                 </a:solidFill>
                 <a:latin typeface="Helvetica Neue"/>
                 <a:ea typeface="Helvetica Neue"/>
@@ -11803,7 +11835,7 @@
             <a:r>
               <a:rPr sz="1050" b="1">
                 <a:solidFill>
-                  <a:srgbClr val="FFD43B"/>
+                  <a:srgbClr val="D1CFC9"/>
                 </a:solidFill>
                 <a:latin typeface="Helvetica Neue"/>
                 <a:ea typeface="Helvetica Neue"/>
@@ -11819,7 +11851,7 @@
           <p:cNvPr id="19" name="">
             <a:extLst xmlns:a="http://schemas.openxmlformats.org/drawingml/2006/main">
               <a:ext uri="{FF2B5EF4-FFF2-40B4-BE49-F238E27FC236}">
-                <a16:creationId xmlns:a16="http://schemas.microsoft.com/office/drawing/2014/main" id="{F3D7F8AE-D4E7-4712-A924-1DA91B208F31}"/>
+                <a16:creationId xmlns:a16="http://schemas.microsoft.com/office/drawing/2014/main" id="{D46700BC-E988-4D45-A2A9-F2B15C6AFC38}"/>
               </a:ext>
             </a:extLst>
           </p:cNvPr>
@@ -11876,7 +11908,7 @@
           <p:cNvPr id="20" name="">
             <a:extLst xmlns:a="http://schemas.openxmlformats.org/drawingml/2006/main">
               <a:ext uri="{FF2B5EF4-FFF2-40B4-BE49-F238E27FC236}">
-                <a16:creationId xmlns:a16="http://schemas.microsoft.com/office/drawing/2014/main" id="{60BDA5E3-50A8-43BF-AF88-C40EF54727A9}"/>
+                <a16:creationId xmlns:a16="http://schemas.microsoft.com/office/drawing/2014/main" id="{6AF245F1-4840-4C6A-A646-0B2AB4B223AA}"/>
               </a:ext>
             </a:extLst>
           </p:cNvPr>
@@ -11907,7 +11939,7 @@
             <a:pPr algn="l">
               <a:defRPr sz="1125" b="0">
                 <a:solidFill>
-                  <a:srgbClr val="BFE6FF"/>
+                  <a:srgbClr val="BDC4D4"/>
                 </a:solidFill>
                 <a:latin typeface="Helvetica Neue"/>
                 <a:ea typeface="Helvetica Neue"/>
@@ -11917,7 +11949,7 @@
             <a:r>
               <a:rPr sz="1125" b="0">
                 <a:solidFill>
-                  <a:srgbClr val="BFE6FF"/>
+                  <a:srgbClr val="BDC4D4"/>
                 </a:solidFill>
                 <a:latin typeface="Helvetica Neue"/>
                 <a:ea typeface="Helvetica Neue"/>
@@ -11933,7 +11965,7 @@
           <p:cNvPr id="21" name="">
             <a:extLst xmlns:a="http://schemas.openxmlformats.org/drawingml/2006/main">
               <a:ext uri="{FF2B5EF4-FFF2-40B4-BE49-F238E27FC236}">
-                <a16:creationId xmlns:a16="http://schemas.microsoft.com/office/drawing/2014/main" id="{0C91D8C1-3FF2-4D16-8448-291464AA2655}"/>
+                <a16:creationId xmlns:a16="http://schemas.microsoft.com/office/drawing/2014/main" id="{F82D7A6B-D0CE-4CC1-A33C-EB02E904868E}"/>
               </a:ext>
             </a:extLst>
           </p:cNvPr>
@@ -11951,7 +11983,7 @@
             <a:avLst/>
           </a:prstGeom>
           <a:solidFill xmlns:a="http://schemas.openxmlformats.org/drawingml/2006/main">
-            <a:srgbClr val="D8E5F2"/>
+            <a:srgbClr val="BDC4D4"/>
           </a:solidFill>
           <a:ln xmlns:a="http://schemas.openxmlformats.org/drawingml/2006/main" w="0">
             <a:noFill/>
@@ -11963,7 +11995,7 @@
           <p:cNvPr id="22" name="">
             <a:extLst xmlns:a="http://schemas.openxmlformats.org/drawingml/2006/main">
               <a:ext uri="{FF2B5EF4-FFF2-40B4-BE49-F238E27FC236}">
-                <a16:creationId xmlns:a16="http://schemas.microsoft.com/office/drawing/2014/main" id="{8BE39FBD-5268-48B8-9DB0-D7A74BAA7B83}"/>
+                <a16:creationId xmlns:a16="http://schemas.microsoft.com/office/drawing/2014/main" id="{AD513561-7EB3-4743-ABF0-A8F000DD43EA}"/>
               </a:ext>
             </a:extLst>
           </p:cNvPr>
@@ -11994,7 +12026,7 @@
             <a:pPr algn="l">
               <a:defRPr sz="750" b="0">
                 <a:solidFill>
-                  <a:srgbClr val="61718A"/>
+                  <a:srgbClr val="52677D"/>
                 </a:solidFill>
                 <a:latin typeface="Helvetica Neue"/>
                 <a:ea typeface="Helvetica Neue"/>
@@ -12004,7 +12036,7 @@
             <a:r>
               <a:rPr sz="750" b="0">
                 <a:solidFill>
-                  <a:srgbClr val="61718A"/>
+                  <a:srgbClr val="52677D"/>
                 </a:solidFill>
                 <a:latin typeface="Helvetica Neue"/>
                 <a:ea typeface="Helvetica Neue"/>
@@ -12020,7 +12052,7 @@
           <p:cNvPr id="23" name="">
             <a:extLst xmlns:a="http://schemas.openxmlformats.org/drawingml/2006/main">
               <a:ext uri="{FF2B5EF4-FFF2-40B4-BE49-F238E27FC236}">
-                <a16:creationId xmlns:a16="http://schemas.microsoft.com/office/drawing/2014/main" id="{EFAD5BF8-2E09-47A4-BFF4-9F00B1D744DC}"/>
+                <a16:creationId xmlns:a16="http://schemas.microsoft.com/office/drawing/2014/main" id="{217EFBDE-8EF2-4CD3-8809-6C1EC6F9796B}"/>
               </a:ext>
             </a:extLst>
           </p:cNvPr>
@@ -12051,7 +12083,7 @@
             <a:pPr algn="r">
               <a:defRPr sz="825" b="1">
                 <a:solidFill>
-                  <a:srgbClr val="2563EB"/>
+                  <a:srgbClr val="52677D"/>
                 </a:solidFill>
                 <a:latin typeface="Helvetica Neue"/>
                 <a:ea typeface="Helvetica Neue"/>
@@ -12061,7 +12093,7 @@
             <a:r>
               <a:rPr sz="825" b="1">
                 <a:solidFill>
-                  <a:srgbClr val="2563EB"/>
+                  <a:srgbClr val="52677D"/>
                 </a:solidFill>
                 <a:latin typeface="Helvetica Neue"/>
                 <a:ea typeface="Helvetica Neue"/>
@@ -12075,7 +12107,7 @@
     </p:spTree>
     <p:extLst>
       <p:ext uri="{BB962C8B-B14F-4D97-AF65-F5344CB8AC3E}">
-        <p14:creationId xmlns:p14="http://schemas.microsoft.com/office/powerpoint/2010/main" val="1490993438"/>
+        <p14:creationId xmlns:p14="http://schemas.microsoft.com/office/powerpoint/2010/main" val="1994551931"/>
       </p:ext>
     </p:extLst>
   </p:cSld>
@@ -12088,7 +12120,7 @@
     <p:bg>
       <p:bgPr>
         <a:solidFill xmlns:a="http://schemas.openxmlformats.org/drawingml/2006/main">
-          <a:srgbClr val="092454"/>
+          <a:srgbClr val="1C2E4A"/>
         </a:solidFill>
       </p:bgPr>
     </p:bg>
@@ -12106,7 +12138,7 @@
           <p:cNvPr id="20" name="">
             <a:extLst xmlns:a="http://schemas.openxmlformats.org/drawingml/2006/main">
               <a:ext uri="{FF2B5EF4-FFF2-40B4-BE49-F238E27FC236}">
-                <a16:creationId xmlns:a16="http://schemas.microsoft.com/office/drawing/2014/main" id="{88B58EED-4DD5-46B4-BA82-C429B956ADA3}"/>
+                <a16:creationId xmlns:a16="http://schemas.microsoft.com/office/drawing/2014/main" id="{976ACEB7-5E40-4A62-AB98-5D7E432025FD}"/>
               </a:ext>
             </a:extLst>
           </p:cNvPr>
@@ -12137,7 +12169,7 @@
             <a:pPr algn="l">
               <a:defRPr sz="1125" b="1">
                 <a:solidFill>
-                  <a:srgbClr val="FFD43B"/>
+                  <a:srgbClr val="D1CFC9"/>
                 </a:solidFill>
                 <a:latin typeface="Helvetica Neue"/>
                 <a:ea typeface="Helvetica Neue"/>
@@ -12147,7 +12179,7 @@
             <a:r>
               <a:rPr sz="1125" b="1">
                 <a:solidFill>
-                  <a:srgbClr val="FFD43B"/>
+                  <a:srgbClr val="D1CFC9"/>
                 </a:solidFill>
                 <a:latin typeface="Helvetica Neue"/>
                 <a:ea typeface="Helvetica Neue"/>
@@ -12163,7 +12195,7 @@
           <p:cNvPr id="2" name="">
             <a:extLst xmlns:a="http://schemas.openxmlformats.org/drawingml/2006/main">
               <a:ext uri="{FF2B5EF4-FFF2-40B4-BE49-F238E27FC236}">
-                <a16:creationId xmlns:a16="http://schemas.microsoft.com/office/drawing/2014/main" id="{EA58E594-2412-4D5B-83F9-2D15BA06B2F6}"/>
+                <a16:creationId xmlns:a16="http://schemas.microsoft.com/office/drawing/2014/main" id="{CA09637D-7B22-4A2A-A95A-CD41C036BA80}"/>
               </a:ext>
             </a:extLst>
           </p:cNvPr>
@@ -12220,7 +12252,7 @@
           <p:cNvPr id="3" name="">
             <a:extLst xmlns:a="http://schemas.openxmlformats.org/drawingml/2006/main">
               <a:ext uri="{FF2B5EF4-FFF2-40B4-BE49-F238E27FC236}">
-                <a16:creationId xmlns:a16="http://schemas.microsoft.com/office/drawing/2014/main" id="{4AB6EDB1-3FE9-49F7-9B9C-5B58C15EB058}"/>
+                <a16:creationId xmlns:a16="http://schemas.microsoft.com/office/drawing/2014/main" id="{D3A823FB-39D3-464D-ABAE-8C9C498D60EA}"/>
               </a:ext>
             </a:extLst>
           </p:cNvPr>
@@ -12240,7 +12272,7 @@
             </a:avLst>
           </a:prstGeom>
           <a:solidFill xmlns:a="http://schemas.openxmlformats.org/drawingml/2006/main">
-            <a:srgbClr val="FFD43B"/>
+            <a:srgbClr val="D1CFC9"/>
           </a:solidFill>
           <a:ln xmlns:a="http://schemas.openxmlformats.org/drawingml/2006/main" w="0">
             <a:noFill/>
@@ -12252,7 +12284,7 @@
           <p:cNvPr id="4" name="">
             <a:extLst xmlns:a="http://schemas.openxmlformats.org/drawingml/2006/main">
               <a:ext uri="{FF2B5EF4-FFF2-40B4-BE49-F238E27FC236}">
-                <a16:creationId xmlns:a16="http://schemas.microsoft.com/office/drawing/2014/main" id="{C46C9F3B-F15C-46ED-B1C5-A503C41F5006}"/>
+                <a16:creationId xmlns:a16="http://schemas.microsoft.com/office/drawing/2014/main" id="{C7AFF9F6-4479-4C71-89D6-49BBD84ED078}"/>
               </a:ext>
             </a:extLst>
           </p:cNvPr>
@@ -12283,7 +12315,7 @@
             <a:pPr algn="ctr">
               <a:defRPr sz="1275" b="1">
                 <a:solidFill>
-                  <a:srgbClr val="092454"/>
+                  <a:srgbClr val="1C2E4A"/>
                 </a:solidFill>
                 <a:latin typeface="Helvetica Neue"/>
                 <a:ea typeface="Helvetica Neue"/>
@@ -12293,7 +12325,7 @@
             <a:r>
               <a:rPr sz="1275" b="1">
                 <a:solidFill>
-                  <a:srgbClr val="092454"/>
+                  <a:srgbClr val="1C2E4A"/>
                 </a:solidFill>
                 <a:latin typeface="Helvetica Neue"/>
                 <a:ea typeface="Helvetica Neue"/>
@@ -12309,7 +12341,7 @@
           <p:cNvPr id="5" name="">
             <a:extLst xmlns:a="http://schemas.openxmlformats.org/drawingml/2006/main">
               <a:ext uri="{FF2B5EF4-FFF2-40B4-BE49-F238E27FC236}">
-                <a16:creationId xmlns:a16="http://schemas.microsoft.com/office/drawing/2014/main" id="{93C59522-6120-412F-8352-828A1F7C0C2C}"/>
+                <a16:creationId xmlns:a16="http://schemas.microsoft.com/office/drawing/2014/main" id="{F7102F5C-8F9F-4D9F-B557-DF1F425916AC}"/>
               </a:ext>
             </a:extLst>
           </p:cNvPr>
@@ -12340,7 +12372,7 @@
             <a:pPr algn="l">
               <a:defRPr sz="1950" b="1">
                 <a:solidFill>
-                  <a:srgbClr val="FFD43B"/>
+                  <a:srgbClr val="D1CFC9"/>
                 </a:solidFill>
                 <a:latin typeface="Helvetica Neue"/>
                 <a:ea typeface="Helvetica Neue"/>
@@ -12350,7 +12382,7 @@
             <a:r>
               <a:rPr sz="1950" b="1">
                 <a:solidFill>
-                  <a:srgbClr val="FFD43B"/>
+                  <a:srgbClr val="D1CFC9"/>
                 </a:solidFill>
                 <a:latin typeface="Helvetica Neue"/>
                 <a:ea typeface="Helvetica Neue"/>
@@ -12366,7 +12398,7 @@
           <p:cNvPr id="6" name="">
             <a:extLst xmlns:a="http://schemas.openxmlformats.org/drawingml/2006/main">
               <a:ext uri="{FF2B5EF4-FFF2-40B4-BE49-F238E27FC236}">
-                <a16:creationId xmlns:a16="http://schemas.microsoft.com/office/drawing/2014/main" id="{EFF16D1D-A767-47D2-B8AE-27216467C8ED}"/>
+                <a16:creationId xmlns:a16="http://schemas.microsoft.com/office/drawing/2014/main" id="{CD74F4B0-9B99-4A5D-8B3F-9929ADC936C1}"/>
               </a:ext>
             </a:extLst>
           </p:cNvPr>
@@ -12423,7 +12455,7 @@
           <p:cNvPr id="7" name="">
             <a:extLst xmlns:a="http://schemas.openxmlformats.org/drawingml/2006/main">
               <a:ext uri="{FF2B5EF4-FFF2-40B4-BE49-F238E27FC236}">
-                <a16:creationId xmlns:a16="http://schemas.microsoft.com/office/drawing/2014/main" id="{C5F522A2-95E7-41BA-AD8B-726D510367C5}"/>
+                <a16:creationId xmlns:a16="http://schemas.microsoft.com/office/drawing/2014/main" id="{ABF87F91-B830-4F7A-89FD-36B18A6BEFB8}"/>
               </a:ext>
             </a:extLst>
           </p:cNvPr>
@@ -12454,7 +12486,7 @@
             <a:pPr algn="l">
               <a:defRPr sz="1950" b="1">
                 <a:solidFill>
-                  <a:srgbClr val="FFD43B"/>
+                  <a:srgbClr val="D1CFC9"/>
                 </a:solidFill>
                 <a:latin typeface="Helvetica Neue"/>
                 <a:ea typeface="Helvetica Neue"/>
@@ -12464,7 +12496,7 @@
             <a:r>
               <a:rPr sz="1950" b="1">
                 <a:solidFill>
-                  <a:srgbClr val="FFD43B"/>
+                  <a:srgbClr val="D1CFC9"/>
                 </a:solidFill>
                 <a:latin typeface="Helvetica Neue"/>
                 <a:ea typeface="Helvetica Neue"/>
@@ -12480,7 +12512,7 @@
           <p:cNvPr id="8" name="">
             <a:extLst xmlns:a="http://schemas.openxmlformats.org/drawingml/2006/main">
               <a:ext uri="{FF2B5EF4-FFF2-40B4-BE49-F238E27FC236}">
-                <a16:creationId xmlns:a16="http://schemas.microsoft.com/office/drawing/2014/main" id="{C5C721D1-0AC1-44C9-9C85-0C5713E9B7BB}"/>
+                <a16:creationId xmlns:a16="http://schemas.microsoft.com/office/drawing/2014/main" id="{72C940D1-C601-4C3A-9053-537477913D9C}"/>
               </a:ext>
             </a:extLst>
           </p:cNvPr>
@@ -12537,7 +12569,7 @@
           <p:cNvPr id="9" name="">
             <a:extLst xmlns:a="http://schemas.openxmlformats.org/drawingml/2006/main">
               <a:ext uri="{FF2B5EF4-FFF2-40B4-BE49-F238E27FC236}">
-                <a16:creationId xmlns:a16="http://schemas.microsoft.com/office/drawing/2014/main" id="{E1D36D03-7A8A-4D16-BFE3-8227BD4DFCDB}"/>
+                <a16:creationId xmlns:a16="http://schemas.microsoft.com/office/drawing/2014/main" id="{BCC86B3B-9A94-4539-B69A-54DBB3676838}"/>
               </a:ext>
             </a:extLst>
           </p:cNvPr>
@@ -12568,7 +12600,7 @@
             <a:pPr algn="l">
               <a:defRPr sz="1950" b="1">
                 <a:solidFill>
-                  <a:srgbClr val="FFD43B"/>
+                  <a:srgbClr val="D1CFC9"/>
                 </a:solidFill>
                 <a:latin typeface="Helvetica Neue"/>
                 <a:ea typeface="Helvetica Neue"/>
@@ -12578,7 +12610,7 @@
             <a:r>
               <a:rPr sz="1950" b="1">
                 <a:solidFill>
-                  <a:srgbClr val="FFD43B"/>
+                  <a:srgbClr val="D1CFC9"/>
                 </a:solidFill>
                 <a:latin typeface="Helvetica Neue"/>
                 <a:ea typeface="Helvetica Neue"/>
@@ -12594,7 +12626,7 @@
           <p:cNvPr id="10" name="">
             <a:extLst xmlns:a="http://schemas.openxmlformats.org/drawingml/2006/main">
               <a:ext uri="{FF2B5EF4-FFF2-40B4-BE49-F238E27FC236}">
-                <a16:creationId xmlns:a16="http://schemas.microsoft.com/office/drawing/2014/main" id="{79A75084-001E-4BFF-B061-01A28C5CF956}"/>
+                <a16:creationId xmlns:a16="http://schemas.microsoft.com/office/drawing/2014/main" id="{23E5724A-D2F8-4381-8B15-FDE6B9A8B178}"/>
               </a:ext>
             </a:extLst>
           </p:cNvPr>
@@ -12651,7 +12683,7 @@
           <p:cNvPr id="11" name="">
             <a:extLst xmlns:a="http://schemas.openxmlformats.org/drawingml/2006/main">
               <a:ext uri="{FF2B5EF4-FFF2-40B4-BE49-F238E27FC236}">
-                <a16:creationId xmlns:a16="http://schemas.microsoft.com/office/drawing/2014/main" id="{95670F60-BC9A-40FB-ACAE-683CA4AA8B36}"/>
+                <a16:creationId xmlns:a16="http://schemas.microsoft.com/office/drawing/2014/main" id="{795B8C16-3A81-4419-A2DA-F641C65CD185}"/>
               </a:ext>
             </a:extLst>
           </p:cNvPr>
@@ -12682,7 +12714,7 @@
             <a:pPr algn="l">
               <a:defRPr sz="1950" b="1">
                 <a:solidFill>
-                  <a:srgbClr val="FFD43B"/>
+                  <a:srgbClr val="D1CFC9"/>
                 </a:solidFill>
                 <a:latin typeface="Helvetica Neue"/>
                 <a:ea typeface="Helvetica Neue"/>
@@ -12692,7 +12724,7 @@
             <a:r>
               <a:rPr sz="1950" b="1">
                 <a:solidFill>
-                  <a:srgbClr val="FFD43B"/>
+                  <a:srgbClr val="D1CFC9"/>
                 </a:solidFill>
                 <a:latin typeface="Helvetica Neue"/>
                 <a:ea typeface="Helvetica Neue"/>
@@ -12708,7 +12740,7 @@
           <p:cNvPr id="12" name="">
             <a:extLst xmlns:a="http://schemas.openxmlformats.org/drawingml/2006/main">
               <a:ext uri="{FF2B5EF4-FFF2-40B4-BE49-F238E27FC236}">
-                <a16:creationId xmlns:a16="http://schemas.microsoft.com/office/drawing/2014/main" id="{0B44EADD-F545-46DF-820E-940B42A031A9}"/>
+                <a16:creationId xmlns:a16="http://schemas.microsoft.com/office/drawing/2014/main" id="{25E3FEF0-0288-41FC-A997-F1D53EC67D94}"/>
               </a:ext>
             </a:extLst>
           </p:cNvPr>
@@ -12765,7 +12797,7 @@
           <p:cNvPr id="13" name="">
             <a:extLst xmlns:a="http://schemas.openxmlformats.org/drawingml/2006/main">
               <a:ext uri="{FF2B5EF4-FFF2-40B4-BE49-F238E27FC236}">
-                <a16:creationId xmlns:a16="http://schemas.microsoft.com/office/drawing/2014/main" id="{CCDE5108-7C42-491E-8115-EAD1066314C7}"/>
+                <a16:creationId xmlns:a16="http://schemas.microsoft.com/office/drawing/2014/main" id="{D5A9CDB4-2A9D-436A-8E0C-3319821ABA96}"/>
               </a:ext>
             </a:extLst>
           </p:cNvPr>
@@ -12785,7 +12817,7 @@
             </a:avLst>
           </a:prstGeom>
           <a:solidFill xmlns:a="http://schemas.openxmlformats.org/drawingml/2006/main">
-            <a:srgbClr val="FFD43B"/>
+            <a:srgbClr val="D1CFC9"/>
           </a:solidFill>
           <a:ln xmlns:a="http://schemas.openxmlformats.org/drawingml/2006/main" w="0">
             <a:noFill/>
@@ -12797,7 +12829,7 @@
           <p:cNvPr id="14" name="">
             <a:extLst xmlns:a="http://schemas.openxmlformats.org/drawingml/2006/main">
               <a:ext uri="{FF2B5EF4-FFF2-40B4-BE49-F238E27FC236}">
-                <a16:creationId xmlns:a16="http://schemas.microsoft.com/office/drawing/2014/main" id="{FA600021-E90A-452D-BCA5-E8D4C4DF2616}"/>
+                <a16:creationId xmlns:a16="http://schemas.microsoft.com/office/drawing/2014/main" id="{F487F561-07DB-4A19-9C44-B952A8B9FED2}"/>
               </a:ext>
             </a:extLst>
           </p:cNvPr>
@@ -12828,7 +12860,7 @@
             <a:pPr algn="ctr">
               <a:defRPr sz="1050" b="1">
                 <a:solidFill>
-                  <a:srgbClr val="092454"/>
+                  <a:srgbClr val="1C2E4A"/>
                 </a:solidFill>
                 <a:latin typeface="Helvetica Neue"/>
                 <a:ea typeface="Helvetica Neue"/>
@@ -12838,7 +12870,7 @@
             <a:r>
               <a:rPr sz="1050" b="1">
                 <a:solidFill>
-                  <a:srgbClr val="092454"/>
+                  <a:srgbClr val="1C2E4A"/>
                 </a:solidFill>
                 <a:latin typeface="Helvetica Neue"/>
                 <a:ea typeface="Helvetica Neue"/>
@@ -12854,7 +12886,7 @@
           <p:cNvPr id="15" name="">
             <a:extLst xmlns:a="http://schemas.openxmlformats.org/drawingml/2006/main">
               <a:ext uri="{FF2B5EF4-FFF2-40B4-BE49-F238E27FC236}">
-                <a16:creationId xmlns:a16="http://schemas.microsoft.com/office/drawing/2014/main" id="{1BD1A287-8D38-4FEF-84B9-5A043BD51B4E}"/>
+                <a16:creationId xmlns:a16="http://schemas.microsoft.com/office/drawing/2014/main" id="{24F9A68D-2AD2-4D70-B4F2-DAEB33951794}"/>
               </a:ext>
             </a:extLst>
           </p:cNvPr>
@@ -12885,7 +12917,7 @@
             <a:pPr algn="ctr">
               <a:defRPr sz="2250" b="1">
                 <a:solidFill>
-                  <a:srgbClr val="092454"/>
+                  <a:srgbClr val="1C2E4A"/>
                 </a:solidFill>
                 <a:latin typeface="Helvetica Neue"/>
                 <a:ea typeface="Helvetica Neue"/>
@@ -12895,7 +12927,7 @@
             <a:r>
               <a:rPr sz="2250" b="1">
                 <a:solidFill>
-                  <a:srgbClr val="092454"/>
+                  <a:srgbClr val="1C2E4A"/>
                 </a:solidFill>
                 <a:latin typeface="Helvetica Neue"/>
                 <a:ea typeface="Helvetica Neue"/>
@@ -12908,7 +12940,7 @@
             <a:pPr algn="ctr">
               <a:defRPr sz="2250" b="1">
                 <a:solidFill>
-                  <a:srgbClr val="092454"/>
+                  <a:srgbClr val="1C2E4A"/>
                 </a:solidFill>
                 <a:latin typeface="Helvetica Neue"/>
                 <a:ea typeface="Helvetica Neue"/>
@@ -12918,7 +12950,7 @@
             <a:r>
               <a:rPr sz="2250" b="1">
                 <a:solidFill>
-                  <a:srgbClr val="092454"/>
+                  <a:srgbClr val="1C2E4A"/>
                 </a:solidFill>
                 <a:latin typeface="Helvetica Neue"/>
                 <a:ea typeface="Helvetica Neue"/>
@@ -12931,7 +12963,7 @@
             <a:pPr algn="ctr">
               <a:defRPr sz="2250" b="1">
                 <a:solidFill>
-                  <a:srgbClr val="092454"/>
+                  <a:srgbClr val="1C2E4A"/>
                 </a:solidFill>
                 <a:latin typeface="Helvetica Neue"/>
                 <a:ea typeface="Helvetica Neue"/>
@@ -12941,7 +12973,7 @@
             <a:r>
               <a:rPr sz="2250" b="1">
                 <a:solidFill>
-                  <a:srgbClr val="092454"/>
+                  <a:srgbClr val="1C2E4A"/>
                 </a:solidFill>
                 <a:latin typeface="Helvetica Neue"/>
                 <a:ea typeface="Helvetica Neue"/>
@@ -12957,7 +12989,7 @@
           <p:cNvPr id="16" name="">
             <a:extLst xmlns:a="http://schemas.openxmlformats.org/drawingml/2006/main">
               <a:ext uri="{FF2B5EF4-FFF2-40B4-BE49-F238E27FC236}">
-                <a16:creationId xmlns:a16="http://schemas.microsoft.com/office/drawing/2014/main" id="{9C363B83-2ECA-479E-B6EC-5290767C1BC3}"/>
+                <a16:creationId xmlns:a16="http://schemas.microsoft.com/office/drawing/2014/main" id="{6ED23697-F1C0-4937-AC44-B71EF5218061}"/>
               </a:ext>
             </a:extLst>
           </p:cNvPr>
@@ -12988,7 +13020,7 @@
             <a:pPr algn="ctr">
               <a:defRPr sz="1125" b="0">
                 <a:solidFill>
-                  <a:srgbClr val="092454"/>
+                  <a:srgbClr val="1C2E4A"/>
                 </a:solidFill>
                 <a:latin typeface="Helvetica Neue"/>
                 <a:ea typeface="Helvetica Neue"/>
@@ -12998,7 +13030,7 @@
             <a:r>
               <a:rPr sz="1125" b="0">
                 <a:solidFill>
-                  <a:srgbClr val="092454"/>
+                  <a:srgbClr val="1C2E4A"/>
                 </a:solidFill>
                 <a:latin typeface="Helvetica Neue"/>
                 <a:ea typeface="Helvetica Neue"/>
@@ -13014,7 +13046,7 @@
           <p:cNvPr id="17" name="">
             <a:extLst xmlns:a="http://schemas.openxmlformats.org/drawingml/2006/main">
               <a:ext uri="{FF2B5EF4-FFF2-40B4-BE49-F238E27FC236}">
-                <a16:creationId xmlns:a16="http://schemas.microsoft.com/office/drawing/2014/main" id="{3EF9AF76-3AFF-4AE6-9367-752FEA311FF0}"/>
+                <a16:creationId xmlns:a16="http://schemas.microsoft.com/office/drawing/2014/main" id="{ED748BAB-A07F-4F55-864C-368D2BE961AF}"/>
               </a:ext>
             </a:extLst>
           </p:cNvPr>
@@ -13032,7 +13064,7 @@
             <a:avLst/>
           </a:prstGeom>
           <a:solidFill xmlns:a="http://schemas.openxmlformats.org/drawingml/2006/main">
-            <a:srgbClr val="31507E"/>
+            <a:srgbClr val="52677D"/>
           </a:solidFill>
           <a:ln xmlns:a="http://schemas.openxmlformats.org/drawingml/2006/main" w="0">
             <a:noFill/>
@@ -13044,7 +13076,7 @@
           <p:cNvPr id="18" name="">
             <a:extLst xmlns:a="http://schemas.openxmlformats.org/drawingml/2006/main">
               <a:ext uri="{FF2B5EF4-FFF2-40B4-BE49-F238E27FC236}">
-                <a16:creationId xmlns:a16="http://schemas.microsoft.com/office/drawing/2014/main" id="{C85D3008-82A9-499C-8564-60D460EE827C}"/>
+                <a16:creationId xmlns:a16="http://schemas.microsoft.com/office/drawing/2014/main" id="{F2777D9C-FC5A-413B-BB8E-DE5887B800D3}"/>
               </a:ext>
             </a:extLst>
           </p:cNvPr>
@@ -13075,7 +13107,7 @@
             <a:pPr algn="l">
               <a:defRPr sz="750" b="0">
                 <a:solidFill>
-                  <a:srgbClr val="BFE6FF"/>
+                  <a:srgbClr val="BDC4D4"/>
                 </a:solidFill>
                 <a:latin typeface="Helvetica Neue"/>
                 <a:ea typeface="Helvetica Neue"/>
@@ -13085,7 +13117,7 @@
             <a:r>
               <a:rPr sz="750" b="0">
                 <a:solidFill>
-                  <a:srgbClr val="BFE6FF"/>
+                  <a:srgbClr val="BDC4D4"/>
                 </a:solidFill>
                 <a:latin typeface="Helvetica Neue"/>
                 <a:ea typeface="Helvetica Neue"/>
@@ -13101,7 +13133,7 @@
           <p:cNvPr id="19" name="">
             <a:extLst xmlns:a="http://schemas.openxmlformats.org/drawingml/2006/main">
               <a:ext uri="{FF2B5EF4-FFF2-40B4-BE49-F238E27FC236}">
-                <a16:creationId xmlns:a16="http://schemas.microsoft.com/office/drawing/2014/main" id="{49BF3935-A735-45B6-9054-0B18F9DB839B}"/>
+                <a16:creationId xmlns:a16="http://schemas.microsoft.com/office/drawing/2014/main" id="{06B6E266-C15A-4E25-AAB5-2373A70BDA74}"/>
               </a:ext>
             </a:extLst>
           </p:cNvPr>
@@ -13132,7 +13164,7 @@
             <a:pPr algn="r">
               <a:defRPr sz="825" b="1">
                 <a:solidFill>
-                  <a:srgbClr val="FFD43B"/>
+                  <a:srgbClr val="D1CFC9"/>
                 </a:solidFill>
                 <a:latin typeface="Helvetica Neue"/>
                 <a:ea typeface="Helvetica Neue"/>
@@ -13142,7 +13174,7 @@
             <a:r>
               <a:rPr sz="825" b="1">
                 <a:solidFill>
-                  <a:srgbClr val="FFD43B"/>
+                  <a:srgbClr val="D1CFC9"/>
                 </a:solidFill>
                 <a:latin typeface="Helvetica Neue"/>
                 <a:ea typeface="Helvetica Neue"/>
@@ -13156,7 +13188,7 @@
     </p:spTree>
     <p:extLst>
       <p:ext uri="{BB962C8B-B14F-4D97-AF65-F5344CB8AC3E}">
-        <p14:creationId xmlns:p14="http://schemas.microsoft.com/office/powerpoint/2010/main" val="778917270"/>
+        <p14:creationId xmlns:p14="http://schemas.microsoft.com/office/powerpoint/2010/main" val="866155842"/>
       </p:ext>
     </p:extLst>
   </p:cSld>
